--- a/BI-agent研究.pptx
+++ b/BI-agent研究.pptx
@@ -4,43 +4,33 @@
   <p:sldMasterIdLst>
     <p:sldMasterId id="2147483648" r:id="rId1"/>
   </p:sldMasterIdLst>
+  <p:notesMasterIdLst>
+    <p:notesMasterId r:id="rId23"/>
+  </p:notesMasterIdLst>
   <p:sldIdLst>
     <p:sldId id="256" r:id="rId2"/>
     <p:sldId id="257" r:id="rId3"/>
     <p:sldId id="258" r:id="rId4"/>
-    <p:sldId id="259" r:id="rId5"/>
-    <p:sldId id="260" r:id="rId6"/>
-    <p:sldId id="261" r:id="rId7"/>
-    <p:sldId id="262" r:id="rId8"/>
-    <p:sldId id="263" r:id="rId9"/>
-    <p:sldId id="264" r:id="rId10"/>
-    <p:sldId id="265" r:id="rId11"/>
-    <p:sldId id="266" r:id="rId12"/>
-    <p:sldId id="267" r:id="rId13"/>
-    <p:sldId id="268" r:id="rId14"/>
-    <p:sldId id="269" r:id="rId15"/>
-    <p:sldId id="270" r:id="rId16"/>
-    <p:sldId id="271" r:id="rId17"/>
-    <p:sldId id="272" r:id="rId18"/>
-    <p:sldId id="273" r:id="rId19"/>
-    <p:sldId id="274" r:id="rId20"/>
-    <p:sldId id="275" r:id="rId21"/>
-    <p:sldId id="276" r:id="rId22"/>
-    <p:sldId id="277" r:id="rId23"/>
-    <p:sldId id="278" r:id="rId24"/>
-    <p:sldId id="279" r:id="rId25"/>
-    <p:sldId id="280" r:id="rId26"/>
-    <p:sldId id="281" r:id="rId27"/>
-    <p:sldId id="282" r:id="rId28"/>
-    <p:sldId id="283" r:id="rId29"/>
-    <p:sldId id="284" r:id="rId30"/>
-    <p:sldId id="285" r:id="rId31"/>
-    <p:sldId id="286" r:id="rId32"/>
+    <p:sldId id="260" r:id="rId5"/>
+    <p:sldId id="261" r:id="rId6"/>
+    <p:sldId id="263" r:id="rId7"/>
+    <p:sldId id="264" r:id="rId8"/>
+    <p:sldId id="265" r:id="rId9"/>
+    <p:sldId id="266" r:id="rId10"/>
+    <p:sldId id="267" r:id="rId11"/>
+    <p:sldId id="268" r:id="rId12"/>
+    <p:sldId id="270" r:id="rId13"/>
+    <p:sldId id="271" r:id="rId14"/>
+    <p:sldId id="272" r:id="rId15"/>
+    <p:sldId id="273" r:id="rId16"/>
+    <p:sldId id="274" r:id="rId17"/>
+    <p:sldId id="275" r:id="rId18"/>
+    <p:sldId id="276" r:id="rId19"/>
+    <p:sldId id="277" r:id="rId20"/>
+    <p:sldId id="283" r:id="rId21"/>
+    <p:sldId id="286" r:id="rId22"/>
   </p:sldIdLst>
-  <p:notesMasterIdLst>
-    <p:notesMasterId r:id="rId33"/>
-  </p:notesMasterIdLst>
-  <p:sldSz cx="9144000" cy="5143500"/>
+  <p:sldSz cx="9144000" cy="5143500" type="screen16x9"/>
   <p:notesSz cx="5143500" cy="9144000"/>
   <p:defaultTextStyle>
     <a:lvl1pPr marL="0" algn="l" defTabSz="914400" rtl="0" eaLnBrk="1" latinLnBrk="0" hangingPunct="1">
@@ -134,6 +124,11 @@
       </a:defRPr>
     </a:lvl9pPr>
   </p:defaultTextStyle>
+  <p:extLst>
+    <p:ext uri="{EFAFB233-063F-42B5-8137-9DF3F51BA10A}">
+      <p15:sldGuideLst xmlns:p15="http://schemas.microsoft.com/office/powerpoint/2012/main"/>
+    </p:ext>
+  </p:extLst>
 </p:presentation>
 </file>
 
@@ -159,234 +154,10 @@
           <a:chExt cx="0" cy="0"/>
         </a:xfrm>
       </p:grpSpPr>
-      <p:sp>
-        <p:nvSpPr>
-          <p:cNvPr id="2" name="Header Placeholder 1"/>
-          <p:cNvSpPr>
-            <a:spLocks noGrp="1"/>
-          </p:cNvSpPr>
-          <p:nvPr>
-            <p:ph type="hdr" sz="quarter"/>
-          </p:nvPr>
-        </p:nvSpPr>
-        <p:spPr>
-          <a:xfrm>
-            <a:off x="0" y="0"/>
-            <a:ext cx="2971800" cy="458788"/>
-          </a:xfrm>
-          <a:prstGeom prst="rect">
-            <a:avLst/>
-          </a:prstGeom>
-        </p:spPr>
-        <p:txBody>
-          <a:bodyPr vert="horz" lIns="91440" tIns="45720" rIns="91440" bIns="45720" rtlCol="0"/>
-          <a:lstStyle>
-            <a:lvl1pPr algn="l">
-              <a:defRPr sz="1200"/>
-            </a:lvl1pPr>
-          </a:lstStyle>
-          <a:p>
-            <a:endParaRPr lang="en-US"/>
-          </a:p>
-        </p:txBody>
-      </p:sp>
-      <p:sp>
-        <p:nvSpPr>
-          <p:cNvPr id="3" name="Date Placeholder 2"/>
-          <p:cNvSpPr>
-            <a:spLocks noGrp="1"/>
-          </p:cNvSpPr>
-          <p:nvPr>
-            <p:ph type="dt" idx="1"/>
-          </p:nvPr>
-        </p:nvSpPr>
-        <p:spPr>
-          <a:xfrm>
-            <a:off x="3884613" y="0"/>
-            <a:ext cx="2971800" cy="458788"/>
-          </a:xfrm>
-          <a:prstGeom prst="rect">
-            <a:avLst/>
-          </a:prstGeom>
-        </p:spPr>
-        <p:txBody>
-          <a:bodyPr vert="horz" lIns="91440" tIns="45720" rIns="91440" bIns="45720" rtlCol="0"/>
-          <a:lstStyle>
-            <a:lvl1pPr algn="r">
-              <a:defRPr sz="1200"/>
-            </a:lvl1pPr>
-          </a:lstStyle>
-          <a:p>
-            <a:fld id="{5282F153-3F37-0F45-9E97-73ACFA13230C}" type="datetimeFigureOut">
-              <a:rPr lang="en-US"/>
-              <a:t>7/23/19</a:t>
-            </a:fld>
-            <a:endParaRPr lang="en-US"/>
-          </a:p>
-        </p:txBody>
-      </p:sp>
-      <p:sp>
-        <p:nvSpPr>
-          <p:cNvPr id="4" name="Slide Image Placeholder 3"/>
-          <p:cNvSpPr>
-            <a:spLocks noGrp="1" noRot="1" noChangeAspect="1"/>
-          </p:cNvSpPr>
-          <p:nvPr>
-            <p:ph type="sldImg" idx="2"/>
-          </p:nvPr>
-        </p:nvSpPr>
-        <p:spPr>
-          <a:xfrm>
-            <a:off x="685800" y="1143000"/>
-            <a:ext cx="5486400" cy="3086100"/>
-          </a:xfrm>
-          <a:prstGeom prst="rect">
-            <a:avLst/>
-          </a:prstGeom>
-          <a:noFill/>
-          <a:ln w="12700">
-            <a:solidFill>
-              <a:prstClr val="black"/>
-            </a:solidFill>
-          </a:ln>
-        </p:spPr>
-        <p:txBody>
-          <a:bodyPr vert="horz" lIns="91440" tIns="45720" rIns="91440" bIns="45720" rtlCol="0" anchor="ctr"/>
-          <a:lstStyle/>
-          <a:p>
-            <a:endParaRPr lang="en-US"/>
-          </a:p>
-        </p:txBody>
-      </p:sp>
-      <p:sp>
-        <p:nvSpPr>
-          <p:cNvPr id="5" name="Notes Placeholder 4"/>
-          <p:cNvSpPr>
-            <a:spLocks noGrp="1"/>
-          </p:cNvSpPr>
-          <p:nvPr>
-            <p:ph type="body" sz="quarter" idx="3"/>
-          </p:nvPr>
-        </p:nvSpPr>
-        <p:spPr>
-          <a:xfrm>
-            <a:off x="685800" y="4400550"/>
-            <a:ext cx="5486400" cy="3600450"/>
-          </a:xfrm>
-          <a:prstGeom prst="rect">
-            <a:avLst/>
-          </a:prstGeom>
-        </p:spPr>
-        <p:txBody>
-          <a:bodyPr vert="horz" lIns="91440" tIns="45720" rIns="91440" bIns="45720" rtlCol="0"/>
-          <a:lstStyle/>
-          <a:p>
-            <a:pPr lvl="0"/>
-            <a:r>
-              <a:rPr lang="en-US"/>
-              <a:t>Click to edit Master text styles</a:t>
-            </a:r>
-          </a:p>
-          <a:p>
-            <a:pPr lvl="1"/>
-            <a:r>
-              <a:rPr lang="en-US"/>
-              <a:t>Second level</a:t>
-            </a:r>
-          </a:p>
-          <a:p>
-            <a:pPr lvl="2"/>
-            <a:r>
-              <a:rPr lang="en-US"/>
-              <a:t>Third level</a:t>
-            </a:r>
-          </a:p>
-          <a:p>
-            <a:pPr lvl="3"/>
-            <a:r>
-              <a:rPr lang="en-US"/>
-              <a:t>Fourth level</a:t>
-            </a:r>
-          </a:p>
-          <a:p>
-            <a:pPr lvl="4"/>
-            <a:r>
-              <a:rPr lang="en-US"/>
-              <a:t>Fifth level</a:t>
-            </a:r>
-          </a:p>
-        </p:txBody>
-      </p:sp>
-      <p:sp>
-        <p:nvSpPr>
-          <p:cNvPr id="6" name="Footer Placeholder 5"/>
-          <p:cNvSpPr>
-            <a:spLocks noGrp="1"/>
-          </p:cNvSpPr>
-          <p:nvPr>
-            <p:ph type="ftr" sz="quarter" idx="4"/>
-          </p:nvPr>
-        </p:nvSpPr>
-        <p:spPr>
-          <a:xfrm>
-            <a:off x="0" y="8685213"/>
-            <a:ext cx="2971800" cy="458787"/>
-          </a:xfrm>
-          <a:prstGeom prst="rect">
-            <a:avLst/>
-          </a:prstGeom>
-        </p:spPr>
-        <p:txBody>
-          <a:bodyPr vert="horz" lIns="91440" tIns="45720" rIns="91440" bIns="45720" rtlCol="0" anchor="b"/>
-          <a:lstStyle>
-            <a:lvl1pPr algn="l">
-              <a:defRPr sz="1200"/>
-            </a:lvl1pPr>
-          </a:lstStyle>
-          <a:p>
-            <a:endParaRPr lang="en-US"/>
-          </a:p>
-        </p:txBody>
-      </p:sp>
-      <p:sp>
-        <p:nvSpPr>
-          <p:cNvPr id="7" name="Slide Number Placeholder 6"/>
-          <p:cNvSpPr>
-            <a:spLocks noGrp="1"/>
-          </p:cNvSpPr>
-          <p:nvPr>
-            <p:ph type="sldNum" sz="quarter" idx="5"/>
-          </p:nvPr>
-        </p:nvSpPr>
-        <p:spPr>
-          <a:xfrm>
-            <a:off x="3884613" y="8685213"/>
-            <a:ext cx="2971800" cy="458787"/>
-          </a:xfrm>
-          <a:prstGeom prst="rect">
-            <a:avLst/>
-          </a:prstGeom>
-        </p:spPr>
-        <p:txBody>
-          <a:bodyPr vert="horz" lIns="91440" tIns="45720" rIns="91440" bIns="45720" rtlCol="0" anchor="b"/>
-          <a:lstStyle>
-            <a:lvl1pPr algn="r">
-              <a:defRPr sz="1200"/>
-            </a:lvl1pPr>
-          </a:lstStyle>
-          <a:p>
-            <a:fld id="{CE5E9CC1-C706-0F49-92D6-E571CC5EEA8F}" type="slidenum">
-              <a:rPr lang="en-US"/>
-              <a:t>‹#›</a:t>
-            </a:fld>
-            <a:endParaRPr lang="en-US"/>
-          </a:p>
-        </p:txBody>
-      </p:sp>
     </p:spTree>
     <p:extLst>
       <p:ext uri="{BB962C8B-B14F-4D97-AF65-F5344CB8AC3E}">
-        <p14:creationId xmlns:p14="http://schemas.microsoft.com/office/powerpoint/2010/main" val="1024086991"/>
+        <p14:creationId xmlns:p14="http://schemas.microsoft.com/office/powerpoint/2010/main" val="3785070643"/>
       </p:ext>
     </p:extLst>
   </p:cSld>
@@ -530,10 +301,6 @@
           <a:bodyPr/>
           <a:lstStyle/>
           <a:p>
-            <a:r>
-              <a:rPr lang="en-US" dirty="0"/>
-              <a:t/>
-            </a:r>
             <a:endParaRPr lang="en-US" dirty="0"/>
           </a:p>
         </p:txBody>
@@ -618,10 +385,6 @@
           <a:bodyPr/>
           <a:lstStyle/>
           <a:p>
-            <a:r>
-              <a:rPr lang="en-US" dirty="0"/>
-              <a:t/>
-            </a:r>
             <a:endParaRPr lang="en-US" dirty="0"/>
           </a:p>
         </p:txBody>
@@ -706,10 +469,6 @@
           <a:bodyPr/>
           <a:lstStyle/>
           <a:p>
-            <a:r>
-              <a:rPr lang="en-US" dirty="0"/>
-              <a:t/>
-            </a:r>
             <a:endParaRPr lang="en-US" dirty="0"/>
           </a:p>
         </p:txBody>
@@ -794,10 +553,6 @@
           <a:bodyPr/>
           <a:lstStyle/>
           <a:p>
-            <a:r>
-              <a:rPr lang="en-US" dirty="0"/>
-              <a:t/>
-            </a:r>
             <a:endParaRPr lang="en-US" dirty="0"/>
           </a:p>
         </p:txBody>
@@ -882,10 +637,6 @@
           <a:bodyPr/>
           <a:lstStyle/>
           <a:p>
-            <a:r>
-              <a:rPr lang="en-US" dirty="0"/>
-              <a:t/>
-            </a:r>
             <a:endParaRPr lang="en-US" dirty="0"/>
           </a:p>
         </p:txBody>
@@ -970,10 +721,6 @@
           <a:bodyPr/>
           <a:lstStyle/>
           <a:p>
-            <a:r>
-              <a:rPr lang="en-US" dirty="0"/>
-              <a:t/>
-            </a:r>
             <a:endParaRPr lang="en-US" dirty="0"/>
           </a:p>
         </p:txBody>
@@ -1058,10 +805,6 @@
           <a:bodyPr/>
           <a:lstStyle/>
           <a:p>
-            <a:r>
-              <a:rPr lang="en-US" dirty="0"/>
-              <a:t/>
-            </a:r>
             <a:endParaRPr lang="en-US" dirty="0"/>
           </a:p>
         </p:txBody>
@@ -1146,10 +889,6 @@
           <a:bodyPr/>
           <a:lstStyle/>
           <a:p>
-            <a:r>
-              <a:rPr lang="en-US" dirty="0"/>
-              <a:t/>
-            </a:r>
             <a:endParaRPr lang="en-US" dirty="0"/>
           </a:p>
         </p:txBody>
@@ -1234,10 +973,6 @@
           <a:bodyPr/>
           <a:lstStyle/>
           <a:p>
-            <a:r>
-              <a:rPr lang="en-US" dirty="0"/>
-              <a:t/>
-            </a:r>
             <a:endParaRPr lang="en-US" dirty="0"/>
           </a:p>
         </p:txBody>
@@ -1322,10 +1057,6 @@
           <a:bodyPr/>
           <a:lstStyle/>
           <a:p>
-            <a:r>
-              <a:rPr lang="en-US" dirty="0"/>
-              <a:t/>
-            </a:r>
             <a:endParaRPr lang="en-US" dirty="0"/>
           </a:p>
         </p:txBody>
@@ -1410,10 +1141,6 @@
           <a:bodyPr/>
           <a:lstStyle/>
           <a:p>
-            <a:r>
-              <a:rPr lang="en-US" dirty="0"/>
-              <a:t/>
-            </a:r>
             <a:endParaRPr lang="en-US" dirty="0"/>
           </a:p>
         </p:txBody>
@@ -1498,10 +1225,6 @@
           <a:bodyPr/>
           <a:lstStyle/>
           <a:p>
-            <a:r>
-              <a:rPr lang="en-US" dirty="0"/>
-              <a:t/>
-            </a:r>
             <a:endParaRPr lang="en-US" dirty="0"/>
           </a:p>
         </p:txBody>
@@ -1586,10 +1309,6 @@
           <a:bodyPr/>
           <a:lstStyle/>
           <a:p>
-            <a:r>
-              <a:rPr lang="en-US" dirty="0"/>
-              <a:t/>
-            </a:r>
             <a:endParaRPr lang="en-US" dirty="0"/>
           </a:p>
         </p:txBody>
@@ -1674,10 +1393,6 @@
           <a:bodyPr/>
           <a:lstStyle/>
           <a:p>
-            <a:r>
-              <a:rPr lang="en-US" dirty="0"/>
-              <a:t/>
-            </a:r>
             <a:endParaRPr lang="en-US" dirty="0"/>
           </a:p>
         </p:txBody>
@@ -1700,710 +1415,6 @@
             <a:fld id="{F7021451-1387-4CA6-816F-3879F97B5CBC}" type="slidenum">
               <a:rPr lang="en-US"/>
               <a:t>21</a:t>
-            </a:fld>
-            <a:endParaRPr lang="en-US"/>
-          </a:p>
-        </p:txBody>
-      </p:sp>
-    </p:spTree>
-    <p:extLst>
-      <p:ext uri="{BB962C8B-B14F-4D97-AF65-F5344CB8AC3E}">
-        <p14:creationId xmlns:p14="http://schemas.microsoft.com/office/powerpoint/2010/main" val="1024086991"/>
-      </p:ext>
-    </p:extLst>
-  </p:cSld>
-  <p:clrMapOvr>
-    <a:masterClrMapping/>
-  </p:clrMapOvr>
-</p:notes>
-</file>
-
-<file path=ppt/notesSlides/notesSlide22.xml><?xml version="1.0" encoding="utf-8"?>
-<p:notes xmlns:a="http://schemas.openxmlformats.org/drawingml/2006/main" xmlns:r="http://schemas.openxmlformats.org/officeDocument/2006/relationships" xmlns:p="http://schemas.openxmlformats.org/presentationml/2006/main">
-  <p:cSld>
-    <p:spTree>
-      <p:nvGrpSpPr>
-        <p:cNvPr id="1" name=""/>
-        <p:cNvGrpSpPr/>
-        <p:nvPr/>
-      </p:nvGrpSpPr>
-      <p:grpSpPr>
-        <a:xfrm>
-          <a:off x="0" y="0"/>
-          <a:ext cx="0" cy="0"/>
-          <a:chOff x="0" y="0"/>
-          <a:chExt cx="0" cy="0"/>
-        </a:xfrm>
-      </p:grpSpPr>
-      <p:sp>
-        <p:nvSpPr>
-          <p:cNvPr id="2" name="Slide Image Placeholder 1"/>
-          <p:cNvSpPr>
-            <a:spLocks noGrp="1" noRot="1" noChangeAspect="1"/>
-          </p:cNvSpPr>
-          <p:nvPr>
-            <p:ph type="sldImg"/>
-          </p:nvPr>
-        </p:nvSpPr>
-        <p:spPr/>
-      </p:sp>
-      <p:sp>
-        <p:nvSpPr>
-          <p:cNvPr id="3" name="Notes Placeholder 2"/>
-          <p:cNvSpPr>
-            <a:spLocks noGrp="1"/>
-          </p:cNvSpPr>
-          <p:nvPr>
-            <p:ph type="body" idx="1"/>
-          </p:nvPr>
-        </p:nvSpPr>
-        <p:spPr/>
-        <p:txBody>
-          <a:bodyPr/>
-          <a:lstStyle/>
-          <a:p>
-            <a:r>
-              <a:rPr lang="en-US" dirty="0"/>
-              <a:t/>
-            </a:r>
-            <a:endParaRPr lang="en-US" dirty="0"/>
-          </a:p>
-        </p:txBody>
-      </p:sp>
-      <p:sp>
-        <p:nvSpPr>
-          <p:cNvPr id="4" name="Slide Number Placeholder 3"/>
-          <p:cNvSpPr>
-            <a:spLocks noGrp="1"/>
-          </p:cNvSpPr>
-          <p:nvPr>
-            <p:ph type="sldNum" sz="quarter" idx="10"/>
-          </p:nvPr>
-        </p:nvSpPr>
-        <p:spPr/>
-        <p:txBody>
-          <a:bodyPr/>
-          <a:lstStyle/>
-          <a:p>
-            <a:fld id="{F7021451-1387-4CA6-816F-3879F97B5CBC}" type="slidenum">
-              <a:rPr lang="en-US"/>
-              <a:t>22</a:t>
-            </a:fld>
-            <a:endParaRPr lang="en-US"/>
-          </a:p>
-        </p:txBody>
-      </p:sp>
-    </p:spTree>
-    <p:extLst>
-      <p:ext uri="{BB962C8B-B14F-4D97-AF65-F5344CB8AC3E}">
-        <p14:creationId xmlns:p14="http://schemas.microsoft.com/office/powerpoint/2010/main" val="1024086991"/>
-      </p:ext>
-    </p:extLst>
-  </p:cSld>
-  <p:clrMapOvr>
-    <a:masterClrMapping/>
-  </p:clrMapOvr>
-</p:notes>
-</file>
-
-<file path=ppt/notesSlides/notesSlide23.xml><?xml version="1.0" encoding="utf-8"?>
-<p:notes xmlns:a="http://schemas.openxmlformats.org/drawingml/2006/main" xmlns:r="http://schemas.openxmlformats.org/officeDocument/2006/relationships" xmlns:p="http://schemas.openxmlformats.org/presentationml/2006/main">
-  <p:cSld>
-    <p:spTree>
-      <p:nvGrpSpPr>
-        <p:cNvPr id="1" name=""/>
-        <p:cNvGrpSpPr/>
-        <p:nvPr/>
-      </p:nvGrpSpPr>
-      <p:grpSpPr>
-        <a:xfrm>
-          <a:off x="0" y="0"/>
-          <a:ext cx="0" cy="0"/>
-          <a:chOff x="0" y="0"/>
-          <a:chExt cx="0" cy="0"/>
-        </a:xfrm>
-      </p:grpSpPr>
-      <p:sp>
-        <p:nvSpPr>
-          <p:cNvPr id="2" name="Slide Image Placeholder 1"/>
-          <p:cNvSpPr>
-            <a:spLocks noGrp="1" noRot="1" noChangeAspect="1"/>
-          </p:cNvSpPr>
-          <p:nvPr>
-            <p:ph type="sldImg"/>
-          </p:nvPr>
-        </p:nvSpPr>
-        <p:spPr/>
-      </p:sp>
-      <p:sp>
-        <p:nvSpPr>
-          <p:cNvPr id="3" name="Notes Placeholder 2"/>
-          <p:cNvSpPr>
-            <a:spLocks noGrp="1"/>
-          </p:cNvSpPr>
-          <p:nvPr>
-            <p:ph type="body" idx="1"/>
-          </p:nvPr>
-        </p:nvSpPr>
-        <p:spPr/>
-        <p:txBody>
-          <a:bodyPr/>
-          <a:lstStyle/>
-          <a:p>
-            <a:r>
-              <a:rPr lang="en-US" dirty="0"/>
-              <a:t/>
-            </a:r>
-            <a:endParaRPr lang="en-US" dirty="0"/>
-          </a:p>
-        </p:txBody>
-      </p:sp>
-      <p:sp>
-        <p:nvSpPr>
-          <p:cNvPr id="4" name="Slide Number Placeholder 3"/>
-          <p:cNvSpPr>
-            <a:spLocks noGrp="1"/>
-          </p:cNvSpPr>
-          <p:nvPr>
-            <p:ph type="sldNum" sz="quarter" idx="10"/>
-          </p:nvPr>
-        </p:nvSpPr>
-        <p:spPr/>
-        <p:txBody>
-          <a:bodyPr/>
-          <a:lstStyle/>
-          <a:p>
-            <a:fld id="{F7021451-1387-4CA6-816F-3879F97B5CBC}" type="slidenum">
-              <a:rPr lang="en-US"/>
-              <a:t>23</a:t>
-            </a:fld>
-            <a:endParaRPr lang="en-US"/>
-          </a:p>
-        </p:txBody>
-      </p:sp>
-    </p:spTree>
-    <p:extLst>
-      <p:ext uri="{BB962C8B-B14F-4D97-AF65-F5344CB8AC3E}">
-        <p14:creationId xmlns:p14="http://schemas.microsoft.com/office/powerpoint/2010/main" val="1024086991"/>
-      </p:ext>
-    </p:extLst>
-  </p:cSld>
-  <p:clrMapOvr>
-    <a:masterClrMapping/>
-  </p:clrMapOvr>
-</p:notes>
-</file>
-
-<file path=ppt/notesSlides/notesSlide24.xml><?xml version="1.0" encoding="utf-8"?>
-<p:notes xmlns:a="http://schemas.openxmlformats.org/drawingml/2006/main" xmlns:r="http://schemas.openxmlformats.org/officeDocument/2006/relationships" xmlns:p="http://schemas.openxmlformats.org/presentationml/2006/main">
-  <p:cSld>
-    <p:spTree>
-      <p:nvGrpSpPr>
-        <p:cNvPr id="1" name=""/>
-        <p:cNvGrpSpPr/>
-        <p:nvPr/>
-      </p:nvGrpSpPr>
-      <p:grpSpPr>
-        <a:xfrm>
-          <a:off x="0" y="0"/>
-          <a:ext cx="0" cy="0"/>
-          <a:chOff x="0" y="0"/>
-          <a:chExt cx="0" cy="0"/>
-        </a:xfrm>
-      </p:grpSpPr>
-      <p:sp>
-        <p:nvSpPr>
-          <p:cNvPr id="2" name="Slide Image Placeholder 1"/>
-          <p:cNvSpPr>
-            <a:spLocks noGrp="1" noRot="1" noChangeAspect="1"/>
-          </p:cNvSpPr>
-          <p:nvPr>
-            <p:ph type="sldImg"/>
-          </p:nvPr>
-        </p:nvSpPr>
-        <p:spPr/>
-      </p:sp>
-      <p:sp>
-        <p:nvSpPr>
-          <p:cNvPr id="3" name="Notes Placeholder 2"/>
-          <p:cNvSpPr>
-            <a:spLocks noGrp="1"/>
-          </p:cNvSpPr>
-          <p:nvPr>
-            <p:ph type="body" idx="1"/>
-          </p:nvPr>
-        </p:nvSpPr>
-        <p:spPr/>
-        <p:txBody>
-          <a:bodyPr/>
-          <a:lstStyle/>
-          <a:p>
-            <a:r>
-              <a:rPr lang="en-US" dirty="0"/>
-              <a:t/>
-            </a:r>
-            <a:endParaRPr lang="en-US" dirty="0"/>
-          </a:p>
-        </p:txBody>
-      </p:sp>
-      <p:sp>
-        <p:nvSpPr>
-          <p:cNvPr id="4" name="Slide Number Placeholder 3"/>
-          <p:cNvSpPr>
-            <a:spLocks noGrp="1"/>
-          </p:cNvSpPr>
-          <p:nvPr>
-            <p:ph type="sldNum" sz="quarter" idx="10"/>
-          </p:nvPr>
-        </p:nvSpPr>
-        <p:spPr/>
-        <p:txBody>
-          <a:bodyPr/>
-          <a:lstStyle/>
-          <a:p>
-            <a:fld id="{F7021451-1387-4CA6-816F-3879F97B5CBC}" type="slidenum">
-              <a:rPr lang="en-US"/>
-              <a:t>24</a:t>
-            </a:fld>
-            <a:endParaRPr lang="en-US"/>
-          </a:p>
-        </p:txBody>
-      </p:sp>
-    </p:spTree>
-    <p:extLst>
-      <p:ext uri="{BB962C8B-B14F-4D97-AF65-F5344CB8AC3E}">
-        <p14:creationId xmlns:p14="http://schemas.microsoft.com/office/powerpoint/2010/main" val="1024086991"/>
-      </p:ext>
-    </p:extLst>
-  </p:cSld>
-  <p:clrMapOvr>
-    <a:masterClrMapping/>
-  </p:clrMapOvr>
-</p:notes>
-</file>
-
-<file path=ppt/notesSlides/notesSlide25.xml><?xml version="1.0" encoding="utf-8"?>
-<p:notes xmlns:a="http://schemas.openxmlformats.org/drawingml/2006/main" xmlns:r="http://schemas.openxmlformats.org/officeDocument/2006/relationships" xmlns:p="http://schemas.openxmlformats.org/presentationml/2006/main">
-  <p:cSld>
-    <p:spTree>
-      <p:nvGrpSpPr>
-        <p:cNvPr id="1" name=""/>
-        <p:cNvGrpSpPr/>
-        <p:nvPr/>
-      </p:nvGrpSpPr>
-      <p:grpSpPr>
-        <a:xfrm>
-          <a:off x="0" y="0"/>
-          <a:ext cx="0" cy="0"/>
-          <a:chOff x="0" y="0"/>
-          <a:chExt cx="0" cy="0"/>
-        </a:xfrm>
-      </p:grpSpPr>
-      <p:sp>
-        <p:nvSpPr>
-          <p:cNvPr id="2" name="Slide Image Placeholder 1"/>
-          <p:cNvSpPr>
-            <a:spLocks noGrp="1" noRot="1" noChangeAspect="1"/>
-          </p:cNvSpPr>
-          <p:nvPr>
-            <p:ph type="sldImg"/>
-          </p:nvPr>
-        </p:nvSpPr>
-        <p:spPr/>
-      </p:sp>
-      <p:sp>
-        <p:nvSpPr>
-          <p:cNvPr id="3" name="Notes Placeholder 2"/>
-          <p:cNvSpPr>
-            <a:spLocks noGrp="1"/>
-          </p:cNvSpPr>
-          <p:nvPr>
-            <p:ph type="body" idx="1"/>
-          </p:nvPr>
-        </p:nvSpPr>
-        <p:spPr/>
-        <p:txBody>
-          <a:bodyPr/>
-          <a:lstStyle/>
-          <a:p>
-            <a:r>
-              <a:rPr lang="en-US" dirty="0"/>
-              <a:t/>
-            </a:r>
-            <a:endParaRPr lang="en-US" dirty="0"/>
-          </a:p>
-        </p:txBody>
-      </p:sp>
-      <p:sp>
-        <p:nvSpPr>
-          <p:cNvPr id="4" name="Slide Number Placeholder 3"/>
-          <p:cNvSpPr>
-            <a:spLocks noGrp="1"/>
-          </p:cNvSpPr>
-          <p:nvPr>
-            <p:ph type="sldNum" sz="quarter" idx="10"/>
-          </p:nvPr>
-        </p:nvSpPr>
-        <p:spPr/>
-        <p:txBody>
-          <a:bodyPr/>
-          <a:lstStyle/>
-          <a:p>
-            <a:fld id="{F7021451-1387-4CA6-816F-3879F97B5CBC}" type="slidenum">
-              <a:rPr lang="en-US"/>
-              <a:t>25</a:t>
-            </a:fld>
-            <a:endParaRPr lang="en-US"/>
-          </a:p>
-        </p:txBody>
-      </p:sp>
-    </p:spTree>
-    <p:extLst>
-      <p:ext uri="{BB962C8B-B14F-4D97-AF65-F5344CB8AC3E}">
-        <p14:creationId xmlns:p14="http://schemas.microsoft.com/office/powerpoint/2010/main" val="1024086991"/>
-      </p:ext>
-    </p:extLst>
-  </p:cSld>
-  <p:clrMapOvr>
-    <a:masterClrMapping/>
-  </p:clrMapOvr>
-</p:notes>
-</file>
-
-<file path=ppt/notesSlides/notesSlide26.xml><?xml version="1.0" encoding="utf-8"?>
-<p:notes xmlns:a="http://schemas.openxmlformats.org/drawingml/2006/main" xmlns:r="http://schemas.openxmlformats.org/officeDocument/2006/relationships" xmlns:p="http://schemas.openxmlformats.org/presentationml/2006/main">
-  <p:cSld>
-    <p:spTree>
-      <p:nvGrpSpPr>
-        <p:cNvPr id="1" name=""/>
-        <p:cNvGrpSpPr/>
-        <p:nvPr/>
-      </p:nvGrpSpPr>
-      <p:grpSpPr>
-        <a:xfrm>
-          <a:off x="0" y="0"/>
-          <a:ext cx="0" cy="0"/>
-          <a:chOff x="0" y="0"/>
-          <a:chExt cx="0" cy="0"/>
-        </a:xfrm>
-      </p:grpSpPr>
-      <p:sp>
-        <p:nvSpPr>
-          <p:cNvPr id="2" name="Slide Image Placeholder 1"/>
-          <p:cNvSpPr>
-            <a:spLocks noGrp="1" noRot="1" noChangeAspect="1"/>
-          </p:cNvSpPr>
-          <p:nvPr>
-            <p:ph type="sldImg"/>
-          </p:nvPr>
-        </p:nvSpPr>
-        <p:spPr/>
-      </p:sp>
-      <p:sp>
-        <p:nvSpPr>
-          <p:cNvPr id="3" name="Notes Placeholder 2"/>
-          <p:cNvSpPr>
-            <a:spLocks noGrp="1"/>
-          </p:cNvSpPr>
-          <p:nvPr>
-            <p:ph type="body" idx="1"/>
-          </p:nvPr>
-        </p:nvSpPr>
-        <p:spPr/>
-        <p:txBody>
-          <a:bodyPr/>
-          <a:lstStyle/>
-          <a:p>
-            <a:r>
-              <a:rPr lang="en-US" dirty="0"/>
-              <a:t/>
-            </a:r>
-            <a:endParaRPr lang="en-US" dirty="0"/>
-          </a:p>
-        </p:txBody>
-      </p:sp>
-      <p:sp>
-        <p:nvSpPr>
-          <p:cNvPr id="4" name="Slide Number Placeholder 3"/>
-          <p:cNvSpPr>
-            <a:spLocks noGrp="1"/>
-          </p:cNvSpPr>
-          <p:nvPr>
-            <p:ph type="sldNum" sz="quarter" idx="10"/>
-          </p:nvPr>
-        </p:nvSpPr>
-        <p:spPr/>
-        <p:txBody>
-          <a:bodyPr/>
-          <a:lstStyle/>
-          <a:p>
-            <a:fld id="{F7021451-1387-4CA6-816F-3879F97B5CBC}" type="slidenum">
-              <a:rPr lang="en-US"/>
-              <a:t>26</a:t>
-            </a:fld>
-            <a:endParaRPr lang="en-US"/>
-          </a:p>
-        </p:txBody>
-      </p:sp>
-    </p:spTree>
-    <p:extLst>
-      <p:ext uri="{BB962C8B-B14F-4D97-AF65-F5344CB8AC3E}">
-        <p14:creationId xmlns:p14="http://schemas.microsoft.com/office/powerpoint/2010/main" val="1024086991"/>
-      </p:ext>
-    </p:extLst>
-  </p:cSld>
-  <p:clrMapOvr>
-    <a:masterClrMapping/>
-  </p:clrMapOvr>
-</p:notes>
-</file>
-
-<file path=ppt/notesSlides/notesSlide27.xml><?xml version="1.0" encoding="utf-8"?>
-<p:notes xmlns:a="http://schemas.openxmlformats.org/drawingml/2006/main" xmlns:r="http://schemas.openxmlformats.org/officeDocument/2006/relationships" xmlns:p="http://schemas.openxmlformats.org/presentationml/2006/main">
-  <p:cSld>
-    <p:spTree>
-      <p:nvGrpSpPr>
-        <p:cNvPr id="1" name=""/>
-        <p:cNvGrpSpPr/>
-        <p:nvPr/>
-      </p:nvGrpSpPr>
-      <p:grpSpPr>
-        <a:xfrm>
-          <a:off x="0" y="0"/>
-          <a:ext cx="0" cy="0"/>
-          <a:chOff x="0" y="0"/>
-          <a:chExt cx="0" cy="0"/>
-        </a:xfrm>
-      </p:grpSpPr>
-      <p:sp>
-        <p:nvSpPr>
-          <p:cNvPr id="2" name="Slide Image Placeholder 1"/>
-          <p:cNvSpPr>
-            <a:spLocks noGrp="1" noRot="1" noChangeAspect="1"/>
-          </p:cNvSpPr>
-          <p:nvPr>
-            <p:ph type="sldImg"/>
-          </p:nvPr>
-        </p:nvSpPr>
-        <p:spPr/>
-      </p:sp>
-      <p:sp>
-        <p:nvSpPr>
-          <p:cNvPr id="3" name="Notes Placeholder 2"/>
-          <p:cNvSpPr>
-            <a:spLocks noGrp="1"/>
-          </p:cNvSpPr>
-          <p:nvPr>
-            <p:ph type="body" idx="1"/>
-          </p:nvPr>
-        </p:nvSpPr>
-        <p:spPr/>
-        <p:txBody>
-          <a:bodyPr/>
-          <a:lstStyle/>
-          <a:p>
-            <a:r>
-              <a:rPr lang="en-US" dirty="0"/>
-              <a:t/>
-            </a:r>
-            <a:endParaRPr lang="en-US" dirty="0"/>
-          </a:p>
-        </p:txBody>
-      </p:sp>
-      <p:sp>
-        <p:nvSpPr>
-          <p:cNvPr id="4" name="Slide Number Placeholder 3"/>
-          <p:cNvSpPr>
-            <a:spLocks noGrp="1"/>
-          </p:cNvSpPr>
-          <p:nvPr>
-            <p:ph type="sldNum" sz="quarter" idx="10"/>
-          </p:nvPr>
-        </p:nvSpPr>
-        <p:spPr/>
-        <p:txBody>
-          <a:bodyPr/>
-          <a:lstStyle/>
-          <a:p>
-            <a:fld id="{F7021451-1387-4CA6-816F-3879F97B5CBC}" type="slidenum">
-              <a:rPr lang="en-US"/>
-              <a:t>27</a:t>
-            </a:fld>
-            <a:endParaRPr lang="en-US"/>
-          </a:p>
-        </p:txBody>
-      </p:sp>
-    </p:spTree>
-    <p:extLst>
-      <p:ext uri="{BB962C8B-B14F-4D97-AF65-F5344CB8AC3E}">
-        <p14:creationId xmlns:p14="http://schemas.microsoft.com/office/powerpoint/2010/main" val="1024086991"/>
-      </p:ext>
-    </p:extLst>
-  </p:cSld>
-  <p:clrMapOvr>
-    <a:masterClrMapping/>
-  </p:clrMapOvr>
-</p:notes>
-</file>
-
-<file path=ppt/notesSlides/notesSlide28.xml><?xml version="1.0" encoding="utf-8"?>
-<p:notes xmlns:a="http://schemas.openxmlformats.org/drawingml/2006/main" xmlns:r="http://schemas.openxmlformats.org/officeDocument/2006/relationships" xmlns:p="http://schemas.openxmlformats.org/presentationml/2006/main">
-  <p:cSld>
-    <p:spTree>
-      <p:nvGrpSpPr>
-        <p:cNvPr id="1" name=""/>
-        <p:cNvGrpSpPr/>
-        <p:nvPr/>
-      </p:nvGrpSpPr>
-      <p:grpSpPr>
-        <a:xfrm>
-          <a:off x="0" y="0"/>
-          <a:ext cx="0" cy="0"/>
-          <a:chOff x="0" y="0"/>
-          <a:chExt cx="0" cy="0"/>
-        </a:xfrm>
-      </p:grpSpPr>
-      <p:sp>
-        <p:nvSpPr>
-          <p:cNvPr id="2" name="Slide Image Placeholder 1"/>
-          <p:cNvSpPr>
-            <a:spLocks noGrp="1" noRot="1" noChangeAspect="1"/>
-          </p:cNvSpPr>
-          <p:nvPr>
-            <p:ph type="sldImg"/>
-          </p:nvPr>
-        </p:nvSpPr>
-        <p:spPr/>
-      </p:sp>
-      <p:sp>
-        <p:nvSpPr>
-          <p:cNvPr id="3" name="Notes Placeholder 2"/>
-          <p:cNvSpPr>
-            <a:spLocks noGrp="1"/>
-          </p:cNvSpPr>
-          <p:nvPr>
-            <p:ph type="body" idx="1"/>
-          </p:nvPr>
-        </p:nvSpPr>
-        <p:spPr/>
-        <p:txBody>
-          <a:bodyPr/>
-          <a:lstStyle/>
-          <a:p>
-            <a:r>
-              <a:rPr lang="en-US" dirty="0"/>
-              <a:t/>
-            </a:r>
-            <a:endParaRPr lang="en-US" dirty="0"/>
-          </a:p>
-        </p:txBody>
-      </p:sp>
-      <p:sp>
-        <p:nvSpPr>
-          <p:cNvPr id="4" name="Slide Number Placeholder 3"/>
-          <p:cNvSpPr>
-            <a:spLocks noGrp="1"/>
-          </p:cNvSpPr>
-          <p:nvPr>
-            <p:ph type="sldNum" sz="quarter" idx="10"/>
-          </p:nvPr>
-        </p:nvSpPr>
-        <p:spPr/>
-        <p:txBody>
-          <a:bodyPr/>
-          <a:lstStyle/>
-          <a:p>
-            <a:fld id="{F7021451-1387-4CA6-816F-3879F97B5CBC}" type="slidenum">
-              <a:rPr lang="en-US"/>
-              <a:t>28</a:t>
-            </a:fld>
-            <a:endParaRPr lang="en-US"/>
-          </a:p>
-        </p:txBody>
-      </p:sp>
-    </p:spTree>
-    <p:extLst>
-      <p:ext uri="{BB962C8B-B14F-4D97-AF65-F5344CB8AC3E}">
-        <p14:creationId xmlns:p14="http://schemas.microsoft.com/office/powerpoint/2010/main" val="1024086991"/>
-      </p:ext>
-    </p:extLst>
-  </p:cSld>
-  <p:clrMapOvr>
-    <a:masterClrMapping/>
-  </p:clrMapOvr>
-</p:notes>
-</file>
-
-<file path=ppt/notesSlides/notesSlide29.xml><?xml version="1.0" encoding="utf-8"?>
-<p:notes xmlns:a="http://schemas.openxmlformats.org/drawingml/2006/main" xmlns:r="http://schemas.openxmlformats.org/officeDocument/2006/relationships" xmlns:p="http://schemas.openxmlformats.org/presentationml/2006/main">
-  <p:cSld>
-    <p:spTree>
-      <p:nvGrpSpPr>
-        <p:cNvPr id="1" name=""/>
-        <p:cNvGrpSpPr/>
-        <p:nvPr/>
-      </p:nvGrpSpPr>
-      <p:grpSpPr>
-        <a:xfrm>
-          <a:off x="0" y="0"/>
-          <a:ext cx="0" cy="0"/>
-          <a:chOff x="0" y="0"/>
-          <a:chExt cx="0" cy="0"/>
-        </a:xfrm>
-      </p:grpSpPr>
-      <p:sp>
-        <p:nvSpPr>
-          <p:cNvPr id="2" name="Slide Image Placeholder 1"/>
-          <p:cNvSpPr>
-            <a:spLocks noGrp="1" noRot="1" noChangeAspect="1"/>
-          </p:cNvSpPr>
-          <p:nvPr>
-            <p:ph type="sldImg"/>
-          </p:nvPr>
-        </p:nvSpPr>
-        <p:spPr/>
-      </p:sp>
-      <p:sp>
-        <p:nvSpPr>
-          <p:cNvPr id="3" name="Notes Placeholder 2"/>
-          <p:cNvSpPr>
-            <a:spLocks noGrp="1"/>
-          </p:cNvSpPr>
-          <p:nvPr>
-            <p:ph type="body" idx="1"/>
-          </p:nvPr>
-        </p:nvSpPr>
-        <p:spPr/>
-        <p:txBody>
-          <a:bodyPr/>
-          <a:lstStyle/>
-          <a:p>
-            <a:r>
-              <a:rPr lang="en-US" dirty="0"/>
-              <a:t/>
-            </a:r>
-            <a:endParaRPr lang="en-US" dirty="0"/>
-          </a:p>
-        </p:txBody>
-      </p:sp>
-      <p:sp>
-        <p:nvSpPr>
-          <p:cNvPr id="4" name="Slide Number Placeholder 3"/>
-          <p:cNvSpPr>
-            <a:spLocks noGrp="1"/>
-          </p:cNvSpPr>
-          <p:nvPr>
-            <p:ph type="sldNum" sz="quarter" idx="10"/>
-          </p:nvPr>
-        </p:nvSpPr>
-        <p:spPr/>
-        <p:txBody>
-          <a:bodyPr/>
-          <a:lstStyle/>
-          <a:p>
-            <a:fld id="{F7021451-1387-4CA6-816F-3879F97B5CBC}" type="slidenum">
-              <a:rPr lang="en-US"/>
-              <a:t>29</a:t>
             </a:fld>
             <a:endParaRPr lang="en-US"/>
           </a:p>
@@ -2466,10 +1477,6 @@
           <a:bodyPr/>
           <a:lstStyle/>
           <a:p>
-            <a:r>
-              <a:rPr lang="en-US" dirty="0"/>
-              <a:t/>
-            </a:r>
             <a:endParaRPr lang="en-US" dirty="0"/>
           </a:p>
         </p:txBody>
@@ -2492,182 +1499,6 @@
             <a:fld id="{F7021451-1387-4CA6-816F-3879F97B5CBC}" type="slidenum">
               <a:rPr lang="en-US"/>
               <a:t>3</a:t>
-            </a:fld>
-            <a:endParaRPr lang="en-US"/>
-          </a:p>
-        </p:txBody>
-      </p:sp>
-    </p:spTree>
-    <p:extLst>
-      <p:ext uri="{BB962C8B-B14F-4D97-AF65-F5344CB8AC3E}">
-        <p14:creationId xmlns:p14="http://schemas.microsoft.com/office/powerpoint/2010/main" val="1024086991"/>
-      </p:ext>
-    </p:extLst>
-  </p:cSld>
-  <p:clrMapOvr>
-    <a:masterClrMapping/>
-  </p:clrMapOvr>
-</p:notes>
-</file>
-
-<file path=ppt/notesSlides/notesSlide30.xml><?xml version="1.0" encoding="utf-8"?>
-<p:notes xmlns:a="http://schemas.openxmlformats.org/drawingml/2006/main" xmlns:r="http://schemas.openxmlformats.org/officeDocument/2006/relationships" xmlns:p="http://schemas.openxmlformats.org/presentationml/2006/main">
-  <p:cSld>
-    <p:spTree>
-      <p:nvGrpSpPr>
-        <p:cNvPr id="1" name=""/>
-        <p:cNvGrpSpPr/>
-        <p:nvPr/>
-      </p:nvGrpSpPr>
-      <p:grpSpPr>
-        <a:xfrm>
-          <a:off x="0" y="0"/>
-          <a:ext cx="0" cy="0"/>
-          <a:chOff x="0" y="0"/>
-          <a:chExt cx="0" cy="0"/>
-        </a:xfrm>
-      </p:grpSpPr>
-      <p:sp>
-        <p:nvSpPr>
-          <p:cNvPr id="2" name="Slide Image Placeholder 1"/>
-          <p:cNvSpPr>
-            <a:spLocks noGrp="1" noRot="1" noChangeAspect="1"/>
-          </p:cNvSpPr>
-          <p:nvPr>
-            <p:ph type="sldImg"/>
-          </p:nvPr>
-        </p:nvSpPr>
-        <p:spPr/>
-      </p:sp>
-      <p:sp>
-        <p:nvSpPr>
-          <p:cNvPr id="3" name="Notes Placeholder 2"/>
-          <p:cNvSpPr>
-            <a:spLocks noGrp="1"/>
-          </p:cNvSpPr>
-          <p:nvPr>
-            <p:ph type="body" idx="1"/>
-          </p:nvPr>
-        </p:nvSpPr>
-        <p:spPr/>
-        <p:txBody>
-          <a:bodyPr/>
-          <a:lstStyle/>
-          <a:p>
-            <a:r>
-              <a:rPr lang="en-US" dirty="0"/>
-              <a:t/>
-            </a:r>
-            <a:endParaRPr lang="en-US" dirty="0"/>
-          </a:p>
-        </p:txBody>
-      </p:sp>
-      <p:sp>
-        <p:nvSpPr>
-          <p:cNvPr id="4" name="Slide Number Placeholder 3"/>
-          <p:cNvSpPr>
-            <a:spLocks noGrp="1"/>
-          </p:cNvSpPr>
-          <p:nvPr>
-            <p:ph type="sldNum" sz="quarter" idx="10"/>
-          </p:nvPr>
-        </p:nvSpPr>
-        <p:spPr/>
-        <p:txBody>
-          <a:bodyPr/>
-          <a:lstStyle/>
-          <a:p>
-            <a:fld id="{F7021451-1387-4CA6-816F-3879F97B5CBC}" type="slidenum">
-              <a:rPr lang="en-US"/>
-              <a:t>30</a:t>
-            </a:fld>
-            <a:endParaRPr lang="en-US"/>
-          </a:p>
-        </p:txBody>
-      </p:sp>
-    </p:spTree>
-    <p:extLst>
-      <p:ext uri="{BB962C8B-B14F-4D97-AF65-F5344CB8AC3E}">
-        <p14:creationId xmlns:p14="http://schemas.microsoft.com/office/powerpoint/2010/main" val="1024086991"/>
-      </p:ext>
-    </p:extLst>
-  </p:cSld>
-  <p:clrMapOvr>
-    <a:masterClrMapping/>
-  </p:clrMapOvr>
-</p:notes>
-</file>
-
-<file path=ppt/notesSlides/notesSlide31.xml><?xml version="1.0" encoding="utf-8"?>
-<p:notes xmlns:a="http://schemas.openxmlformats.org/drawingml/2006/main" xmlns:r="http://schemas.openxmlformats.org/officeDocument/2006/relationships" xmlns:p="http://schemas.openxmlformats.org/presentationml/2006/main">
-  <p:cSld>
-    <p:spTree>
-      <p:nvGrpSpPr>
-        <p:cNvPr id="1" name=""/>
-        <p:cNvGrpSpPr/>
-        <p:nvPr/>
-      </p:nvGrpSpPr>
-      <p:grpSpPr>
-        <a:xfrm>
-          <a:off x="0" y="0"/>
-          <a:ext cx="0" cy="0"/>
-          <a:chOff x="0" y="0"/>
-          <a:chExt cx="0" cy="0"/>
-        </a:xfrm>
-      </p:grpSpPr>
-      <p:sp>
-        <p:nvSpPr>
-          <p:cNvPr id="2" name="Slide Image Placeholder 1"/>
-          <p:cNvSpPr>
-            <a:spLocks noGrp="1" noRot="1" noChangeAspect="1"/>
-          </p:cNvSpPr>
-          <p:nvPr>
-            <p:ph type="sldImg"/>
-          </p:nvPr>
-        </p:nvSpPr>
-        <p:spPr/>
-      </p:sp>
-      <p:sp>
-        <p:nvSpPr>
-          <p:cNvPr id="3" name="Notes Placeholder 2"/>
-          <p:cNvSpPr>
-            <a:spLocks noGrp="1"/>
-          </p:cNvSpPr>
-          <p:nvPr>
-            <p:ph type="body" idx="1"/>
-          </p:nvPr>
-        </p:nvSpPr>
-        <p:spPr/>
-        <p:txBody>
-          <a:bodyPr/>
-          <a:lstStyle/>
-          <a:p>
-            <a:r>
-              <a:rPr lang="en-US" dirty="0"/>
-              <a:t/>
-            </a:r>
-            <a:endParaRPr lang="en-US" dirty="0"/>
-          </a:p>
-        </p:txBody>
-      </p:sp>
-      <p:sp>
-        <p:nvSpPr>
-          <p:cNvPr id="4" name="Slide Number Placeholder 3"/>
-          <p:cNvSpPr>
-            <a:spLocks noGrp="1"/>
-          </p:cNvSpPr>
-          <p:nvPr>
-            <p:ph type="sldNum" sz="quarter" idx="10"/>
-          </p:nvPr>
-        </p:nvSpPr>
-        <p:spPr/>
-        <p:txBody>
-          <a:bodyPr/>
-          <a:lstStyle/>
-          <a:p>
-            <a:fld id="{F7021451-1387-4CA6-816F-3879F97B5CBC}" type="slidenum">
-              <a:rPr lang="en-US"/>
-              <a:t>31</a:t>
             </a:fld>
             <a:endParaRPr lang="en-US"/>
           </a:p>
@@ -2730,10 +1561,6 @@
           <a:bodyPr/>
           <a:lstStyle/>
           <a:p>
-            <a:r>
-              <a:rPr lang="en-US" dirty="0"/>
-              <a:t/>
-            </a:r>
             <a:endParaRPr lang="en-US" dirty="0"/>
           </a:p>
         </p:txBody>
@@ -2818,10 +1645,6 @@
           <a:bodyPr/>
           <a:lstStyle/>
           <a:p>
-            <a:r>
-              <a:rPr lang="en-US" dirty="0"/>
-              <a:t/>
-            </a:r>
             <a:endParaRPr lang="en-US" dirty="0"/>
           </a:p>
         </p:txBody>
@@ -2906,10 +1729,6 @@
           <a:bodyPr/>
           <a:lstStyle/>
           <a:p>
-            <a:r>
-              <a:rPr lang="en-US" dirty="0"/>
-              <a:t/>
-            </a:r>
             <a:endParaRPr lang="en-US" dirty="0"/>
           </a:p>
         </p:txBody>
@@ -2994,10 +1813,6 @@
           <a:bodyPr/>
           <a:lstStyle/>
           <a:p>
-            <a:r>
-              <a:rPr lang="en-US" dirty="0"/>
-              <a:t/>
-            </a:r>
             <a:endParaRPr lang="en-US" dirty="0"/>
           </a:p>
         </p:txBody>
@@ -3082,10 +1897,6 @@
           <a:bodyPr/>
           <a:lstStyle/>
           <a:p>
-            <a:r>
-              <a:rPr lang="en-US" dirty="0"/>
-              <a:t/>
-            </a:r>
             <a:endParaRPr lang="en-US" dirty="0"/>
           </a:p>
         </p:txBody>
@@ -3170,10 +1981,6 @@
           <a:bodyPr/>
           <a:lstStyle/>
           <a:p>
-            <a:r>
-              <a:rPr lang="en-US" dirty="0"/>
-              <a:t/>
-            </a:r>
             <a:endParaRPr lang="en-US" dirty="0"/>
           </a:p>
         </p:txBody>
@@ -3247,6 +2054,11 @@
 <file path=ppt/slideMasters/slideMaster1.xml><?xml version="1.0" encoding="utf-8"?>
 <p:sldMaster xmlns:a="http://schemas.openxmlformats.org/drawingml/2006/main" xmlns:r="http://schemas.openxmlformats.org/officeDocument/2006/relationships" xmlns:p="http://schemas.openxmlformats.org/presentationml/2006/main">
   <p:cSld>
+    <p:bg>
+      <p:bgRef idx="1001">
+        <a:schemeClr val="bg1"/>
+      </p:bgRef>
+    </p:bg>
     <p:spTree>
       <p:nvGrpSpPr>
         <p:cNvPr id="1" name=""/>
@@ -3527,7 +2339,7 @@
     <p:bg>
       <p:bgPr>
         <a:blipFill dpi="0" rotWithShape="1">
-          <a:blip r:embed="rId1">
+          <a:blip r:embed="rId3">
             <a:lum/>
           </a:blip>
           <a:srcRect/>
@@ -3573,11 +2385,11 @@
           <a:bodyPr wrap="square" rtlCol="0" anchor="ctr"/>
           <a:lstStyle/>
           <a:p>
-            <a:pPr algn="ctr" indent="0" marL="0">
+            <a:pPr marL="0" indent="0" algn="ctr">
               <a:buNone/>
             </a:pPr>
             <a:r>
-              <a:rPr lang="en-US" sz="4800" b="1" dirty="0">
+              <a:rPr lang="zh-CN" altLang="en-US" sz="4800" b="1" dirty="0">
                 <a:solidFill>
                   <a:srgbClr val="F8F9FA"/>
                 </a:solidFill>
@@ -3585,7 +2397,18 @@
                 <a:ea typeface="Segoe UI" pitchFamily="34" charset="-122"/>
                 <a:cs typeface="Segoe UI" pitchFamily="34" charset="-120"/>
               </a:rPr>
-              <a:t>BI × Agent 研究</a:t>
+              <a:t>财务分析</a:t>
+            </a:r>
+            <a:r>
+              <a:rPr lang="en-US" sz="4800" b="1" dirty="0">
+                <a:solidFill>
+                  <a:srgbClr val="F8F9FA"/>
+                </a:solidFill>
+                <a:latin typeface="Segoe UI" pitchFamily="34" charset="0"/>
+                <a:ea typeface="Segoe UI" pitchFamily="34" charset="-122"/>
+                <a:cs typeface="Segoe UI" pitchFamily="34" charset="-120"/>
+              </a:rPr>
+              <a:t> Agent 研究</a:t>
             </a:r>
             <a:endParaRPr lang="en-US" sz="4800" dirty="0"/>
           </a:p>
@@ -3612,7 +2435,7 @@
           <a:bodyPr wrap="square" rtlCol="0" anchor="ctr"/>
           <a:lstStyle/>
           <a:p>
-            <a:pPr algn="ctr" indent="0" marL="0">
+            <a:pPr marL="0" indent="0" algn="ctr">
               <a:buNone/>
             </a:pPr>
             <a:r>
@@ -3648,17 +2471,9 @@
           <a:bodyPr wrap="square" rtlCol="0" anchor="ctr"/>
           <a:lstStyle/>
           <a:p>
-            <a:pPr algn="ctr" indent="0" marL="0">
+            <a:pPr marL="0" indent="0" algn="ctr">
               <a:buNone/>
             </a:pPr>
-            <a:r>
-              <a:rPr lang="en-US" sz="1600" dirty="0">
-                <a:solidFill>
-                  <a:srgbClr val="94A3B8"/>
-                </a:solidFill>
-              </a:rPr>
-              <a:t>2026 技术趋势与实践深度调研</a:t>
-            </a:r>
             <a:endParaRPr lang="en-US" sz="1600" dirty="0"/>
           </a:p>
         </p:txBody>
@@ -3673,12 +2488,13 @@
 
 <file path=ppt/slides/slide10.xml><?xml version="1.0" encoding="utf-8"?>
 <p:sld xmlns:a="http://schemas.openxmlformats.org/drawingml/2006/main" xmlns:r="http://schemas.openxmlformats.org/officeDocument/2006/relationships" xmlns:p="http://schemas.openxmlformats.org/presentationml/2006/main">
-  <p:cSld name="Slide 10">
+  <p:cSld name="Slide 12">
     <p:bg>
       <p:bgPr>
         <a:solidFill>
           <a:srgbClr val="1B1F3B"/>
         </a:solidFill>
+        <a:effectLst/>
       </p:bgPr>
     </p:bg>
     <p:spTree>
@@ -3716,7 +2532,7 @@
           <a:bodyPr wrap="square" rtlCol="0" anchor="ctr"/>
           <a:lstStyle/>
           <a:p>
-            <a:pPr indent="0" marL="0">
+            <a:pPr marL="0" indent="0">
               <a:buNone/>
             </a:pPr>
             <a:r>
@@ -3725,7 +2541,7 @@
                   <a:srgbClr val="00B4D8"/>
                 </a:solidFill>
               </a:rPr>
-              <a:t>dbt 与 WrenAI 的协作关系</a:t>
+              <a:t>什么是语义层 (Semantic Layer)</a:t>
             </a:r>
             <a:endParaRPr lang="en-US" sz="2400" dirty="0"/>
           </a:p>
@@ -3785,7 +2601,7 @@
                   <a:srgbClr val="F8F9FA"/>
                 </a:solidFill>
               </a:rPr>
-              <a:t>• 分工：dbt 负责批量物理建模；WrenAI 负责 Agent 自然语言接口</a:t>
+              <a:t>• 核心能力：统一指标、维度、Join 关系</a:t>
             </a:r>
             <a:endParaRPr lang="en-US" sz="1800" dirty="0"/>
           </a:p>
@@ -3800,7 +2616,7 @@
                   <a:srgbClr val="F8F9FA"/>
                 </a:solidFill>
               </a:rPr>
-              <a:t>• 依赖度：可以没有 dbt (用脚本导入)，但推荐生产栈：</a:t>
+              <a:t>• 查询逻辑：引擎根据定义生成 SQL，避免 BI 与 Agent 各自为战</a:t>
             </a:r>
             <a:endParaRPr lang="en-US" sz="1800" dirty="0"/>
           </a:p>
@@ -3815,7 +2631,7 @@
                   <a:srgbClr val="F8F9FA"/>
                 </a:solidFill>
               </a:rPr>
-              <a:t>  [ dbt marts ] → [ 语义层/Wren MDL ] → [ Agent ]</a:t>
+              <a:t>• 头部工具：</a:t>
             </a:r>
             <a:endParaRPr lang="en-US" sz="1800" dirty="0"/>
           </a:p>
@@ -3830,7 +2646,37 @@
                   <a:srgbClr val="F8F9FA"/>
                 </a:solidFill>
               </a:rPr>
-              <a:t>• WrenAI 主要是 marts 的出口之一，与传统 BI 并行</a:t>
+              <a:t>  - dbt + MetricFlow (指标→SQL)</a:t>
+            </a:r>
+            <a:endParaRPr lang="en-US" sz="1800" dirty="0"/>
+          </a:p>
+          <a:p>
+            <a:pPr marL="342900" indent="-342900">
+              <a:buSzPct val="100000"/>
+              <a:buChar char="•"/>
+            </a:pPr>
+            <a:r>
+              <a:rPr lang="en-US" sz="1800" dirty="0">
+                <a:solidFill>
+                  <a:srgbClr val="F8F9FA"/>
+                </a:solidFill>
+              </a:rPr>
+              <a:t>  - Cube (API、缓存、预聚合)</a:t>
+            </a:r>
+            <a:endParaRPr lang="en-US" sz="1800" dirty="0"/>
+          </a:p>
+          <a:p>
+            <a:pPr marL="342900" indent="-342900">
+              <a:buSzPct val="100000"/>
+              <a:buChar char="•"/>
+            </a:pPr>
+            <a:r>
+              <a:rPr lang="en-US" sz="1800" dirty="0">
+                <a:solidFill>
+                  <a:srgbClr val="F8F9FA"/>
+                </a:solidFill>
+              </a:rPr>
+              <a:t>  - Malloy (语义建模语言 + MCP)</a:t>
             </a:r>
             <a:endParaRPr lang="en-US" sz="1800" dirty="0"/>
           </a:p>
@@ -3846,11 +2692,178 @@
 
 <file path=ppt/slides/slide11.xml><?xml version="1.0" encoding="utf-8"?>
 <p:sld xmlns:a="http://schemas.openxmlformats.org/drawingml/2006/main" xmlns:r="http://schemas.openxmlformats.org/officeDocument/2006/relationships" xmlns:p="http://schemas.openxmlformats.org/presentationml/2006/main">
-  <p:cSld name="Slide 11">
+  <p:cSld name="Slide 13">
+    <p:bg>
+      <p:bgPr>
+        <a:solidFill>
+          <a:srgbClr val="1B1F3B"/>
+        </a:solidFill>
+        <a:effectLst/>
+      </p:bgPr>
+    </p:bg>
+    <p:spTree>
+      <p:nvGrpSpPr>
+        <p:cNvPr id="1" name=""/>
+        <p:cNvGrpSpPr/>
+        <p:nvPr/>
+      </p:nvGrpSpPr>
+      <p:grpSpPr>
+        <a:xfrm>
+          <a:off x="0" y="0"/>
+          <a:ext cx="0" cy="0"/>
+          <a:chOff x="0" y="0"/>
+          <a:chExt cx="0" cy="0"/>
+        </a:xfrm>
+      </p:grpSpPr>
+      <p:sp>
+        <p:nvSpPr>
+          <p:cNvPr id="2" name="Text 0"/>
+          <p:cNvSpPr/>
+          <p:nvPr/>
+        </p:nvSpPr>
+        <p:spPr>
+          <a:xfrm>
+            <a:off x="457200" y="274320"/>
+            <a:ext cx="8229600" cy="0"/>
+          </a:xfrm>
+          <a:prstGeom prst="rect">
+            <a:avLst/>
+          </a:prstGeom>
+          <a:noFill/>
+          <a:ln/>
+        </p:spPr>
+        <p:txBody>
+          <a:bodyPr wrap="square" rtlCol="0" anchor="ctr"/>
+          <a:lstStyle/>
+          <a:p>
+            <a:pPr marL="0" indent="0">
+              <a:buNone/>
+            </a:pPr>
+            <a:r>
+              <a:rPr lang="en-US" sz="2400" b="1" dirty="0">
+                <a:solidFill>
+                  <a:srgbClr val="00B4D8"/>
+                </a:solidFill>
+              </a:rPr>
+              <a:t>消费分歧：人 vs Agent</a:t>
+            </a:r>
+            <a:endParaRPr lang="en-US" sz="2400" dirty="0"/>
+          </a:p>
+        </p:txBody>
+      </p:sp>
+      <p:sp>
+        <p:nvSpPr>
+          <p:cNvPr id="3" name="Shape 1"/>
+          <p:cNvSpPr/>
+          <p:nvPr/>
+        </p:nvSpPr>
+        <p:spPr>
+          <a:xfrm>
+            <a:off x="457200" y="731520"/>
+            <a:ext cx="8229600" cy="0"/>
+          </a:xfrm>
+          <a:prstGeom prst="line">
+            <a:avLst/>
+          </a:prstGeom>
+          <a:noFill/>
+          <a:ln w="25400">
+            <a:solidFill>
+              <a:srgbClr val="00B4D8"/>
+            </a:solidFill>
+            <a:prstDash val="solid"/>
+          </a:ln>
+        </p:spPr>
+      </p:sp>
+      <p:sp>
+        <p:nvSpPr>
+          <p:cNvPr id="4" name="Text 2"/>
+          <p:cNvSpPr/>
+          <p:nvPr/>
+        </p:nvSpPr>
+        <p:spPr>
+          <a:xfrm>
+            <a:off x="457200" y="1097280"/>
+            <a:ext cx="8229600" cy="3600450"/>
+          </a:xfrm>
+          <a:prstGeom prst="rect">
+            <a:avLst/>
+          </a:prstGeom>
+          <a:noFill/>
+          <a:ln/>
+        </p:spPr>
+        <p:txBody>
+          <a:bodyPr wrap="square" rtlCol="0" anchor="t"/>
+          <a:lstStyle/>
+          <a:p>
+            <a:pPr marL="342900" indent="-342900">
+              <a:buSzPct val="100000"/>
+              <a:buChar char="•"/>
+            </a:pPr>
+            <a:r>
+              <a:rPr lang="en-US" sz="1800" dirty="0">
+                <a:solidFill>
+                  <a:srgbClr val="F8F9FA"/>
+                </a:solidFill>
+              </a:rPr>
+              <a:t>• BI (人)：关注图表、看板、协作。消费 marts 表或指标</a:t>
+            </a:r>
+            <a:endParaRPr lang="en-US" sz="1800" dirty="0"/>
+          </a:p>
+          <a:p>
+            <a:pPr marL="342900" indent="-342900">
+              <a:buSzPct val="100000"/>
+              <a:buChar char="•"/>
+            </a:pPr>
+            <a:r>
+              <a:rPr lang="en-US" sz="1800" dirty="0">
+                <a:solidFill>
+                  <a:srgbClr val="F8F9FA"/>
+                </a:solidFill>
+              </a:rPr>
+              <a:t>• Agent：关注 可执行边界 (允许哪些模型/Join/策略/校验)</a:t>
+            </a:r>
+            <a:endParaRPr lang="en-US" sz="1800" dirty="0"/>
+          </a:p>
+          <a:p>
+            <a:pPr marL="342900" indent="-342900">
+              <a:buSzPct val="100000"/>
+              <a:buChar char="•"/>
+            </a:pPr>
+            <a:r>
+              <a:rPr lang="en-US" sz="1800" dirty="0">
+                <a:solidFill>
+                  <a:srgbClr val="F8F9FA"/>
+                </a:solidFill>
+              </a:rPr>
+              <a:t>• 架构演进：从 '单体 BI' 到 '建模+语义+展示+Agent' </a:t>
+            </a:r>
+            <a:r>
+              <a:rPr lang="en-US" sz="1800" dirty="0" err="1">
+                <a:solidFill>
+                  <a:srgbClr val="F8F9FA"/>
+                </a:solidFill>
+              </a:rPr>
+              <a:t>的分层系统</a:t>
+            </a:r>
+            <a:endParaRPr lang="en-US" sz="1800" dirty="0"/>
+          </a:p>
+        </p:txBody>
+      </p:sp>
+    </p:spTree>
+  </p:cSld>
+  <p:clrMapOvr>
+    <a:masterClrMapping/>
+  </p:clrMapOvr>
+</p:sld>
+</file>
+
+<file path=ppt/slides/slide12.xml><?xml version="1.0" encoding="utf-8"?>
+<p:sld xmlns:a="http://schemas.openxmlformats.org/drawingml/2006/main" xmlns:r="http://schemas.openxmlformats.org/officeDocument/2006/relationships" xmlns:p="http://schemas.openxmlformats.org/presentationml/2006/main">
+  <p:cSld name="Slide 15">
     <p:bg>
       <p:bgPr>
         <a:blipFill dpi="0" rotWithShape="1">
-          <a:blip r:embed="rId1">
+          <a:blip r:embed="rId3">
             <a:lum/>
           </a:blip>
           <a:srcRect/>
@@ -3896,7 +2909,7 @@
           <a:bodyPr wrap="square" rtlCol="0" anchor="ctr"/>
           <a:lstStyle/>
           <a:p>
-            <a:pPr algn="ctr" indent="0" marL="0">
+            <a:pPr marL="0" indent="0" algn="ctr">
               <a:buNone/>
             </a:pPr>
             <a:r>
@@ -3905,7 +2918,7 @@
                   <a:srgbClr val="00B4D8"/>
                 </a:solidFill>
               </a:rPr>
-              <a:t>§3. 语义层生态</a:t>
+              <a:t>§4. BI 层</a:t>
             </a:r>
             <a:endParaRPr lang="en-US" sz="3600" dirty="0"/>
           </a:p>
@@ -3932,7 +2945,7 @@
           <a:bodyPr wrap="square" rtlCol="0" anchor="ctr"/>
           <a:lstStyle/>
           <a:p>
-            <a:pPr algn="ctr" indent="0" marL="0">
+            <a:pPr marL="0" indent="0" algn="ctr">
               <a:buNone/>
             </a:pPr>
             <a:r>
@@ -3941,7 +2954,7 @@
                   <a:srgbClr val="94A3B8"/>
                 </a:solidFill>
               </a:rPr>
-              <a:t>定义、竞品与 2025 博弈</a:t>
+              <a:t>给人看的分析与 Excel 的韧性</a:t>
             </a:r>
             <a:endParaRPr lang="en-US" sz="2000" dirty="0"/>
           </a:p>
@@ -3955,14 +2968,15 @@
 </p:sld>
 </file>
 
-<file path=ppt/slides/slide12.xml><?xml version="1.0" encoding="utf-8"?>
+<file path=ppt/slides/slide13.xml><?xml version="1.0" encoding="utf-8"?>
 <p:sld xmlns:a="http://schemas.openxmlformats.org/drawingml/2006/main" xmlns:r="http://schemas.openxmlformats.org/officeDocument/2006/relationships" xmlns:p="http://schemas.openxmlformats.org/presentationml/2006/main">
-  <p:cSld name="Slide 12">
+  <p:cSld name="Slide 16">
     <p:bg>
       <p:bgPr>
         <a:solidFill>
           <a:srgbClr val="1B1F3B"/>
         </a:solidFill>
+        <a:effectLst/>
       </p:bgPr>
     </p:bg>
     <p:spTree>
@@ -4000,7 +3014,7 @@
           <a:bodyPr wrap="square" rtlCol="0" anchor="ctr"/>
           <a:lstStyle/>
           <a:p>
-            <a:pPr indent="0" marL="0">
+            <a:pPr marL="0" indent="0">
               <a:buNone/>
             </a:pPr>
             <a:r>
@@ -4009,7 +3023,7 @@
                   <a:srgbClr val="00B4D8"/>
                 </a:solidFill>
               </a:rPr>
-              <a:t>什么是语义层 (Semantic Layer)</a:t>
+              <a:t>BI 工具生态速查</a:t>
             </a:r>
             <a:endParaRPr lang="en-US" sz="2400" dirty="0"/>
           </a:p>
@@ -4069,7 +3083,7 @@
                   <a:srgbClr val="F8F9FA"/>
                 </a:solidFill>
               </a:rPr>
-              <a:t>• 核心能力：统一指标、维度、Join 关系</a:t>
+              <a:t>• Superset: SQL-first, 强可视化 (72k Stars)</a:t>
             </a:r>
             <a:endParaRPr lang="en-US" sz="1800" dirty="0"/>
           </a:p>
@@ -4084,7 +3098,7 @@
                   <a:srgbClr val="F8F9FA"/>
                 </a:solidFill>
               </a:rPr>
-              <a:t>• 查询逻辑：引擎根据定义生成 SQL，避免 BI 与 Agent 各自为战</a:t>
+              <a:t>• Metabase: 低门槛自助 BI, 业务友好 (44k Stars)</a:t>
             </a:r>
             <a:endParaRPr lang="en-US" sz="1800" dirty="0"/>
           </a:p>
@@ -4099,7 +3113,7 @@
                   <a:srgbClr val="F8F9FA"/>
                 </a:solidFill>
               </a:rPr>
-              <a:t>• 头部工具：</a:t>
+              <a:t>• Rill / Evidence: BI-as-Code, 运营极速看板</a:t>
             </a:r>
             <a:endParaRPr lang="en-US" sz="1800" dirty="0"/>
           </a:p>
@@ -4114,7 +3128,7 @@
                   <a:srgbClr val="F8F9FA"/>
                 </a:solidFill>
               </a:rPr>
-              <a:t>  - dbt + MetricFlow (指标→SQL)</a:t>
+              <a:t>• Grafana: 可观测性/时序监控 (71k Stars)</a:t>
             </a:r>
             <a:endParaRPr lang="en-US" sz="1800" dirty="0"/>
           </a:p>
@@ -4129,195 +3143,7 @@
                   <a:srgbClr val="F8F9FA"/>
                 </a:solidFill>
               </a:rPr>
-              <a:t>  - Cube (API、缓存、预聚合)</a:t>
-            </a:r>
-            <a:endParaRPr lang="en-US" sz="1800" dirty="0"/>
-          </a:p>
-          <a:p>
-            <a:pPr marL="342900" indent="-342900">
-              <a:buSzPct val="100000"/>
-              <a:buChar char="•"/>
-            </a:pPr>
-            <a:r>
-              <a:rPr lang="en-US" sz="1800" dirty="0">
-                <a:solidFill>
-                  <a:srgbClr val="F8F9FA"/>
-                </a:solidFill>
-              </a:rPr>
-              <a:t>  - Malloy (语义建模语言 + MCP)</a:t>
-            </a:r>
-            <a:endParaRPr lang="en-US" sz="1800" dirty="0"/>
-          </a:p>
-        </p:txBody>
-      </p:sp>
-    </p:spTree>
-  </p:cSld>
-  <p:clrMapOvr>
-    <a:masterClrMapping/>
-  </p:clrMapOvr>
-</p:sld>
-</file>
-
-<file path=ppt/slides/slide13.xml><?xml version="1.0" encoding="utf-8"?>
-<p:sld xmlns:a="http://schemas.openxmlformats.org/drawingml/2006/main" xmlns:r="http://schemas.openxmlformats.org/officeDocument/2006/relationships" xmlns:p="http://schemas.openxmlformats.org/presentationml/2006/main">
-  <p:cSld name="Slide 13">
-    <p:bg>
-      <p:bgPr>
-        <a:solidFill>
-          <a:srgbClr val="1B1F3B"/>
-        </a:solidFill>
-      </p:bgPr>
-    </p:bg>
-    <p:spTree>
-      <p:nvGrpSpPr>
-        <p:cNvPr id="1" name=""/>
-        <p:cNvGrpSpPr/>
-        <p:nvPr/>
-      </p:nvGrpSpPr>
-      <p:grpSpPr>
-        <a:xfrm>
-          <a:off x="0" y="0"/>
-          <a:ext cx="0" cy="0"/>
-          <a:chOff x="0" y="0"/>
-          <a:chExt cx="0" cy="0"/>
-        </a:xfrm>
-      </p:grpSpPr>
-      <p:sp>
-        <p:nvSpPr>
-          <p:cNvPr id="2" name="Text 0"/>
-          <p:cNvSpPr/>
-          <p:nvPr/>
-        </p:nvSpPr>
-        <p:spPr>
-          <a:xfrm>
-            <a:off x="457200" y="274320"/>
-            <a:ext cx="8229600" cy="0"/>
-          </a:xfrm>
-          <a:prstGeom prst="rect">
-            <a:avLst/>
-          </a:prstGeom>
-          <a:noFill/>
-          <a:ln/>
-        </p:spPr>
-        <p:txBody>
-          <a:bodyPr wrap="square" rtlCol="0" anchor="ctr"/>
-          <a:lstStyle/>
-          <a:p>
-            <a:pPr indent="0" marL="0">
-              <a:buNone/>
-            </a:pPr>
-            <a:r>
-              <a:rPr lang="en-US" sz="2400" b="1" dirty="0">
-                <a:solidFill>
-                  <a:srgbClr val="00B4D8"/>
-                </a:solidFill>
-              </a:rPr>
-              <a:t>消费分歧：人 vs Agent</a:t>
-            </a:r>
-            <a:endParaRPr lang="en-US" sz="2400" dirty="0"/>
-          </a:p>
-        </p:txBody>
-      </p:sp>
-      <p:sp>
-        <p:nvSpPr>
-          <p:cNvPr id="3" name="Shape 1"/>
-          <p:cNvSpPr/>
-          <p:nvPr/>
-        </p:nvSpPr>
-        <p:spPr>
-          <a:xfrm>
-            <a:off x="457200" y="731520"/>
-            <a:ext cx="8229600" cy="0"/>
-          </a:xfrm>
-          <a:prstGeom prst="line">
-            <a:avLst/>
-          </a:prstGeom>
-          <a:noFill/>
-          <a:ln w="25400">
-            <a:solidFill>
-              <a:srgbClr val="00B4D8"/>
-            </a:solidFill>
-            <a:prstDash val="solid"/>
-          </a:ln>
-        </p:spPr>
-      </p:sp>
-      <p:sp>
-        <p:nvSpPr>
-          <p:cNvPr id="4" name="Text 2"/>
-          <p:cNvSpPr/>
-          <p:nvPr/>
-        </p:nvSpPr>
-        <p:spPr>
-          <a:xfrm>
-            <a:off x="457200" y="1097280"/>
-            <a:ext cx="8229600" cy="3600450"/>
-          </a:xfrm>
-          <a:prstGeom prst="rect">
-            <a:avLst/>
-          </a:prstGeom>
-          <a:noFill/>
-          <a:ln/>
-        </p:spPr>
-        <p:txBody>
-          <a:bodyPr wrap="square" rtlCol="0" anchor="t"/>
-          <a:lstStyle/>
-          <a:p>
-            <a:pPr marL="342900" indent="-342900">
-              <a:buSzPct val="100000"/>
-              <a:buChar char="•"/>
-            </a:pPr>
-            <a:r>
-              <a:rPr lang="en-US" sz="1800" dirty="0">
-                <a:solidFill>
-                  <a:srgbClr val="F8F9FA"/>
-                </a:solidFill>
-              </a:rPr>
-              <a:t>• BI (人)：关注图表、看板、协作。消费 marts 表或指标</a:t>
-            </a:r>
-            <a:endParaRPr lang="en-US" sz="1800" dirty="0"/>
-          </a:p>
-          <a:p>
-            <a:pPr marL="342900" indent="-342900">
-              <a:buSzPct val="100000"/>
-              <a:buChar char="•"/>
-            </a:pPr>
-            <a:r>
-              <a:rPr lang="en-US" sz="1800" dirty="0">
-                <a:solidFill>
-                  <a:srgbClr val="F8F9FA"/>
-                </a:solidFill>
-              </a:rPr>
-              <a:t>• Agent：关注 可执行边界 (允许哪些模型/Join/策略/校验)</a:t>
-            </a:r>
-            <a:endParaRPr lang="en-US" sz="1800" dirty="0"/>
-          </a:p>
-          <a:p>
-            <a:pPr marL="342900" indent="-342900">
-              <a:buSzPct val="100000"/>
-              <a:buChar char="•"/>
-            </a:pPr>
-            <a:r>
-              <a:rPr lang="en-US" sz="1800" dirty="0">
-                <a:solidFill>
-                  <a:srgbClr val="F8F9FA"/>
-                </a:solidFill>
-              </a:rPr>
-              <a:t>• 架构演进：从 '单体 BI' 到 '建模+语义+展示+Agent' 的分层系统</a:t>
-            </a:r>
-            <a:endParaRPr lang="en-US" sz="1800" dirty="0"/>
-          </a:p>
-          <a:p>
-            <a:pPr marL="342900" indent="-342900">
-              <a:buSzPct val="100000"/>
-              <a:buChar char="•"/>
-            </a:pPr>
-            <a:r>
-              <a:rPr lang="en-US" sz="1800" dirty="0">
-                <a:solidFill>
-                  <a:srgbClr val="F8F9FA"/>
-                </a:solidFill>
-              </a:rPr>
-              <a:t>• WrenAI 位居 Agent 查询/上下文层</a:t>
+              <a:t>• Excel: 韧性极强，因 '可确定性' 与 'What-if' 场景暂无法替代</a:t>
             </a:r>
             <a:endParaRPr lang="en-US" sz="1800" dirty="0"/>
           </a:p>
@@ -4333,184 +3159,11 @@
 
 <file path=ppt/slides/slide14.xml><?xml version="1.0" encoding="utf-8"?>
 <p:sld xmlns:a="http://schemas.openxmlformats.org/drawingml/2006/main" xmlns:r="http://schemas.openxmlformats.org/officeDocument/2006/relationships" xmlns:p="http://schemas.openxmlformats.org/presentationml/2006/main">
-  <p:cSld name="Slide 14">
-    <p:bg>
-      <p:bgPr>
-        <a:solidFill>
-          <a:srgbClr val="1B1F3B"/>
-        </a:solidFill>
-      </p:bgPr>
-    </p:bg>
-    <p:spTree>
-      <p:nvGrpSpPr>
-        <p:cNvPr id="1" name=""/>
-        <p:cNvGrpSpPr/>
-        <p:nvPr/>
-      </p:nvGrpSpPr>
-      <p:grpSpPr>
-        <a:xfrm>
-          <a:off x="0" y="0"/>
-          <a:ext cx="0" cy="0"/>
-          <a:chOff x="0" y="0"/>
-          <a:chExt cx="0" cy="0"/>
-        </a:xfrm>
-      </p:grpSpPr>
-      <p:sp>
-        <p:nvSpPr>
-          <p:cNvPr id="2" name="Text 0"/>
-          <p:cNvSpPr/>
-          <p:nvPr/>
-        </p:nvSpPr>
-        <p:spPr>
-          <a:xfrm>
-            <a:off x="457200" y="274320"/>
-            <a:ext cx="8229600" cy="0"/>
-          </a:xfrm>
-          <a:prstGeom prst="rect">
-            <a:avLst/>
-          </a:prstGeom>
-          <a:noFill/>
-          <a:ln/>
-        </p:spPr>
-        <p:txBody>
-          <a:bodyPr wrap="square" rtlCol="0" anchor="ctr"/>
-          <a:lstStyle/>
-          <a:p>
-            <a:pPr indent="0" marL="0">
-              <a:buNone/>
-            </a:pPr>
-            <a:r>
-              <a:rPr lang="en-US" sz="2400" b="1" dirty="0">
-                <a:solidFill>
-                  <a:srgbClr val="00B4D8"/>
-                </a:solidFill>
-              </a:rPr>
-              <a:t>2025 趋势：仓库原生语义层</a:t>
-            </a:r>
-            <a:endParaRPr lang="en-US" sz="2400" dirty="0"/>
-          </a:p>
-        </p:txBody>
-      </p:sp>
-      <p:sp>
-        <p:nvSpPr>
-          <p:cNvPr id="3" name="Shape 1"/>
-          <p:cNvSpPr/>
-          <p:nvPr/>
-        </p:nvSpPr>
-        <p:spPr>
-          <a:xfrm>
-            <a:off x="457200" y="731520"/>
-            <a:ext cx="8229600" cy="0"/>
-          </a:xfrm>
-          <a:prstGeom prst="line">
-            <a:avLst/>
-          </a:prstGeom>
-          <a:noFill/>
-          <a:ln w="25400">
-            <a:solidFill>
-              <a:srgbClr val="00B4D8"/>
-            </a:solidFill>
-            <a:prstDash val="solid"/>
-          </a:ln>
-        </p:spPr>
-      </p:sp>
-      <p:sp>
-        <p:nvSpPr>
-          <p:cNvPr id="4" name="Text 2"/>
-          <p:cNvSpPr/>
-          <p:nvPr/>
-        </p:nvSpPr>
-        <p:spPr>
-          <a:xfrm>
-            <a:off x="457200" y="1097280"/>
-            <a:ext cx="8229600" cy="3600450"/>
-          </a:xfrm>
-          <a:prstGeom prst="rect">
-            <a:avLst/>
-          </a:prstGeom>
-          <a:noFill/>
-          <a:ln/>
-        </p:spPr>
-        <p:txBody>
-          <a:bodyPr wrap="square" rtlCol="0" anchor="t"/>
-          <a:lstStyle/>
-          <a:p>
-            <a:pPr marL="342900" indent="-342900">
-              <a:buSzPct val="100000"/>
-              <a:buChar char="•"/>
-            </a:pPr>
-            <a:r>
-              <a:rPr lang="en-US" sz="1800" dirty="0">
-                <a:solidFill>
-                  <a:srgbClr val="F8F9FA"/>
-                </a:solidFill>
-              </a:rPr>
-              <a:t>• 玩家：Snowflake (Semantic Views), Databricks (Metric Views)</a:t>
-            </a:r>
-            <a:endParaRPr lang="en-US" sz="1800" dirty="0"/>
-          </a:p>
-          <a:p>
-            <a:pPr marL="342900" indent="-342900">
-              <a:buSzPct val="100000"/>
-              <a:buChar char="•"/>
-            </a:pPr>
-            <a:r>
-              <a:rPr lang="en-US" sz="1800" dirty="0">
-                <a:solidFill>
-                  <a:srgbClr val="F8F9FA"/>
-                </a:solidFill>
-              </a:rPr>
-              <a:t>• 诉求：零外部依赖、SQL 客户端即插即用</a:t>
-            </a:r>
-            <a:endParaRPr lang="en-US" sz="1800" dirty="0"/>
-          </a:p>
-          <a:p>
-            <a:pPr marL="342900" indent="-342900">
-              <a:buSzPct val="100000"/>
-              <a:buChar char="•"/>
-            </a:pPr>
-            <a:r>
-              <a:rPr lang="en-US" sz="1800" dirty="0">
-                <a:solidFill>
-                  <a:srgbClr val="F8F9FA"/>
-                </a:solidFill>
-              </a:rPr>
-              <a:t>• 瓶颈：多云/多仓兼容性弱，由于指标模型互不兼容 (OSI 标准早期)</a:t>
-            </a:r>
-            <a:endParaRPr lang="en-US" sz="1800" dirty="0"/>
-          </a:p>
-          <a:p>
-            <a:pPr marL="342900" indent="-342900">
-              <a:buSzPct val="100000"/>
-              <a:buChar char="•"/>
-            </a:pPr>
-            <a:r>
-              <a:rPr lang="en-US" sz="1800" dirty="0">
-                <a:solidFill>
-                  <a:srgbClr val="F8F9FA"/>
-                </a:solidFill>
-              </a:rPr>
-              <a:t>• 博弈：独立语义层 VS 仓内原生语义层</a:t>
-            </a:r>
-            <a:endParaRPr lang="en-US" sz="1800" dirty="0"/>
-          </a:p>
-        </p:txBody>
-      </p:sp>
-    </p:spTree>
-  </p:cSld>
-  <p:clrMapOvr>
-    <a:masterClrMapping/>
-  </p:clrMapOvr>
-</p:sld>
-</file>
-
-<file path=ppt/slides/slide15.xml><?xml version="1.0" encoding="utf-8"?>
-<p:sld xmlns:a="http://schemas.openxmlformats.org/drawingml/2006/main" xmlns:r="http://schemas.openxmlformats.org/officeDocument/2006/relationships" xmlns:p="http://schemas.openxmlformats.org/presentationml/2006/main">
-  <p:cSld name="Slide 15">
+  <p:cSld name="Slide 17">
     <p:bg>
       <p:bgPr>
         <a:blipFill dpi="0" rotWithShape="1">
-          <a:blip r:embed="rId1">
+          <a:blip r:embed="rId3">
             <a:lum/>
           </a:blip>
           <a:srcRect/>
@@ -4556,7 +3209,7 @@
           <a:bodyPr wrap="square" rtlCol="0" anchor="ctr"/>
           <a:lstStyle/>
           <a:p>
-            <a:pPr algn="ctr" indent="0" marL="0">
+            <a:pPr marL="0" indent="0" algn="ctr">
               <a:buNone/>
             </a:pPr>
             <a:r>
@@ -4565,45 +3218,9 @@
                   <a:srgbClr val="00B4D8"/>
                 </a:solidFill>
               </a:rPr>
-              <a:t>§4. BI 层</a:t>
+              <a:t>§5. 治理、质量与 NL2SQL 争论</a:t>
             </a:r>
             <a:endParaRPr lang="en-US" sz="3600" dirty="0"/>
-          </a:p>
-        </p:txBody>
-      </p:sp>
-      <p:sp>
-        <p:nvSpPr>
-          <p:cNvPr id="3" name="Text 1"/>
-          <p:cNvSpPr/>
-          <p:nvPr/>
-        </p:nvSpPr>
-        <p:spPr>
-          <a:xfrm>
-            <a:off x="914400" y="3657600"/>
-            <a:ext cx="7315200" cy="0"/>
-          </a:xfrm>
-          <a:prstGeom prst="rect">
-            <a:avLst/>
-          </a:prstGeom>
-          <a:noFill/>
-          <a:ln/>
-        </p:spPr>
-        <p:txBody>
-          <a:bodyPr wrap="square" rtlCol="0" anchor="ctr"/>
-          <a:lstStyle/>
-          <a:p>
-            <a:pPr algn="ctr" indent="0" marL="0">
-              <a:buNone/>
-            </a:pPr>
-            <a:r>
-              <a:rPr lang="en-US" sz="2000" dirty="0">
-                <a:solidFill>
-                  <a:srgbClr val="94A3B8"/>
-                </a:solidFill>
-              </a:rPr>
-              <a:t>给人看的分析与 Excel 的韧性</a:t>
-            </a:r>
-            <a:endParaRPr lang="en-US" sz="2000" dirty="0"/>
           </a:p>
         </p:txBody>
       </p:sp>
@@ -4615,14 +3232,15 @@
 </p:sld>
 </file>
 
-<file path=ppt/slides/slide16.xml><?xml version="1.0" encoding="utf-8"?>
+<file path=ppt/slides/slide15.xml><?xml version="1.0" encoding="utf-8"?>
 <p:sld xmlns:a="http://schemas.openxmlformats.org/drawingml/2006/main" xmlns:r="http://schemas.openxmlformats.org/officeDocument/2006/relationships" xmlns:p="http://schemas.openxmlformats.org/presentationml/2006/main">
-  <p:cSld name="Slide 16">
+  <p:cSld name="Slide 18">
     <p:bg>
       <p:bgPr>
         <a:solidFill>
           <a:srgbClr val="1B1F3B"/>
         </a:solidFill>
+        <a:effectLst/>
       </p:bgPr>
     </p:bg>
     <p:spTree>
@@ -4660,7 +3278,7 @@
           <a:bodyPr wrap="square" rtlCol="0" anchor="ctr"/>
           <a:lstStyle/>
           <a:p>
-            <a:pPr indent="0" marL="0">
+            <a:pPr marL="0" indent="0">
               <a:buNone/>
             </a:pPr>
             <a:r>
@@ -4669,7 +3287,7 @@
                   <a:srgbClr val="00B4D8"/>
                 </a:solidFill>
               </a:rPr>
-              <a:t>BI 工具生态速查</a:t>
+              <a:t>治理与质量：Agent 的地图与护栏</a:t>
             </a:r>
             <a:endParaRPr lang="en-US" sz="2400" dirty="0"/>
           </a:p>
@@ -4729,7 +3347,7 @@
                   <a:srgbClr val="F8F9FA"/>
                 </a:solidFill>
               </a:rPr>
-              <a:t>• Superset: SQL-first, 强可视化 (72k Stars)</a:t>
+              <a:t>• 数据目录 (DataHub/OpenMetadata): 告知 Agent 哪张表权威、字段含义</a:t>
             </a:r>
             <a:endParaRPr lang="en-US" sz="1800" dirty="0"/>
           </a:p>
@@ -4744,7 +3362,7 @@
                   <a:srgbClr val="F8F9FA"/>
                 </a:solidFill>
               </a:rPr>
-              <a:t>• Metabase: 低门槛自助 BI, 业务友好 (44k Stars)</a:t>
+              <a:t>• 数据质量 (Elementary/Soda): 前置数据质量观测</a:t>
             </a:r>
             <a:endParaRPr lang="en-US" sz="1800" dirty="0"/>
           </a:p>
@@ -4759,7 +3377,7 @@
                   <a:srgbClr val="F8F9FA"/>
                 </a:solidFill>
               </a:rPr>
-              <a:t>• Rill / Evidence: BI-as-Code, 运营极速看板</a:t>
+              <a:t>• 风险点：底层缺值或口径不一，Agent 会 '自信地答错'</a:t>
             </a:r>
             <a:endParaRPr lang="en-US" sz="1800" dirty="0"/>
           </a:p>
@@ -4774,10 +3392,124 @@
                   <a:srgbClr val="F8F9FA"/>
                 </a:solidFill>
               </a:rPr>
-              <a:t>• Grafana: 可观测性/时序监控 (71k Stars)</a:t>
+              <a:t>• 建议栈：[ 治理层 ] → [ 语义层 ] → [ WrenAI ]</a:t>
             </a:r>
             <a:endParaRPr lang="en-US" sz="1800" dirty="0"/>
           </a:p>
+        </p:txBody>
+      </p:sp>
+    </p:spTree>
+  </p:cSld>
+  <p:clrMapOvr>
+    <a:masterClrMapping/>
+  </p:clrMapOvr>
+</p:sld>
+</file>
+
+<file path=ppt/slides/slide16.xml><?xml version="1.0" encoding="utf-8"?>
+<p:sld xmlns:a="http://schemas.openxmlformats.org/drawingml/2006/main" xmlns:r="http://schemas.openxmlformats.org/officeDocument/2006/relationships" xmlns:p="http://schemas.openxmlformats.org/presentationml/2006/main">
+  <p:cSld name="Slide 19">
+    <p:bg>
+      <p:bgPr>
+        <a:solidFill>
+          <a:srgbClr val="1B1F3B"/>
+        </a:solidFill>
+        <a:effectLst/>
+      </p:bgPr>
+    </p:bg>
+    <p:spTree>
+      <p:nvGrpSpPr>
+        <p:cNvPr id="1" name=""/>
+        <p:cNvGrpSpPr/>
+        <p:nvPr/>
+      </p:nvGrpSpPr>
+      <p:grpSpPr>
+        <a:xfrm>
+          <a:off x="0" y="0"/>
+          <a:ext cx="0" cy="0"/>
+          <a:chOff x="0" y="0"/>
+          <a:chExt cx="0" cy="0"/>
+        </a:xfrm>
+      </p:grpSpPr>
+      <p:sp>
+        <p:nvSpPr>
+          <p:cNvPr id="2" name="Text 0"/>
+          <p:cNvSpPr/>
+          <p:nvPr/>
+        </p:nvSpPr>
+        <p:spPr>
+          <a:xfrm>
+            <a:off x="457200" y="274320"/>
+            <a:ext cx="8229600" cy="0"/>
+          </a:xfrm>
+          <a:prstGeom prst="rect">
+            <a:avLst/>
+          </a:prstGeom>
+          <a:noFill/>
+          <a:ln/>
+        </p:spPr>
+        <p:txBody>
+          <a:bodyPr wrap="square" rtlCol="0" anchor="ctr"/>
+          <a:lstStyle/>
+          <a:p>
+            <a:pPr marL="0" indent="0">
+              <a:buNone/>
+            </a:pPr>
+            <a:r>
+              <a:rPr lang="en-US" sz="2400" b="1" dirty="0">
+                <a:solidFill>
+                  <a:srgbClr val="00B4D8"/>
+                </a:solidFill>
+              </a:rPr>
+              <a:t>Text-to-SQL vs Text-to-Semantic</a:t>
+            </a:r>
+            <a:endParaRPr lang="en-US" sz="2400" dirty="0"/>
+          </a:p>
+        </p:txBody>
+      </p:sp>
+      <p:sp>
+        <p:nvSpPr>
+          <p:cNvPr id="3" name="Shape 1"/>
+          <p:cNvSpPr/>
+          <p:nvPr/>
+        </p:nvSpPr>
+        <p:spPr>
+          <a:xfrm>
+            <a:off x="457200" y="731520"/>
+            <a:ext cx="8229600" cy="0"/>
+          </a:xfrm>
+          <a:prstGeom prst="line">
+            <a:avLst/>
+          </a:prstGeom>
+          <a:noFill/>
+          <a:ln w="25400">
+            <a:solidFill>
+              <a:srgbClr val="00B4D8"/>
+            </a:solidFill>
+            <a:prstDash val="solid"/>
+          </a:ln>
+        </p:spPr>
+      </p:sp>
+      <p:sp>
+        <p:nvSpPr>
+          <p:cNvPr id="4" name="Text 2"/>
+          <p:cNvSpPr/>
+          <p:nvPr/>
+        </p:nvSpPr>
+        <p:spPr>
+          <a:xfrm>
+            <a:off x="457200" y="1097280"/>
+            <a:ext cx="8229600" cy="3600450"/>
+          </a:xfrm>
+          <a:prstGeom prst="rect">
+            <a:avLst/>
+          </a:prstGeom>
+          <a:noFill/>
+          <a:ln/>
+        </p:spPr>
+        <p:txBody>
+          <a:bodyPr wrap="square" rtlCol="0" anchor="t"/>
+          <a:lstStyle/>
           <a:p>
             <a:pPr marL="342900" indent="-342900">
               <a:buSzPct val="100000"/>
@@ -4789,7 +3521,52 @@
                   <a:srgbClr val="F8F9FA"/>
                 </a:solidFill>
               </a:rPr>
-              <a:t>• Excel: 韧性极强，因 '可确定性' 与 'What-if' 场景暂无法替代</a:t>
+              <a:t>• Text-to-SQL (Vanna): 喂 Schema/示例给 LLM 猜 SQL (天花板明显)</a:t>
+            </a:r>
+            <a:endParaRPr lang="en-US" sz="1800" dirty="0"/>
+          </a:p>
+          <a:p>
+            <a:pPr marL="342900" indent="-342900">
+              <a:buSzPct val="100000"/>
+              <a:buChar char="•"/>
+            </a:pPr>
+            <a:r>
+              <a:rPr lang="en-US" sz="1800" dirty="0">
+                <a:solidFill>
+                  <a:srgbClr val="F8F9FA"/>
+                </a:solidFill>
+              </a:rPr>
+              <a:t>• Text-to-Semantic (WrenAI/Cube): 对语义对象提问，由引擎出 SQL</a:t>
+            </a:r>
+            <a:endParaRPr lang="en-US" sz="1800" dirty="0"/>
+          </a:p>
+          <a:p>
+            <a:pPr marL="342900" indent="-342900">
+              <a:buSzPct val="100000"/>
+              <a:buChar char="•"/>
+            </a:pPr>
+            <a:r>
+              <a:rPr lang="en-US" sz="1800" dirty="0">
+                <a:solidFill>
+                  <a:srgbClr val="F8F9FA"/>
+                </a:solidFill>
+              </a:rPr>
+              <a:t>• 行业共识：Snowflake 等巨头转向语义层路线，标志着该方向的承认</a:t>
+            </a:r>
+            <a:endParaRPr lang="en-US" sz="1800" dirty="0"/>
+          </a:p>
+          <a:p>
+            <a:pPr marL="342900" indent="-342900">
+              <a:buSzPct val="100000"/>
+              <a:buChar char="•"/>
+            </a:pPr>
+            <a:r>
+              <a:rPr lang="en-US" sz="1800" dirty="0">
+                <a:solidFill>
+                  <a:srgbClr val="F8F9FA"/>
+                </a:solidFill>
+              </a:rPr>
+              <a:t>• WrenAI 优势：收窄查询空间，提高大模型在 BI 场景的准确度</a:t>
             </a:r>
             <a:endParaRPr lang="en-US" sz="1800" dirty="0"/>
           </a:p>
@@ -4805,11 +3582,11 @@
 
 <file path=ppt/slides/slide17.xml><?xml version="1.0" encoding="utf-8"?>
 <p:sld xmlns:a="http://schemas.openxmlformats.org/drawingml/2006/main" xmlns:r="http://schemas.openxmlformats.org/officeDocument/2006/relationships" xmlns:p="http://schemas.openxmlformats.org/presentationml/2006/main">
-  <p:cSld name="Slide 17">
+  <p:cSld name="Slide 20">
     <p:bg>
       <p:bgPr>
         <a:blipFill dpi="0" rotWithShape="1">
-          <a:blip r:embed="rId1">
+          <a:blip r:embed="rId3">
             <a:lum/>
           </a:blip>
           <a:srcRect/>
@@ -4855,7 +3632,7 @@
           <a:bodyPr wrap="square" rtlCol="0" anchor="ctr"/>
           <a:lstStyle/>
           <a:p>
-            <a:pPr algn="ctr" indent="0" marL="0">
+            <a:pPr marL="0" indent="0" algn="ctr">
               <a:buNone/>
             </a:pPr>
             <a:r>
@@ -4864,9 +3641,77 @@
                   <a:srgbClr val="00B4D8"/>
                 </a:solidFill>
               </a:rPr>
-              <a:t>§5. 治理、质量与 NL2SQL 争论</a:t>
+              <a:t>§6. </a:t>
+            </a:r>
+            <a:r>
+              <a:rPr lang="en-US" sz="3600" b="1" dirty="0" err="1">
+                <a:solidFill>
+                  <a:srgbClr val="00B4D8"/>
+                </a:solidFill>
+              </a:rPr>
+              <a:t>重点</a:t>
+            </a:r>
+            <a:r>
+              <a:rPr lang="zh-CN" altLang="en-US" sz="3600" b="1" dirty="0">
+                <a:solidFill>
+                  <a:srgbClr val="00B4D8"/>
+                </a:solidFill>
+              </a:rPr>
+              <a:t>：财务分析</a:t>
+            </a:r>
+            <a:r>
+              <a:rPr lang="en-US" altLang="zh-CN" sz="3600" b="1" dirty="0">
+                <a:solidFill>
+                  <a:srgbClr val="00B4D8"/>
+                </a:solidFill>
+              </a:rPr>
+              <a:t>agent</a:t>
+            </a:r>
+            <a:r>
+              <a:rPr lang="en-US" sz="3600" b="1" dirty="0">
+                <a:solidFill>
+                  <a:srgbClr val="00B4D8"/>
+                </a:solidFill>
+              </a:rPr>
+              <a:t> 解析</a:t>
             </a:r>
             <a:endParaRPr lang="en-US" sz="3600" dirty="0"/>
+          </a:p>
+        </p:txBody>
+      </p:sp>
+      <p:sp>
+        <p:nvSpPr>
+          <p:cNvPr id="3" name="Text 1"/>
+          <p:cNvSpPr/>
+          <p:nvPr/>
+        </p:nvSpPr>
+        <p:spPr>
+          <a:xfrm>
+            <a:off x="914400" y="3657600"/>
+            <a:ext cx="7315200" cy="0"/>
+          </a:xfrm>
+          <a:prstGeom prst="rect">
+            <a:avLst/>
+          </a:prstGeom>
+          <a:noFill/>
+          <a:ln/>
+        </p:spPr>
+        <p:txBody>
+          <a:bodyPr wrap="square" rtlCol="0" anchor="ctr"/>
+          <a:lstStyle/>
+          <a:p>
+            <a:pPr marL="0" indent="0" algn="ctr">
+              <a:buNone/>
+            </a:pPr>
+            <a:r>
+              <a:rPr lang="en-US" sz="2000" dirty="0">
+                <a:solidFill>
+                  <a:srgbClr val="94A3B8"/>
+                </a:solidFill>
+              </a:rPr>
+              <a:t>Agent 问数的开放上下文层</a:t>
+            </a:r>
+            <a:endParaRPr lang="en-US" sz="2000" dirty="0"/>
           </a:p>
         </p:txBody>
       </p:sp>
@@ -4880,12 +3725,13 @@
 
 <file path=ppt/slides/slide18.xml><?xml version="1.0" encoding="utf-8"?>
 <p:sld xmlns:a="http://schemas.openxmlformats.org/drawingml/2006/main" xmlns:r="http://schemas.openxmlformats.org/officeDocument/2006/relationships" xmlns:p="http://schemas.openxmlformats.org/presentationml/2006/main">
-  <p:cSld name="Slide 18">
+  <p:cSld name="Slide 21">
     <p:bg>
       <p:bgPr>
         <a:solidFill>
           <a:srgbClr val="1B1F3B"/>
         </a:solidFill>
+        <a:effectLst/>
       </p:bgPr>
     </p:bg>
     <p:spTree>
@@ -4923,7 +3769,7 @@
           <a:bodyPr wrap="square" rtlCol="0" anchor="ctr"/>
           <a:lstStyle/>
           <a:p>
-            <a:pPr indent="0" marL="0">
+            <a:pPr marL="0" indent="0">
               <a:buNone/>
             </a:pPr>
             <a:r>
@@ -4932,7 +3778,7 @@
                   <a:srgbClr val="00B4D8"/>
                 </a:solidFill>
               </a:rPr>
-              <a:t>治理与质量：Agent 的地图与护栏</a:t>
+              <a:t>WrenAI: 解决什么核心问题？</a:t>
             </a:r>
             <a:endParaRPr lang="en-US" sz="2400" dirty="0"/>
           </a:p>
@@ -4992,7 +3838,7 @@
                   <a:srgbClr val="F8F9FA"/>
                 </a:solidFill>
               </a:rPr>
-              <a:t>• 数据目录 (DataHub/OpenMetadata): 告知 Agent 哪张表权威、字段含义</a:t>
+              <a:t>• 问题 1: Agent 直连数仓易猜错表、字段与口径</a:t>
             </a:r>
             <a:endParaRPr lang="en-US" sz="1800" dirty="0"/>
           </a:p>
@@ -5007,7 +3853,7 @@
                   <a:srgbClr val="F8F9FA"/>
                 </a:solidFill>
               </a:rPr>
-              <a:t>• 数据质量 (Elementary/Soda): 前置数据质量观测</a:t>
+              <a:t>• 问题 2: 口径散落在表、文档、SQL 与人脑中</a:t>
             </a:r>
             <a:endParaRPr lang="en-US" sz="1800" dirty="0"/>
           </a:p>
@@ -5022,22 +3868,15 @@
                   <a:srgbClr val="F8F9FA"/>
                 </a:solidFill>
               </a:rPr>
-              <a:t>• 风险点：底层缺值或口径不一，Agent 会 '自信地答错'</a:t>
-            </a:r>
-            <a:endParaRPr lang="en-US" sz="1800" dirty="0"/>
-          </a:p>
-          <a:p>
-            <a:pPr marL="342900" indent="-342900">
-              <a:buSzPct val="100000"/>
-              <a:buChar char="•"/>
-            </a:pPr>
-            <a:r>
-              <a:rPr lang="en-US" sz="1800" dirty="0">
-                <a:solidFill>
-                  <a:srgbClr val="F8F9FA"/>
-                </a:solidFill>
-              </a:rPr>
-              <a:t>• 建议栈：[ 治理层 ] → [ 语义层 ] → [ WrenAI ]</a:t>
+              <a:t>• 问题 3: 多 Agent </a:t>
+            </a:r>
+            <a:r>
+              <a:rPr lang="en-US" sz="1800" dirty="0" err="1">
+                <a:solidFill>
+                  <a:srgbClr val="F8F9FA"/>
+                </a:solidFill>
+              </a:rPr>
+              <a:t>需要共享同一套上下文与权限</a:t>
             </a:r>
             <a:endParaRPr lang="en-US" sz="1800" dirty="0"/>
           </a:p>
@@ -5053,12 +3892,13 @@
 
 <file path=ppt/slides/slide19.xml><?xml version="1.0" encoding="utf-8"?>
 <p:sld xmlns:a="http://schemas.openxmlformats.org/drawingml/2006/main" xmlns:r="http://schemas.openxmlformats.org/officeDocument/2006/relationships" xmlns:p="http://schemas.openxmlformats.org/presentationml/2006/main">
-  <p:cSld name="Slide 19">
+  <p:cSld name="Slide 22">
     <p:bg>
       <p:bgPr>
         <a:solidFill>
           <a:srgbClr val="1B1F3B"/>
         </a:solidFill>
+        <a:effectLst/>
       </p:bgPr>
     </p:bg>
     <p:spTree>
@@ -5096,16 +3936,32 @@
           <a:bodyPr wrap="square" rtlCol="0" anchor="ctr"/>
           <a:lstStyle/>
           <a:p>
-            <a:pPr indent="0" marL="0">
+            <a:pPr marL="0" indent="0">
               <a:buNone/>
             </a:pPr>
             <a:r>
+              <a:rPr lang="zh-CN" altLang="en-US" sz="2400" b="1" dirty="0">
+                <a:solidFill>
+                  <a:srgbClr val="00B4D8"/>
+                </a:solidFill>
+              </a:rPr>
+              <a:t>财务分析</a:t>
+            </a:r>
+            <a:r>
+              <a:rPr lang="en-US" altLang="zh-CN" sz="2400" b="1" dirty="0">
+                <a:solidFill>
+                  <a:srgbClr val="00B4D8"/>
+                </a:solidFill>
+              </a:rPr>
+              <a:t>agent</a:t>
+            </a:r>
+            <a:r>
               <a:rPr lang="en-US" sz="2400" b="1" dirty="0">
                 <a:solidFill>
                   <a:srgbClr val="00B4D8"/>
                 </a:solidFill>
               </a:rPr>
-              <a:t>Text-to-SQL vs Text-to-Semantic</a:t>
+              <a:t> 核心组件</a:t>
             </a:r>
             <a:endParaRPr lang="en-US" sz="2400" dirty="0"/>
           </a:p>
@@ -5165,7 +4021,7 @@
                   <a:srgbClr val="F8F9FA"/>
                 </a:solidFill>
               </a:rPr>
-              <a:t>• Text-to-SQL (Vanna): 喂 Schema/示例给 LLM 猜 SQL (天花板明显)</a:t>
+              <a:t>• MDL: 定义 Model, Relationship, Metrics, RLAC/CLAC</a:t>
             </a:r>
             <a:endParaRPr lang="en-US" sz="1800" dirty="0"/>
           </a:p>
@@ -5180,7 +4036,15 @@
                   <a:srgbClr val="F8F9FA"/>
                 </a:solidFill>
               </a:rPr>
-              <a:t>• Text-to-Semantic (WrenAI/Cube): 对语义对象提问，由引擎出 SQL</a:t>
+              <a:t>• Engine (Apache DataFusion): 跨 </a:t>
+            </a:r>
+            <a:r>
+              <a:rPr lang="en-US" sz="1800" dirty="0" err="1">
+                <a:solidFill>
+                  <a:srgbClr val="F8F9FA"/>
+                </a:solidFill>
+              </a:rPr>
+              <a:t>数据源的语义引擎</a:t>
             </a:r>
             <a:endParaRPr lang="en-US" sz="1800" dirty="0"/>
           </a:p>
@@ -5195,7 +4059,7 @@
                   <a:srgbClr val="F8F9FA"/>
                 </a:solidFill>
               </a:rPr>
-              <a:t>• 行业共识：Snowflake 等巨头转向语义层路线，标志着该方向的承认</a:t>
+              <a:t>• Memory (LanceDB): 可版本化、可检索历史问法</a:t>
             </a:r>
             <a:endParaRPr lang="en-US" sz="1800" dirty="0"/>
           </a:p>
@@ -5210,7 +4074,7 @@
                   <a:srgbClr val="F8F9FA"/>
                 </a:solidFill>
               </a:rPr>
-              <a:t>• WrenAI 优势：收窄查询空间，提高大模型在 BI 场景的准确度</a:t>
+              <a:t>• SDK/Skills: LangChain/LangGraph 集成，教 Agent 驱动 CLI</a:t>
             </a:r>
             <a:endParaRPr lang="en-US" sz="1800" dirty="0"/>
           </a:p>
@@ -5232,6 +4096,7 @@
         <a:solidFill>
           <a:srgbClr val="1B1F3B"/>
         </a:solidFill>
+        <a:effectLst/>
       </p:bgPr>
     </p:bg>
     <p:spTree>
@@ -5269,7 +4134,7 @@
           <a:bodyPr wrap="square" rtlCol="0" anchor="ctr"/>
           <a:lstStyle/>
           <a:p>
-            <a:pPr indent="0" marL="0">
+            <a:pPr marL="0" indent="0">
               <a:buNone/>
             </a:pPr>
             <a:r>
@@ -5414,11 +4279,11 @@
 
 <file path=ppt/slides/slide20.xml><?xml version="1.0" encoding="utf-8"?>
 <p:sld xmlns:a="http://schemas.openxmlformats.org/drawingml/2006/main" xmlns:r="http://schemas.openxmlformats.org/officeDocument/2006/relationships" xmlns:p="http://schemas.openxmlformats.org/presentationml/2006/main">
-  <p:cSld name="Slide 20">
+  <p:cSld name="Slide 28">
     <p:bg>
       <p:bgPr>
         <a:blipFill dpi="0" rotWithShape="1">
-          <a:blip r:embed="rId1">
+          <a:blip r:embed="rId3">
             <a:lum/>
           </a:blip>
           <a:srcRect/>
@@ -5464,7 +4329,7 @@
           <a:bodyPr wrap="square" rtlCol="0" anchor="ctr"/>
           <a:lstStyle/>
           <a:p>
-            <a:pPr algn="ctr" indent="0" marL="0">
+            <a:pPr marL="0" indent="0" algn="ctr">
               <a:buNone/>
             </a:pPr>
             <a:r>
@@ -5473,7 +4338,7 @@
                   <a:srgbClr val="00B4D8"/>
                 </a:solidFill>
               </a:rPr>
-              <a:t>§6. 重点：WrenAI 解析</a:t>
+              <a:t>§8. 结论</a:t>
             </a:r>
             <a:endParaRPr lang="en-US" sz="3600" dirty="0"/>
           </a:p>
@@ -5500,7 +4365,7 @@
           <a:bodyPr wrap="square" rtlCol="0" anchor="ctr"/>
           <a:lstStyle/>
           <a:p>
-            <a:pPr algn="ctr" indent="0" marL="0">
+            <a:pPr marL="0" indent="0" algn="ctr">
               <a:buNone/>
             </a:pPr>
             <a:r>
@@ -5509,7 +4374,7 @@
                   <a:srgbClr val="94A3B8"/>
                 </a:solidFill>
               </a:rPr>
-              <a:t>Agent 问数的开放上下文层</a:t>
+              <a:t>三个判断与最终站位</a:t>
             </a:r>
             <a:endParaRPr lang="en-US" sz="2000" dirty="0"/>
           </a:p>
@@ -5525,733 +4390,11 @@
 
 <file path=ppt/slides/slide21.xml><?xml version="1.0" encoding="utf-8"?>
 <p:sld xmlns:a="http://schemas.openxmlformats.org/drawingml/2006/main" xmlns:r="http://schemas.openxmlformats.org/officeDocument/2006/relationships" xmlns:p="http://schemas.openxmlformats.org/presentationml/2006/main">
-  <p:cSld name="Slide 21">
-    <p:bg>
-      <p:bgPr>
-        <a:solidFill>
-          <a:srgbClr val="1B1F3B"/>
-        </a:solidFill>
-      </p:bgPr>
-    </p:bg>
-    <p:spTree>
-      <p:nvGrpSpPr>
-        <p:cNvPr id="1" name=""/>
-        <p:cNvGrpSpPr/>
-        <p:nvPr/>
-      </p:nvGrpSpPr>
-      <p:grpSpPr>
-        <a:xfrm>
-          <a:off x="0" y="0"/>
-          <a:ext cx="0" cy="0"/>
-          <a:chOff x="0" y="0"/>
-          <a:chExt cx="0" cy="0"/>
-        </a:xfrm>
-      </p:grpSpPr>
-      <p:sp>
-        <p:nvSpPr>
-          <p:cNvPr id="2" name="Text 0"/>
-          <p:cNvSpPr/>
-          <p:nvPr/>
-        </p:nvSpPr>
-        <p:spPr>
-          <a:xfrm>
-            <a:off x="457200" y="274320"/>
-            <a:ext cx="8229600" cy="0"/>
-          </a:xfrm>
-          <a:prstGeom prst="rect">
-            <a:avLst/>
-          </a:prstGeom>
-          <a:noFill/>
-          <a:ln/>
-        </p:spPr>
-        <p:txBody>
-          <a:bodyPr wrap="square" rtlCol="0" anchor="ctr"/>
-          <a:lstStyle/>
-          <a:p>
-            <a:pPr indent="0" marL="0">
-              <a:buNone/>
-            </a:pPr>
-            <a:r>
-              <a:rPr lang="en-US" sz="2400" b="1" dirty="0">
-                <a:solidFill>
-                  <a:srgbClr val="00B4D8"/>
-                </a:solidFill>
-              </a:rPr>
-              <a:t>WrenAI: 解决什么核心问题？</a:t>
-            </a:r>
-            <a:endParaRPr lang="en-US" sz="2400" dirty="0"/>
-          </a:p>
-        </p:txBody>
-      </p:sp>
-      <p:sp>
-        <p:nvSpPr>
-          <p:cNvPr id="3" name="Shape 1"/>
-          <p:cNvSpPr/>
-          <p:nvPr/>
-        </p:nvSpPr>
-        <p:spPr>
-          <a:xfrm>
-            <a:off x="457200" y="731520"/>
-            <a:ext cx="8229600" cy="0"/>
-          </a:xfrm>
-          <a:prstGeom prst="line">
-            <a:avLst/>
-          </a:prstGeom>
-          <a:noFill/>
-          <a:ln w="25400">
-            <a:solidFill>
-              <a:srgbClr val="00B4D8"/>
-            </a:solidFill>
-            <a:prstDash val="solid"/>
-          </a:ln>
-        </p:spPr>
-      </p:sp>
-      <p:sp>
-        <p:nvSpPr>
-          <p:cNvPr id="4" name="Text 2"/>
-          <p:cNvSpPr/>
-          <p:nvPr/>
-        </p:nvSpPr>
-        <p:spPr>
-          <a:xfrm>
-            <a:off x="457200" y="1097280"/>
-            <a:ext cx="8229600" cy="3600450"/>
-          </a:xfrm>
-          <a:prstGeom prst="rect">
-            <a:avLst/>
-          </a:prstGeom>
-          <a:noFill/>
-          <a:ln/>
-        </p:spPr>
-        <p:txBody>
-          <a:bodyPr wrap="square" rtlCol="0" anchor="t"/>
-          <a:lstStyle/>
-          <a:p>
-            <a:pPr marL="342900" indent="-342900">
-              <a:buSzPct val="100000"/>
-              <a:buChar char="•"/>
-            </a:pPr>
-            <a:r>
-              <a:rPr lang="en-US" sz="1800" dirty="0">
-                <a:solidFill>
-                  <a:srgbClr val="F8F9FA"/>
-                </a:solidFill>
-              </a:rPr>
-              <a:t>• 问题 1: Agent 直连数仓易猜错表、字段与口径</a:t>
-            </a:r>
-            <a:endParaRPr lang="en-US" sz="1800" dirty="0"/>
-          </a:p>
-          <a:p>
-            <a:pPr marL="342900" indent="-342900">
-              <a:buSzPct val="100000"/>
-              <a:buChar char="•"/>
-            </a:pPr>
-            <a:r>
-              <a:rPr lang="en-US" sz="1800" dirty="0">
-                <a:solidFill>
-                  <a:srgbClr val="F8F9FA"/>
-                </a:solidFill>
-              </a:rPr>
-              <a:t>• 问题 2: 口径散落在表、文档、SQL 与人脑中</a:t>
-            </a:r>
-            <a:endParaRPr lang="en-US" sz="1800" dirty="0"/>
-          </a:p>
-          <a:p>
-            <a:pPr marL="342900" indent="-342900">
-              <a:buSzPct val="100000"/>
-              <a:buChar char="•"/>
-            </a:pPr>
-            <a:r>
-              <a:rPr lang="en-US" sz="1800" dirty="0">
-                <a:solidFill>
-                  <a:srgbClr val="F8F9FA"/>
-                </a:solidFill>
-              </a:rPr>
-              <a:t>• 问题 3: 多 Agent 需要共享同一套上下文与权限</a:t>
-            </a:r>
-            <a:endParaRPr lang="en-US" sz="1800" dirty="0"/>
-          </a:p>
-          <a:p>
-            <a:pPr marL="342900" indent="-342900">
-              <a:buSzPct val="100000"/>
-              <a:buChar char="•"/>
-            </a:pPr>
-            <a:r>
-              <a:rPr lang="en-US" sz="1800" dirty="0">
-                <a:solidFill>
-                  <a:srgbClr val="F8F9FA"/>
-                </a:solidFill>
-              </a:rPr>
-              <a:t>• WrenAI: 为 Agent 提供 Git-friendly 的 MDL (语义模型) 与 Memory</a:t>
-            </a:r>
-            <a:endParaRPr lang="en-US" sz="1800" dirty="0"/>
-          </a:p>
-        </p:txBody>
-      </p:sp>
-    </p:spTree>
-  </p:cSld>
-  <p:clrMapOvr>
-    <a:masterClrMapping/>
-  </p:clrMapOvr>
-</p:sld>
-</file>
-
-<file path=ppt/slides/slide22.xml><?xml version="1.0" encoding="utf-8"?>
-<p:sld xmlns:a="http://schemas.openxmlformats.org/drawingml/2006/main" xmlns:r="http://schemas.openxmlformats.org/officeDocument/2006/relationships" xmlns:p="http://schemas.openxmlformats.org/presentationml/2006/main">
-  <p:cSld name="Slide 22">
-    <p:bg>
-      <p:bgPr>
-        <a:solidFill>
-          <a:srgbClr val="1B1F3B"/>
-        </a:solidFill>
-      </p:bgPr>
-    </p:bg>
-    <p:spTree>
-      <p:nvGrpSpPr>
-        <p:cNvPr id="1" name=""/>
-        <p:cNvGrpSpPr/>
-        <p:nvPr/>
-      </p:nvGrpSpPr>
-      <p:grpSpPr>
-        <a:xfrm>
-          <a:off x="0" y="0"/>
-          <a:ext cx="0" cy="0"/>
-          <a:chOff x="0" y="0"/>
-          <a:chExt cx="0" cy="0"/>
-        </a:xfrm>
-      </p:grpSpPr>
-      <p:sp>
-        <p:nvSpPr>
-          <p:cNvPr id="2" name="Text 0"/>
-          <p:cNvSpPr/>
-          <p:nvPr/>
-        </p:nvSpPr>
-        <p:spPr>
-          <a:xfrm>
-            <a:off x="457200" y="274320"/>
-            <a:ext cx="8229600" cy="0"/>
-          </a:xfrm>
-          <a:prstGeom prst="rect">
-            <a:avLst/>
-          </a:prstGeom>
-          <a:noFill/>
-          <a:ln/>
-        </p:spPr>
-        <p:txBody>
-          <a:bodyPr wrap="square" rtlCol="0" anchor="ctr"/>
-          <a:lstStyle/>
-          <a:p>
-            <a:pPr indent="0" marL="0">
-              <a:buNone/>
-            </a:pPr>
-            <a:r>
-              <a:rPr lang="en-US" sz="2400" b="1" dirty="0">
-                <a:solidFill>
-                  <a:srgbClr val="00B4D8"/>
-                </a:solidFill>
-              </a:rPr>
-              <a:t>WrenAI 核心组件</a:t>
-            </a:r>
-            <a:endParaRPr lang="en-US" sz="2400" dirty="0"/>
-          </a:p>
-        </p:txBody>
-      </p:sp>
-      <p:sp>
-        <p:nvSpPr>
-          <p:cNvPr id="3" name="Shape 1"/>
-          <p:cNvSpPr/>
-          <p:nvPr/>
-        </p:nvSpPr>
-        <p:spPr>
-          <a:xfrm>
-            <a:off x="457200" y="731520"/>
-            <a:ext cx="8229600" cy="0"/>
-          </a:xfrm>
-          <a:prstGeom prst="line">
-            <a:avLst/>
-          </a:prstGeom>
-          <a:noFill/>
-          <a:ln w="25400">
-            <a:solidFill>
-              <a:srgbClr val="00B4D8"/>
-            </a:solidFill>
-            <a:prstDash val="solid"/>
-          </a:ln>
-        </p:spPr>
-      </p:sp>
-      <p:sp>
-        <p:nvSpPr>
-          <p:cNvPr id="4" name="Text 2"/>
-          <p:cNvSpPr/>
-          <p:nvPr/>
-        </p:nvSpPr>
-        <p:spPr>
-          <a:xfrm>
-            <a:off x="457200" y="1097280"/>
-            <a:ext cx="8229600" cy="3600450"/>
-          </a:xfrm>
-          <a:prstGeom prst="rect">
-            <a:avLst/>
-          </a:prstGeom>
-          <a:noFill/>
-          <a:ln/>
-        </p:spPr>
-        <p:txBody>
-          <a:bodyPr wrap="square" rtlCol="0" anchor="t"/>
-          <a:lstStyle/>
-          <a:p>
-            <a:pPr marL="342900" indent="-342900">
-              <a:buSzPct val="100000"/>
-              <a:buChar char="•"/>
-            </a:pPr>
-            <a:r>
-              <a:rPr lang="en-US" sz="1800" dirty="0">
-                <a:solidFill>
-                  <a:srgbClr val="F8F9FA"/>
-                </a:solidFill>
-              </a:rPr>
-              <a:t>• MDL: 定义 Model, Relationship, Metrics, RLAC/CLAC</a:t>
-            </a:r>
-            <a:endParaRPr lang="en-US" sz="1800" dirty="0"/>
-          </a:p>
-          <a:p>
-            <a:pPr marL="342900" indent="-342900">
-              <a:buSzPct val="100000"/>
-              <a:buChar char="•"/>
-            </a:pPr>
-            <a:r>
-              <a:rPr lang="en-US" sz="1800" dirty="0">
-                <a:solidFill>
-                  <a:srgbClr val="F8F9FA"/>
-                </a:solidFill>
-              </a:rPr>
-              <a:t>• Engine (Apache DataFusion): 跨 22+ 数据源的语义引擎</a:t>
-            </a:r>
-            <a:endParaRPr lang="en-US" sz="1800" dirty="0"/>
-          </a:p>
-          <a:p>
-            <a:pPr marL="342900" indent="-342900">
-              <a:buSzPct val="100000"/>
-              <a:buChar char="•"/>
-            </a:pPr>
-            <a:r>
-              <a:rPr lang="en-US" sz="1800" dirty="0">
-                <a:solidFill>
-                  <a:srgbClr val="F8F9FA"/>
-                </a:solidFill>
-              </a:rPr>
-              <a:t>• Memory (LanceDB): 可版本化、可检索历史问法</a:t>
-            </a:r>
-            <a:endParaRPr lang="en-US" sz="1800" dirty="0"/>
-          </a:p>
-          <a:p>
-            <a:pPr marL="342900" indent="-342900">
-              <a:buSzPct val="100000"/>
-              <a:buChar char="•"/>
-            </a:pPr>
-            <a:r>
-              <a:rPr lang="en-US" sz="1800" dirty="0">
-                <a:solidFill>
-                  <a:srgbClr val="F8F9FA"/>
-                </a:solidFill>
-              </a:rPr>
-              <a:t>• SDK/Skills: LangChain/LangGraph 集成，教 Agent 驱动 CLI</a:t>
-            </a:r>
-            <a:endParaRPr lang="en-US" sz="1800" dirty="0"/>
-          </a:p>
-        </p:txBody>
-      </p:sp>
-    </p:spTree>
-  </p:cSld>
-  <p:clrMapOvr>
-    <a:masterClrMapping/>
-  </p:clrMapOvr>
-</p:sld>
-</file>
-
-<file path=ppt/slides/slide23.xml><?xml version="1.0" encoding="utf-8"?>
-<p:sld xmlns:a="http://schemas.openxmlformats.org/drawingml/2006/main" xmlns:r="http://schemas.openxmlformats.org/officeDocument/2006/relationships" xmlns:p="http://schemas.openxmlformats.org/presentationml/2006/main">
-  <p:cSld name="Slide 23">
-    <p:bg>
-      <p:bgPr>
-        <a:solidFill>
-          <a:srgbClr val="1B1F3B"/>
-        </a:solidFill>
-      </p:bgPr>
-    </p:bg>
-    <p:spTree>
-      <p:nvGrpSpPr>
-        <p:cNvPr id="1" name=""/>
-        <p:cNvGrpSpPr/>
-        <p:nvPr/>
-      </p:nvGrpSpPr>
-      <p:grpSpPr>
-        <a:xfrm>
-          <a:off x="0" y="0"/>
-          <a:ext cx="0" cy="0"/>
-          <a:chOff x="0" y="0"/>
-          <a:chExt cx="0" cy="0"/>
-        </a:xfrm>
-      </p:grpSpPr>
-      <p:sp>
-        <p:nvSpPr>
-          <p:cNvPr id="2" name="Text 0"/>
-          <p:cNvSpPr/>
-          <p:nvPr/>
-        </p:nvSpPr>
-        <p:spPr>
-          <a:xfrm>
-            <a:off x="457200" y="274320"/>
-            <a:ext cx="8229600" cy="0"/>
-          </a:xfrm>
-          <a:prstGeom prst="rect">
-            <a:avLst/>
-          </a:prstGeom>
-          <a:noFill/>
-          <a:ln/>
-        </p:spPr>
-        <p:txBody>
-          <a:bodyPr wrap="square" rtlCol="0" anchor="ctr"/>
-          <a:lstStyle/>
-          <a:p>
-            <a:pPr indent="0" marL="0">
-              <a:buNone/>
-            </a:pPr>
-            <a:r>
-              <a:rPr lang="en-US" sz="2400" b="1" dirty="0">
-                <a:solidFill>
-                  <a:srgbClr val="00B4D8"/>
-                </a:solidFill>
-              </a:rPr>
-              <a:t>准确性保障原语</a:t>
-            </a:r>
-            <a:endParaRPr lang="en-US" sz="2400" dirty="0"/>
-          </a:p>
-        </p:txBody>
-      </p:sp>
-      <p:sp>
-        <p:nvSpPr>
-          <p:cNvPr id="3" name="Shape 1"/>
-          <p:cNvSpPr/>
-          <p:nvPr/>
-        </p:nvSpPr>
-        <p:spPr>
-          <a:xfrm>
-            <a:off x="457200" y="731520"/>
-            <a:ext cx="8229600" cy="0"/>
-          </a:xfrm>
-          <a:prstGeom prst="line">
-            <a:avLst/>
-          </a:prstGeom>
-          <a:noFill/>
-          <a:ln w="25400">
-            <a:solidFill>
-              <a:srgbClr val="00B4D8"/>
-            </a:solidFill>
-            <a:prstDash val="solid"/>
-          </a:ln>
-        </p:spPr>
-      </p:sp>
-      <p:sp>
-        <p:nvSpPr>
-          <p:cNvPr id="4" name="Text 2"/>
-          <p:cNvSpPr/>
-          <p:nvPr/>
-        </p:nvSpPr>
-        <p:spPr>
-          <a:xfrm>
-            <a:off x="457200" y="1097280"/>
-            <a:ext cx="8229600" cy="3600450"/>
-          </a:xfrm>
-          <a:prstGeom prst="rect">
-            <a:avLst/>
-          </a:prstGeom>
-          <a:noFill/>
-          <a:ln/>
-        </p:spPr>
-        <p:txBody>
-          <a:bodyPr wrap="square" rtlCol="0" anchor="t"/>
-          <a:lstStyle/>
-          <a:p>
-            <a:pPr marL="342900" indent="-342900">
-              <a:buSzPct val="100000"/>
-              <a:buChar char="•"/>
-            </a:pPr>
-            <a:r>
-              <a:rPr lang="en-US" sz="1800" dirty="0">
-                <a:solidFill>
-                  <a:srgbClr val="F8F9FA"/>
-                </a:solidFill>
-              </a:rPr>
-              <a:t>• Dry-plan / Dry-run: 在执行前验证逻辑</a:t>
-            </a:r>
-            <a:endParaRPr lang="en-US" sz="1800" dirty="0"/>
-          </a:p>
-          <a:p>
-            <a:pPr marL="342900" indent="-342900">
-              <a:buSzPct val="100000"/>
-              <a:buChar char="•"/>
-            </a:pPr>
-            <a:r>
-              <a:rPr lang="en-US" sz="1800" dirty="0">
-                <a:solidFill>
-                  <a:srgbClr val="F8F9FA"/>
-                </a:solidFill>
-              </a:rPr>
-              <a:t>• Structured Errors: 提供可被 LLM 理解的反馈</a:t>
-            </a:r>
-            <a:endParaRPr lang="en-US" sz="1800" dirty="0"/>
-          </a:p>
-          <a:p>
-            <a:pPr marL="342900" indent="-342900">
-              <a:buSzPct val="100000"/>
-              <a:buChar char="•"/>
-            </a:pPr>
-            <a:r>
-              <a:rPr lang="en-US" sz="1800" dirty="0">
-                <a:solidFill>
-                  <a:srgbClr val="F8F9FA"/>
-                </a:solidFill>
-              </a:rPr>
-              <a:t>• Memory Recall: 历史高分回答对齐</a:t>
-            </a:r>
-            <a:endParaRPr lang="en-US" sz="1800" dirty="0"/>
-          </a:p>
-          <a:p>
-            <a:pPr marL="342900" indent="-342900">
-              <a:buSzPct val="100000"/>
-              <a:buChar char="•"/>
-            </a:pPr>
-            <a:r>
-              <a:rPr lang="en-US" sz="1800" dirty="0">
-                <a:solidFill>
-                  <a:srgbClr val="F8F9FA"/>
-                </a:solidFill>
-              </a:rPr>
-              <a:t>• Eval: 持续加强的评估框架</a:t>
-            </a:r>
-            <a:endParaRPr lang="en-US" sz="1800" dirty="0"/>
-          </a:p>
-          <a:p>
-            <a:pPr marL="342900" indent="-342900">
-              <a:buSzPct val="100000"/>
-              <a:buChar char="•"/>
-            </a:pPr>
-            <a:r>
-              <a:rPr lang="en-US" sz="1800" dirty="0">
-                <a:solidFill>
-                  <a:srgbClr val="F8F9FA"/>
-                </a:solidFill>
-              </a:rPr>
-              <a:t>• 结论：WrenAI 不凭空变准，上限由底层语义建设质量决定</a:t>
-            </a:r>
-            <a:endParaRPr lang="en-US" sz="1800" dirty="0"/>
-          </a:p>
-        </p:txBody>
-      </p:sp>
-    </p:spTree>
-  </p:cSld>
-  <p:clrMapOvr>
-    <a:masterClrMapping/>
-  </p:clrMapOvr>
-</p:sld>
-</file>
-
-<file path=ppt/slides/slide24.xml><?xml version="1.0" encoding="utf-8"?>
-<p:sld xmlns:a="http://schemas.openxmlformats.org/drawingml/2006/main" xmlns:r="http://schemas.openxmlformats.org/officeDocument/2006/relationships" xmlns:p="http://schemas.openxmlformats.org/presentationml/2006/main">
-  <p:cSld name="Slide 24">
-    <p:bg>
-      <p:bgPr>
-        <a:solidFill>
-          <a:srgbClr val="1B1F3B"/>
-        </a:solidFill>
-      </p:bgPr>
-    </p:bg>
-    <p:spTree>
-      <p:nvGrpSpPr>
-        <p:cNvPr id="1" name=""/>
-        <p:cNvGrpSpPr/>
-        <p:nvPr/>
-      </p:nvGrpSpPr>
-      <p:grpSpPr>
-        <a:xfrm>
-          <a:off x="0" y="0"/>
-          <a:ext cx="0" cy="0"/>
-          <a:chOff x="0" y="0"/>
-          <a:chExt cx="0" cy="0"/>
-        </a:xfrm>
-      </p:grpSpPr>
-      <p:sp>
-        <p:nvSpPr>
-          <p:cNvPr id="2" name="Text 0"/>
-          <p:cNvSpPr/>
-          <p:nvPr/>
-        </p:nvSpPr>
-        <p:spPr>
-          <a:xfrm>
-            <a:off x="457200" y="274320"/>
-            <a:ext cx="8229600" cy="0"/>
-          </a:xfrm>
-          <a:prstGeom prst="rect">
-            <a:avLst/>
-          </a:prstGeom>
-          <a:noFill/>
-          <a:ln/>
-        </p:spPr>
-        <p:txBody>
-          <a:bodyPr wrap="square" rtlCol="0" anchor="ctr"/>
-          <a:lstStyle/>
-          <a:p>
-            <a:pPr indent="0" marL="0">
-              <a:buNone/>
-            </a:pPr>
-            <a:r>
-              <a:rPr lang="en-US" sz="2400" b="1" dirty="0">
-                <a:solidFill>
-                  <a:srgbClr val="00B4D8"/>
-                </a:solidFill>
-              </a:rPr>
-              <a:t>WrenAI vs 其他工具对比</a:t>
-            </a:r>
-            <a:endParaRPr lang="en-US" sz="2400" dirty="0"/>
-          </a:p>
-        </p:txBody>
-      </p:sp>
-      <p:sp>
-        <p:nvSpPr>
-          <p:cNvPr id="3" name="Shape 1"/>
-          <p:cNvSpPr/>
-          <p:nvPr/>
-        </p:nvSpPr>
-        <p:spPr>
-          <a:xfrm>
-            <a:off x="457200" y="731520"/>
-            <a:ext cx="8229600" cy="0"/>
-          </a:xfrm>
-          <a:prstGeom prst="line">
-            <a:avLst/>
-          </a:prstGeom>
-          <a:noFill/>
-          <a:ln w="25400">
-            <a:solidFill>
-              <a:srgbClr val="00B4D8"/>
-            </a:solidFill>
-            <a:prstDash val="solid"/>
-          </a:ln>
-        </p:spPr>
-      </p:sp>
-      <p:sp>
-        <p:nvSpPr>
-          <p:cNvPr id="4" name="Text 2"/>
-          <p:cNvSpPr/>
-          <p:nvPr/>
-        </p:nvSpPr>
-        <p:spPr>
-          <a:xfrm>
-            <a:off x="457200" y="1097280"/>
-            <a:ext cx="8229600" cy="3600450"/>
-          </a:xfrm>
-          <a:prstGeom prst="rect">
-            <a:avLst/>
-          </a:prstGeom>
-          <a:noFill/>
-          <a:ln/>
-        </p:spPr>
-        <p:txBody>
-          <a:bodyPr wrap="square" rtlCol="0" anchor="t"/>
-          <a:lstStyle/>
-          <a:p>
-            <a:pPr marL="342900" indent="-342900">
-              <a:buSzPct val="100000"/>
-              <a:buChar char="•"/>
-            </a:pPr>
-            <a:r>
-              <a:rPr lang="en-US" sz="1800" dirty="0">
-                <a:solidFill>
-                  <a:srgbClr val="F8F9FA"/>
-                </a:solidFill>
-              </a:rPr>
-              <a:t>• 对比 Vanna: WrenAI 活跃维护；Vanna 偏 RAG 且已 Archive</a:t>
-            </a:r>
-            <a:endParaRPr lang="en-US" sz="1800" dirty="0"/>
-          </a:p>
-          <a:p>
-            <a:pPr marL="342900" indent="-342900">
-              <a:buSzPct val="100000"/>
-              <a:buChar char="•"/>
-            </a:pPr>
-            <a:r>
-              <a:rPr lang="en-US" sz="1800" dirty="0">
-                <a:solidFill>
-                  <a:srgbClr val="F8F9FA"/>
-                </a:solidFill>
-              </a:rPr>
-              <a:t>• 对比 Cube/MetricFlow: </a:t>
-            </a:r>
-            <a:endParaRPr lang="en-US" sz="1800" dirty="0"/>
-          </a:p>
-          <a:p>
-            <a:pPr marL="342900" indent="-342900">
-              <a:buSzPct val="100000"/>
-              <a:buChar char="•"/>
-            </a:pPr>
-            <a:r>
-              <a:rPr lang="en-US" sz="1800" dirty="0">
-                <a:solidFill>
-                  <a:srgbClr val="F8F9FA"/>
-                </a:solidFill>
-              </a:rPr>
-              <a:t>  - MetricFlow/Cube: 工程平台导向 API/缓存</a:t>
-            </a:r>
-            <a:endParaRPr lang="en-US" sz="1800" dirty="0"/>
-          </a:p>
-          <a:p>
-            <a:pPr marL="342900" indent="-342900">
-              <a:buSzPct val="100000"/>
-              <a:buChar char="•"/>
-            </a:pPr>
-            <a:r>
-              <a:rPr lang="en-US" sz="1800" dirty="0">
-                <a:solidFill>
-                  <a:srgbClr val="F8F9FA"/>
-                </a:solidFill>
-              </a:rPr>
-              <a:t>  - WrenAI: Agent-native, 强在 Memory、Skills 与 SDK</a:t>
-            </a:r>
-            <a:endParaRPr lang="en-US" sz="1800" dirty="0"/>
-          </a:p>
-          <a:p>
-            <a:pPr marL="342900" indent="-342900">
-              <a:buSzPct val="100000"/>
-              <a:buChar char="•"/>
-            </a:pPr>
-            <a:r>
-              <a:rPr lang="en-US" sz="1800" dirty="0">
-                <a:solidFill>
-                  <a:srgbClr val="F8F9FA"/>
-                </a:solidFill>
-              </a:rPr>
-              <a:t>• 协作：WrenAI 可作 AI 环境下的语义层，分担或替代部分工程复杂性</a:t>
-            </a:r>
-            <a:endParaRPr lang="en-US" sz="1800" dirty="0"/>
-          </a:p>
-        </p:txBody>
-      </p:sp>
-    </p:spTree>
-  </p:cSld>
-  <p:clrMapOvr>
-    <a:masterClrMapping/>
-  </p:clrMapOvr>
-</p:sld>
-</file>
-
-<file path=ppt/slides/slide25.xml><?xml version="1.0" encoding="utf-8"?>
-<p:sld xmlns:a="http://schemas.openxmlformats.org/drawingml/2006/main" xmlns:r="http://schemas.openxmlformats.org/officeDocument/2006/relationships" xmlns:p="http://schemas.openxmlformats.org/presentationml/2006/main">
-  <p:cSld name="Slide 25">
+  <p:cSld name="Slide 31">
     <p:bg>
       <p:bgPr>
         <a:blipFill dpi="0" rotWithShape="1">
-          <a:blip r:embed="rId1">
+          <a:blip r:embed="rId3">
             <a:lum/>
           </a:blip>
           <a:srcRect/>
@@ -6297,16 +4440,16 @@
           <a:bodyPr wrap="square" rtlCol="0" anchor="ctr"/>
           <a:lstStyle/>
           <a:p>
-            <a:pPr algn="ctr" indent="0" marL="0">
+            <a:pPr marL="0" indent="0" algn="ctr">
               <a:buNone/>
             </a:pPr>
             <a:r>
               <a:rPr lang="en-US" sz="3600" b="1" dirty="0">
                 <a:solidFill>
-                  <a:srgbClr val="00B4D8"/>
-                </a:solidFill>
-              </a:rPr>
-              <a:t>§7. 开源生态速查</a:t>
+                  <a:srgbClr val="F8F9FA"/>
+                </a:solidFill>
+              </a:rPr>
+              <a:t>感谢关注！</a:t>
             </a:r>
             <a:endParaRPr lang="en-US" sz="3600" dirty="0"/>
           </a:p>
@@ -6333,18 +4476,34 @@
           <a:bodyPr wrap="square" rtlCol="0" anchor="ctr"/>
           <a:lstStyle/>
           <a:p>
-            <a:pPr algn="ctr" indent="0" marL="0">
+            <a:pPr marL="0" indent="0" algn="ctr">
               <a:buNone/>
             </a:pPr>
             <a:r>
-              <a:rPr lang="en-US" sz="2000" dirty="0">
-                <a:solidFill>
-                  <a:srgbClr val="94A3B8"/>
-                </a:solidFill>
-              </a:rPr>
-              <a:t>按团队与场景选型</a:t>
-            </a:r>
-            <a:endParaRPr lang="en-US" sz="2000" dirty="0"/>
+              <a:rPr lang="zh-CN" altLang="en-US" sz="1800">
+                <a:solidFill>
+                  <a:srgbClr val="00B4D8"/>
+                </a:solidFill>
+              </a:rPr>
+              <a:t>财务分析</a:t>
+            </a:r>
+            <a:r>
+              <a:rPr lang="en-US" sz="1800">
+                <a:solidFill>
+                  <a:srgbClr val="00B4D8"/>
+                </a:solidFill>
+              </a:rPr>
+              <a:t>Agent </a:t>
+            </a:r>
+            <a:r>
+              <a:rPr lang="en-US" sz="1800" dirty="0">
+                <a:solidFill>
+                  <a:srgbClr val="00B4D8"/>
+                </a:solidFill>
+              </a:rPr>
+              <a:t>研究报告</a:t>
+            </a:r>
+            <a:endParaRPr lang="en-US" sz="1800" dirty="0"/>
           </a:p>
         </p:txBody>
       </p:sp>
@@ -6356,14 +4515,15 @@
 </p:sld>
 </file>
 
-<file path=ppt/slides/slide26.xml><?xml version="1.0" encoding="utf-8"?>
+<file path=ppt/slides/slide3.xml><?xml version="1.0" encoding="utf-8"?>
 <p:sld xmlns:a="http://schemas.openxmlformats.org/drawingml/2006/main" xmlns:r="http://schemas.openxmlformats.org/officeDocument/2006/relationships" xmlns:p="http://schemas.openxmlformats.org/presentationml/2006/main">
-  <p:cSld name="Slide 26">
+  <p:cSld name="Slide 3">
     <p:bg>
       <p:bgPr>
         <a:solidFill>
           <a:srgbClr val="1B1F3B"/>
         </a:solidFill>
+        <a:effectLst/>
       </p:bgPr>
     </p:bg>
     <p:spTree>
@@ -6401,7 +4561,7 @@
           <a:bodyPr wrap="square" rtlCol="0" anchor="ctr"/>
           <a:lstStyle/>
           <a:p>
-            <a:pPr indent="0" marL="0">
+            <a:pPr marL="0" indent="0">
               <a:buNone/>
             </a:pPr>
             <a:r>
@@ -6410,7 +4570,7 @@
                   <a:srgbClr val="00B4D8"/>
                 </a:solidFill>
               </a:rPr>
-              <a:t>团队选型参考</a:t>
+              <a:t>统一数据栈架构图</a:t>
             </a:r>
             <a:endParaRPr lang="en-US" sz="2400" dirty="0"/>
           </a:p>
@@ -6470,7 +4630,7 @@
                   <a:srgbClr val="F8F9FA"/>
                 </a:solidFill>
               </a:rPr>
-              <a:t>• dbt 数据团队: dbt + MetricFlow + Lightdash</a:t>
+              <a:t>原始数据 → 数据建模 (dbt-core: staging/intermediate/marts)</a:t>
             </a:r>
             <a:endParaRPr lang="en-US" sz="1800" dirty="0"/>
           </a:p>
@@ -6485,7 +4645,7 @@
                   <a:srgbClr val="F8F9FA"/>
                 </a:solidFill>
               </a:rPr>
-              <a:t>• 嵌入式分析: dbt + Cube + 自研前端</a:t>
+              <a:t>    ↓</a:t>
             </a:r>
             <a:endParaRPr lang="en-US" sz="1800" dirty="0"/>
           </a:p>
@@ -6500,7 +4660,7 @@
                   <a:srgbClr val="F8F9FA"/>
                 </a:solidFill>
               </a:rPr>
-              <a:t>• 业务自助: dbt + Metabase</a:t>
+              <a:t>指标 / 语义层 (MetricFlow, Cube, LookML, MDL/WrenAI ...)</a:t>
             </a:r>
             <a:endParaRPr lang="en-US" sz="1800" dirty="0"/>
           </a:p>
@@ -6515,7 +4675,7 @@
                   <a:srgbClr val="F8F9FA"/>
                 </a:solidFill>
               </a:rPr>
-              <a:t>• AI Agent 问数: dbt/建仓 + WrenAI (MDL-only)</a:t>
+              <a:t>    ├→ BI (Superset, Metabase, Looker ...) ──→ [ 人 ]</a:t>
             </a:r>
             <a:endParaRPr lang="en-US" sz="1800" dirty="0"/>
           </a:p>
@@ -6530,7 +4690,77 @@
                   <a:srgbClr val="F8F9FA"/>
                 </a:solidFill>
               </a:rPr>
-              <a:t>• 治理 + AI: DataHub + WrenAI</a:t>
+              <a:t>    └→ Agent </a:t>
+            </a:r>
+            <a:r>
+              <a:rPr lang="en-US" sz="1800" dirty="0" err="1">
+                <a:solidFill>
+                  <a:srgbClr val="F8F9FA"/>
+                </a:solidFill>
+              </a:rPr>
+              <a:t>问数层</a:t>
+            </a:r>
+            <a:r>
+              <a:rPr lang="en-US" sz="1800" dirty="0">
+                <a:solidFill>
+                  <a:srgbClr val="F8F9FA"/>
+                </a:solidFill>
+              </a:rPr>
+              <a:t> </a:t>
+            </a:r>
+            <a:endParaRPr lang="en-US" sz="1800" dirty="0"/>
+          </a:p>
+          <a:p>
+            <a:pPr marL="342900" indent="-342900">
+              <a:buSzPct val="100000"/>
+              <a:buChar char="•"/>
+            </a:pPr>
+            <a:endParaRPr lang="en-US" sz="1800" dirty="0"/>
+          </a:p>
+          <a:p>
+            <a:pPr marL="342900" indent="-342900">
+              <a:buSzPct val="100000"/>
+              <a:buChar char="•"/>
+            </a:pPr>
+            <a:r>
+              <a:rPr lang="zh-CN" altLang="en-US" sz="1800" dirty="0">
+                <a:solidFill>
+                  <a:srgbClr val="F8F9FA"/>
+                </a:solidFill>
+              </a:rPr>
+              <a:t>财务分析</a:t>
+            </a:r>
+            <a:r>
+              <a:rPr lang="en-US" altLang="zh-CN" sz="1800" dirty="0">
+                <a:solidFill>
+                  <a:srgbClr val="F8F9FA"/>
+                </a:solidFill>
+              </a:rPr>
+              <a:t>agent</a:t>
+            </a:r>
+            <a:r>
+              <a:rPr lang="en-US" sz="1800" dirty="0">
+                <a:solidFill>
+                  <a:srgbClr val="F8F9FA"/>
+                </a:solidFill>
+              </a:rPr>
+              <a:t> </a:t>
+            </a:r>
+            <a:r>
+              <a:rPr lang="en-US" sz="1800" dirty="0" err="1">
+                <a:solidFill>
+                  <a:srgbClr val="F8F9FA"/>
+                </a:solidFill>
+              </a:rPr>
+              <a:t>是最后一环的消费者与护栏</a:t>
+            </a:r>
+            <a:r>
+              <a:rPr lang="en-US" sz="1800" dirty="0">
+                <a:solidFill>
+                  <a:srgbClr val="F8F9FA"/>
+                </a:solidFill>
+              </a:rPr>
+              <a:t>。</a:t>
             </a:r>
             <a:endParaRPr lang="en-US" sz="1800" dirty="0"/>
           </a:p>
@@ -6544,201 +4774,13 @@
 </p:sld>
 </file>
 
-<file path=ppt/slides/slide27.xml><?xml version="1.0" encoding="utf-8"?>
+<file path=ppt/slides/slide4.xml><?xml version="1.0" encoding="utf-8"?>
 <p:sld xmlns:a="http://schemas.openxmlformats.org/drawingml/2006/main" xmlns:r="http://schemas.openxmlformats.org/officeDocument/2006/relationships" xmlns:p="http://schemas.openxmlformats.org/presentationml/2006/main">
-  <p:cSld name="Slide 27">
-    <p:bg>
-      <p:bgPr>
-        <a:solidFill>
-          <a:srgbClr val="1B1F3B"/>
-        </a:solidFill>
-      </p:bgPr>
-    </p:bg>
-    <p:spTree>
-      <p:nvGrpSpPr>
-        <p:cNvPr id="1" name=""/>
-        <p:cNvGrpSpPr/>
-        <p:nvPr/>
-      </p:nvGrpSpPr>
-      <p:grpSpPr>
-        <a:xfrm>
-          <a:off x="0" y="0"/>
-          <a:ext cx="0" cy="0"/>
-          <a:chOff x="0" y="0"/>
-          <a:chExt cx="0" cy="0"/>
-        </a:xfrm>
-      </p:grpSpPr>
-      <p:sp>
-        <p:nvSpPr>
-          <p:cNvPr id="2" name="Text 0"/>
-          <p:cNvSpPr/>
-          <p:nvPr/>
-        </p:nvSpPr>
-        <p:spPr>
-          <a:xfrm>
-            <a:off x="457200" y="274320"/>
-            <a:ext cx="8229600" cy="0"/>
-          </a:xfrm>
-          <a:prstGeom prst="rect">
-            <a:avLst/>
-          </a:prstGeom>
-          <a:noFill/>
-          <a:ln/>
-        </p:spPr>
-        <p:txBody>
-          <a:bodyPr wrap="square" rtlCol="0" anchor="ctr"/>
-          <a:lstStyle/>
-          <a:p>
-            <a:pPr indent="0" marL="0">
-              <a:buNone/>
-            </a:pPr>
-            <a:r>
-              <a:rPr lang="en-US" sz="2400" b="1" dirty="0">
-                <a:solidFill>
-                  <a:srgbClr val="00B4D8"/>
-                </a:solidFill>
-              </a:rPr>
-              <a:t>推荐研究顺序</a:t>
-            </a:r>
-            <a:endParaRPr lang="en-US" sz="2400" dirty="0"/>
-          </a:p>
-        </p:txBody>
-      </p:sp>
-      <p:sp>
-        <p:nvSpPr>
-          <p:cNvPr id="3" name="Shape 1"/>
-          <p:cNvSpPr/>
-          <p:nvPr/>
-        </p:nvSpPr>
-        <p:spPr>
-          <a:xfrm>
-            <a:off x="457200" y="731520"/>
-            <a:ext cx="8229600" cy="0"/>
-          </a:xfrm>
-          <a:prstGeom prst="line">
-            <a:avLst/>
-          </a:prstGeom>
-          <a:noFill/>
-          <a:ln w="25400">
-            <a:solidFill>
-              <a:srgbClr val="00B4D8"/>
-            </a:solidFill>
-            <a:prstDash val="solid"/>
-          </a:ln>
-        </p:spPr>
-      </p:sp>
-      <p:sp>
-        <p:nvSpPr>
-          <p:cNvPr id="4" name="Text 2"/>
-          <p:cNvSpPr/>
-          <p:nvPr/>
-        </p:nvSpPr>
-        <p:spPr>
-          <a:xfrm>
-            <a:off x="457200" y="1097280"/>
-            <a:ext cx="8229600" cy="3600450"/>
-          </a:xfrm>
-          <a:prstGeom prst="rect">
-            <a:avLst/>
-          </a:prstGeom>
-          <a:noFill/>
-          <a:ln/>
-        </p:spPr>
-        <p:txBody>
-          <a:bodyPr wrap="square" rtlCol="0" anchor="t"/>
-          <a:lstStyle/>
-          <a:p>
-            <a:pPr marL="342900" indent="-342900">
-              <a:buSzPct val="100000"/>
-              <a:buChar char="•"/>
-            </a:pPr>
-            <a:r>
-              <a:rPr lang="en-US" sz="1800" dirty="0">
-                <a:solidFill>
-                  <a:srgbClr val="F8F9FA"/>
-                </a:solidFill>
-              </a:rPr>
-              <a:t>1. 建模 (dbt-core) - 理解 staging/marts</a:t>
-            </a:r>
-            <a:endParaRPr lang="en-US" sz="1800" dirty="0"/>
-          </a:p>
-          <a:p>
-            <a:pPr marL="342900" indent="-342900">
-              <a:buSzPct val="100000"/>
-              <a:buChar char="•"/>
-            </a:pPr>
-            <a:r>
-              <a:rPr lang="en-US" sz="1800" dirty="0">
-                <a:solidFill>
-                  <a:srgbClr val="F8F9FA"/>
-                </a:solidFill>
-              </a:rPr>
-              <a:t>2. 语义 (Cube/MetricFlow) - 理解指标代码化</a:t>
-            </a:r>
-            <a:endParaRPr lang="en-US" sz="1800" dirty="0"/>
-          </a:p>
-          <a:p>
-            <a:pPr marL="342900" indent="-342900">
-              <a:buSzPct val="100000"/>
-              <a:buChar char="•"/>
-            </a:pPr>
-            <a:r>
-              <a:rPr lang="en-US" sz="1800" dirty="0">
-                <a:solidFill>
-                  <a:srgbClr val="F8F9FA"/>
-                </a:solidFill>
-              </a:rPr>
-              <a:t>3. BI (Superset) - 理解人如何消费数据</a:t>
-            </a:r>
-            <a:endParaRPr lang="en-US" sz="1800" dirty="0"/>
-          </a:p>
-          <a:p>
-            <a:pPr marL="342900" indent="-342900">
-              <a:buSzPct val="100000"/>
-              <a:buChar char="•"/>
-            </a:pPr>
-            <a:r>
-              <a:rPr lang="en-US" sz="1800" dirty="0">
-                <a:solidFill>
-                  <a:srgbClr val="F8F9FA"/>
-                </a:solidFill>
-              </a:rPr>
-              <a:t>4. 治理 (DataHub) - 理解血缘与元数据</a:t>
-            </a:r>
-            <a:endParaRPr lang="en-US" sz="1800" dirty="0"/>
-          </a:p>
-          <a:p>
-            <a:pPr marL="342900" indent="-342900">
-              <a:buSzPct val="100000"/>
-              <a:buChar char="•"/>
-            </a:pPr>
-            <a:r>
-              <a:rPr lang="en-US" sz="1800" dirty="0">
-                <a:solidFill>
-                  <a:srgbClr val="F8F9FA"/>
-                </a:solidFill>
-              </a:rPr>
-              <a:t>5. Agent (WrenAI) - MDL、Dry-plan、SDK 整合</a:t>
-            </a:r>
-            <a:endParaRPr lang="en-US" sz="1800" dirty="0"/>
-          </a:p>
-        </p:txBody>
-      </p:sp>
-    </p:spTree>
-  </p:cSld>
-  <p:clrMapOvr>
-    <a:masterClrMapping/>
-  </p:clrMapOvr>
-</p:sld>
-</file>
-
-<file path=ppt/slides/slide28.xml><?xml version="1.0" encoding="utf-8"?>
-<p:sld xmlns:a="http://schemas.openxmlformats.org/drawingml/2006/main" xmlns:r="http://schemas.openxmlformats.org/officeDocument/2006/relationships" xmlns:p="http://schemas.openxmlformats.org/presentationml/2006/main">
-  <p:cSld name="Slide 28">
+  <p:cSld name="Slide 5">
     <p:bg>
       <p:bgPr>
         <a:blipFill dpi="0" rotWithShape="1">
-          <a:blip r:embed="rId1">
+          <a:blip r:embed="rId3">
             <a:lum/>
           </a:blip>
           <a:srcRect/>
@@ -6784,7 +4826,7 @@
           <a:bodyPr wrap="square" rtlCol="0" anchor="ctr"/>
           <a:lstStyle/>
           <a:p>
-            <a:pPr algn="ctr" indent="0" marL="0">
+            <a:pPr marL="0" indent="0" algn="ctr">
               <a:buNone/>
             </a:pPr>
             <a:r>
@@ -6793,7 +4835,7 @@
                   <a:srgbClr val="00B4D8"/>
                 </a:solidFill>
               </a:rPr>
-              <a:t>§8. 结论</a:t>
+              <a:t>§1. 历史演进</a:t>
             </a:r>
             <a:endParaRPr lang="en-US" sz="3600" dirty="0"/>
           </a:p>
@@ -6820,7 +4862,7 @@
           <a:bodyPr wrap="square" rtlCol="0" anchor="ctr"/>
           <a:lstStyle/>
           <a:p>
-            <a:pPr algn="ctr" indent="0" marL="0">
+            <a:pPr marL="0" indent="0" algn="ctr">
               <a:buNone/>
             </a:pPr>
             <a:r>
@@ -6829,7 +4871,7 @@
                   <a:srgbClr val="94A3B8"/>
                 </a:solidFill>
               </a:rPr>
-              <a:t>三个判断与最终站位</a:t>
+              <a:t>从 IT 报表到 Agent 分析</a:t>
             </a:r>
             <a:endParaRPr lang="en-US" sz="2000" dirty="0"/>
           </a:p>
@@ -6843,14 +4885,15 @@
 </p:sld>
 </file>
 
-<file path=ppt/slides/slide29.xml><?xml version="1.0" encoding="utf-8"?>
+<file path=ppt/slides/slide5.xml><?xml version="1.0" encoding="utf-8"?>
 <p:sld xmlns:a="http://schemas.openxmlformats.org/drawingml/2006/main" xmlns:r="http://schemas.openxmlformats.org/officeDocument/2006/relationships" xmlns:p="http://schemas.openxmlformats.org/presentationml/2006/main">
-  <p:cSld name="Slide 29">
+  <p:cSld name="Slide 6">
     <p:bg>
       <p:bgPr>
         <a:solidFill>
           <a:srgbClr val="1B1F3B"/>
         </a:solidFill>
+        <a:effectLst/>
       </p:bgPr>
     </p:bg>
     <p:spTree>
@@ -6888,7 +4931,7 @@
           <a:bodyPr wrap="square" rtlCol="0" anchor="ctr"/>
           <a:lstStyle/>
           <a:p>
-            <a:pPr indent="0" marL="0">
+            <a:pPr marL="0" indent="0">
               <a:buNone/>
             </a:pPr>
             <a:r>
@@ -6897,7 +4940,7 @@
                   <a:srgbClr val="00B4D8"/>
                 </a:solidFill>
               </a:rPr>
-              <a:t>行业三大趋势判断</a:t>
+              <a:t>BI 的四个发展阶段</a:t>
             </a:r>
             <a:endParaRPr lang="en-US" sz="2400" dirty="0"/>
           </a:p>
@@ -6957,7 +5000,7 @@
                   <a:srgbClr val="F8F9FA"/>
                 </a:solidFill>
               </a:rPr>
-              <a:t>1. 语义层从 '可选' 变为 '必选' (GenAI 时代分析底座)</a:t>
+              <a:t>1. BI 1.0 (1990s): IT 中心化报表 (Cognos, Oracle BIEE)</a:t>
             </a:r>
             <a:endParaRPr lang="en-US" sz="1800" dirty="0"/>
           </a:p>
@@ -6972,7 +5015,7 @@
                   <a:srgbClr val="F8F9FA"/>
                 </a:solidFill>
               </a:rPr>
-              <a:t>2. Text-to-Semantic 在 BI 场景绝对优于纯 Text-to-SQL</a:t>
+              <a:t>2. BI 2.0 (2000s): 自助 BI、拖拽式 (Tableau, Power BI, Superset)</a:t>
             </a:r>
             <a:endParaRPr lang="en-US" sz="1800" dirty="0"/>
           </a:p>
@@ -6987,7 +5030,7 @@
                   <a:srgbClr val="F8F9FA"/>
                 </a:solidFill>
               </a:rPr>
-              <a:t>3. 数据质量观测必须进入 Agent 链路，避免 '自信地错'</a:t>
+              <a:t>3. BI 3.0 / MDS (2015+): 云仓、dbt、Headless 语义层、BI as Code</a:t>
             </a:r>
             <a:endParaRPr lang="en-US" sz="1800" dirty="0"/>
           </a:p>
@@ -7002,7 +5045,7 @@
                   <a:srgbClr val="F8F9FA"/>
                 </a:solidFill>
               </a:rPr>
-              <a:t>• 企业瓶颈：目前大多在 '语义建设成熟度'，而非引擎性能</a:t>
+              <a:t>4. Agent 分析 (2023+): NL 问数、MCP、语义层成为 AI 基础设施</a:t>
             </a:r>
             <a:endParaRPr lang="en-US" sz="1800" dirty="0"/>
           </a:p>
@@ -7016,396 +5059,13 @@
 </p:sld>
 </file>
 
-<file path=ppt/slides/slide3.xml><?xml version="1.0" encoding="utf-8"?>
+<file path=ppt/slides/slide6.xml><?xml version="1.0" encoding="utf-8"?>
 <p:sld xmlns:a="http://schemas.openxmlformats.org/drawingml/2006/main" xmlns:r="http://schemas.openxmlformats.org/officeDocument/2006/relationships" xmlns:p="http://schemas.openxmlformats.org/presentationml/2006/main">
-  <p:cSld name="Slide 3">
-    <p:bg>
-      <p:bgPr>
-        <a:solidFill>
-          <a:srgbClr val="1B1F3B"/>
-        </a:solidFill>
-      </p:bgPr>
-    </p:bg>
-    <p:spTree>
-      <p:nvGrpSpPr>
-        <p:cNvPr id="1" name=""/>
-        <p:cNvGrpSpPr/>
-        <p:nvPr/>
-      </p:nvGrpSpPr>
-      <p:grpSpPr>
-        <a:xfrm>
-          <a:off x="0" y="0"/>
-          <a:ext cx="0" cy="0"/>
-          <a:chOff x="0" y="0"/>
-          <a:chExt cx="0" cy="0"/>
-        </a:xfrm>
-      </p:grpSpPr>
-      <p:sp>
-        <p:nvSpPr>
-          <p:cNvPr id="2" name="Text 0"/>
-          <p:cNvSpPr/>
-          <p:nvPr/>
-        </p:nvSpPr>
-        <p:spPr>
-          <a:xfrm>
-            <a:off x="457200" y="274320"/>
-            <a:ext cx="8229600" cy="0"/>
-          </a:xfrm>
-          <a:prstGeom prst="rect">
-            <a:avLst/>
-          </a:prstGeom>
-          <a:noFill/>
-          <a:ln/>
-        </p:spPr>
-        <p:txBody>
-          <a:bodyPr wrap="square" rtlCol="0" anchor="ctr"/>
-          <a:lstStyle/>
-          <a:p>
-            <a:pPr indent="0" marL="0">
-              <a:buNone/>
-            </a:pPr>
-            <a:r>
-              <a:rPr lang="en-US" sz="2400" b="1" dirty="0">
-                <a:solidFill>
-                  <a:srgbClr val="00B4D8"/>
-                </a:solidFill>
-              </a:rPr>
-              <a:t>统一数据栈架构图</a:t>
-            </a:r>
-            <a:endParaRPr lang="en-US" sz="2400" dirty="0"/>
-          </a:p>
-        </p:txBody>
-      </p:sp>
-      <p:sp>
-        <p:nvSpPr>
-          <p:cNvPr id="3" name="Shape 1"/>
-          <p:cNvSpPr/>
-          <p:nvPr/>
-        </p:nvSpPr>
-        <p:spPr>
-          <a:xfrm>
-            <a:off x="457200" y="731520"/>
-            <a:ext cx="8229600" cy="0"/>
-          </a:xfrm>
-          <a:prstGeom prst="line">
-            <a:avLst/>
-          </a:prstGeom>
-          <a:noFill/>
-          <a:ln w="25400">
-            <a:solidFill>
-              <a:srgbClr val="00B4D8"/>
-            </a:solidFill>
-            <a:prstDash val="solid"/>
-          </a:ln>
-        </p:spPr>
-      </p:sp>
-      <p:sp>
-        <p:nvSpPr>
-          <p:cNvPr id="4" name="Text 2"/>
-          <p:cNvSpPr/>
-          <p:nvPr/>
-        </p:nvSpPr>
-        <p:spPr>
-          <a:xfrm>
-            <a:off x="457200" y="1097280"/>
-            <a:ext cx="8229600" cy="3600450"/>
-          </a:xfrm>
-          <a:prstGeom prst="rect">
-            <a:avLst/>
-          </a:prstGeom>
-          <a:noFill/>
-          <a:ln/>
-        </p:spPr>
-        <p:txBody>
-          <a:bodyPr wrap="square" rtlCol="0" anchor="t"/>
-          <a:lstStyle/>
-          <a:p>
-            <a:pPr marL="342900" indent="-342900">
-              <a:buSzPct val="100000"/>
-              <a:buChar char="•"/>
-            </a:pPr>
-            <a:r>
-              <a:rPr lang="en-US" sz="1800" dirty="0">
-                <a:solidFill>
-                  <a:srgbClr val="F8F9FA"/>
-                </a:solidFill>
-              </a:rPr>
-              <a:t>原始数据 → 数据建模 (dbt-core: staging/intermediate/marts)</a:t>
-            </a:r>
-            <a:endParaRPr lang="en-US" sz="1800" dirty="0"/>
-          </a:p>
-          <a:p>
-            <a:pPr marL="342900" indent="-342900">
-              <a:buSzPct val="100000"/>
-              <a:buChar char="•"/>
-            </a:pPr>
-            <a:r>
-              <a:rPr lang="en-US" sz="1800" dirty="0">
-                <a:solidFill>
-                  <a:srgbClr val="F8F9FA"/>
-                </a:solidFill>
-              </a:rPr>
-              <a:t>    ↓</a:t>
-            </a:r>
-            <a:endParaRPr lang="en-US" sz="1800" dirty="0"/>
-          </a:p>
-          <a:p>
-            <a:pPr marL="342900" indent="-342900">
-              <a:buSzPct val="100000"/>
-              <a:buChar char="•"/>
-            </a:pPr>
-            <a:r>
-              <a:rPr lang="en-US" sz="1800" dirty="0">
-                <a:solidFill>
-                  <a:srgbClr val="F8F9FA"/>
-                </a:solidFill>
-              </a:rPr>
-              <a:t>指标 / 语义层 (MetricFlow, Cube, LookML, MDL/WrenAI ...)</a:t>
-            </a:r>
-            <a:endParaRPr lang="en-US" sz="1800" dirty="0"/>
-          </a:p>
-          <a:p>
-            <a:pPr marL="342900" indent="-342900">
-              <a:buSzPct val="100000"/>
-              <a:buChar char="•"/>
-            </a:pPr>
-            <a:r>
-              <a:rPr lang="en-US" sz="1800" dirty="0">
-                <a:solidFill>
-                  <a:srgbClr val="F8F9FA"/>
-                </a:solidFill>
-              </a:rPr>
-              <a:t>    ├→ BI (Superset, Metabase, Looker ...) ──→ [ 人 ]</a:t>
-            </a:r>
-            <a:endParaRPr lang="en-US" sz="1800" dirty="0"/>
-          </a:p>
-          <a:p>
-            <a:pPr marL="342900" indent="-342900">
-              <a:buSzPct val="100000"/>
-              <a:buChar char="•"/>
-            </a:pPr>
-            <a:r>
-              <a:rPr lang="en-US" sz="1800" dirty="0">
-                <a:solidFill>
-                  <a:srgbClr val="F8F9FA"/>
-                </a:solidFill>
-              </a:rPr>
-              <a:t>    └→ Agent 问数层 (WrenAI, Cube API, Vanna ...) ──→ [ Agent ]</a:t>
-            </a:r>
-            <a:endParaRPr lang="en-US" sz="1800" dirty="0"/>
-          </a:p>
-          <a:p>
-            <a:pPr marL="342900" indent="-342900">
-              <a:buSzPct val="100000"/>
-              <a:buChar char="•"/>
-            </a:pPr>
-            <a:endParaRPr lang="en-US" sz="1800" dirty="0"/>
-          </a:p>
-          <a:p>
-            <a:pPr marL="342900" indent="-342900">
-              <a:buSzPct val="100000"/>
-              <a:buChar char="•"/>
-            </a:pPr>
-            <a:r>
-              <a:rPr lang="en-US" sz="1800" dirty="0">
-                <a:solidFill>
-                  <a:srgbClr val="F8F9FA"/>
-                </a:solidFill>
-              </a:rPr>
-              <a:t>WrenAI 是最后一环的消费者与护栏，而非 dbt/BI 的替代品。</a:t>
-            </a:r>
-            <a:endParaRPr lang="en-US" sz="1800" dirty="0"/>
-          </a:p>
-        </p:txBody>
-      </p:sp>
-    </p:spTree>
-  </p:cSld>
-  <p:clrMapOvr>
-    <a:masterClrMapping/>
-  </p:clrMapOvr>
-</p:sld>
-</file>
-
-<file path=ppt/slides/slide30.xml><?xml version="1.0" encoding="utf-8"?>
-<p:sld xmlns:a="http://schemas.openxmlformats.org/drawingml/2006/main" xmlns:r="http://schemas.openxmlformats.org/officeDocument/2006/relationships" xmlns:p="http://schemas.openxmlformats.org/presentationml/2006/main">
-  <p:cSld name="Slide 30">
-    <p:bg>
-      <p:bgPr>
-        <a:solidFill>
-          <a:srgbClr val="1B1F3B"/>
-        </a:solidFill>
-      </p:bgPr>
-    </p:bg>
-    <p:spTree>
-      <p:nvGrpSpPr>
-        <p:cNvPr id="1" name=""/>
-        <p:cNvGrpSpPr/>
-        <p:nvPr/>
-      </p:nvGrpSpPr>
-      <p:grpSpPr>
-        <a:xfrm>
-          <a:off x="0" y="0"/>
-          <a:ext cx="0" cy="0"/>
-          <a:chOff x="0" y="0"/>
-          <a:chExt cx="0" cy="0"/>
-        </a:xfrm>
-      </p:grpSpPr>
-      <p:sp>
-        <p:nvSpPr>
-          <p:cNvPr id="2" name="Text 0"/>
-          <p:cNvSpPr/>
-          <p:nvPr/>
-        </p:nvSpPr>
-        <p:spPr>
-          <a:xfrm>
-            <a:off x="457200" y="274320"/>
-            <a:ext cx="8229600" cy="0"/>
-          </a:xfrm>
-          <a:prstGeom prst="rect">
-            <a:avLst/>
-          </a:prstGeom>
-          <a:noFill/>
-          <a:ln/>
-        </p:spPr>
-        <p:txBody>
-          <a:bodyPr wrap="square" rtlCol="0" anchor="ctr"/>
-          <a:lstStyle/>
-          <a:p>
-            <a:pPr indent="0" marL="0">
-              <a:buNone/>
-            </a:pPr>
-            <a:r>
-              <a:rPr lang="en-US" sz="2400" b="1" dirty="0">
-                <a:solidFill>
-                  <a:srgbClr val="00B4D8"/>
-                </a:solidFill>
-              </a:rPr>
-              <a:t>WrenAI 在技术栈中的地位</a:t>
-            </a:r>
-            <a:endParaRPr lang="en-US" sz="2400" dirty="0"/>
-          </a:p>
-        </p:txBody>
-      </p:sp>
-      <p:sp>
-        <p:nvSpPr>
-          <p:cNvPr id="3" name="Shape 1"/>
-          <p:cNvSpPr/>
-          <p:nvPr/>
-        </p:nvSpPr>
-        <p:spPr>
-          <a:xfrm>
-            <a:off x="457200" y="731520"/>
-            <a:ext cx="8229600" cy="0"/>
-          </a:xfrm>
-          <a:prstGeom prst="line">
-            <a:avLst/>
-          </a:prstGeom>
-          <a:noFill/>
-          <a:ln w="25400">
-            <a:solidFill>
-              <a:srgbClr val="00B4D8"/>
-            </a:solidFill>
-            <a:prstDash val="solid"/>
-          </a:ln>
-        </p:spPr>
-      </p:sp>
-      <p:sp>
-        <p:nvSpPr>
-          <p:cNvPr id="4" name="Text 2"/>
-          <p:cNvSpPr/>
-          <p:nvPr/>
-        </p:nvSpPr>
-        <p:spPr>
-          <a:xfrm>
-            <a:off x="457200" y="1097280"/>
-            <a:ext cx="8229600" cy="3600450"/>
-          </a:xfrm>
-          <a:prstGeom prst="rect">
-            <a:avLst/>
-          </a:prstGeom>
-          <a:noFill/>
-          <a:ln/>
-        </p:spPr>
-        <p:txBody>
-          <a:bodyPr wrap="square" rtlCol="0" anchor="t"/>
-          <a:lstStyle/>
-          <a:p>
-            <a:pPr marL="342900" indent="-342900">
-              <a:buSzPct val="100000"/>
-              <a:buChar char="•"/>
-            </a:pPr>
-            <a:r>
-              <a:rPr lang="en-US" sz="1800" dirty="0">
-                <a:solidFill>
-                  <a:srgbClr val="F8F9FA"/>
-                </a:solidFill>
-              </a:rPr>
-              <a:t>• 不替代：dbt ELT、专业 BI 报表、金融量化 Notebook</a:t>
-            </a:r>
-            <a:endParaRPr lang="en-US" sz="1800" dirty="0"/>
-          </a:p>
-          <a:p>
-            <a:pPr marL="342900" indent="-342900">
-              <a:buSzPct val="100000"/>
-              <a:buChar char="•"/>
-            </a:pPr>
-            <a:r>
-              <a:rPr lang="en-US" sz="1800" dirty="0">
-                <a:solidFill>
-                  <a:srgbClr val="F8F9FA"/>
-                </a:solidFill>
-              </a:rPr>
-              <a:t>• 核心位：Agent-native 查询层 / 上下文管理层</a:t>
-            </a:r>
-            <a:endParaRPr lang="en-US" sz="1800" dirty="0"/>
-          </a:p>
-          <a:p>
-            <a:pPr marL="342900" indent="-342900">
-              <a:buSzPct val="100000"/>
-              <a:buChar char="•"/>
-            </a:pPr>
-            <a:r>
-              <a:rPr lang="en-US" sz="1800" dirty="0">
-                <a:solidFill>
-                  <a:srgbClr val="F8F9FA"/>
-                </a:solidFill>
-              </a:rPr>
-              <a:t>• 扩展性：通过 SDK 接入各类应用 (如 TradingAgents)</a:t>
-            </a:r>
-            <a:endParaRPr lang="en-US" sz="1800" dirty="0"/>
-          </a:p>
-          <a:p>
-            <a:pPr marL="342900" indent="-342900">
-              <a:buSzPct val="100000"/>
-              <a:buChar char="•"/>
-            </a:pPr>
-            <a:r>
-              <a:rPr lang="en-US" sz="1800" dirty="0">
-                <a:solidFill>
-                  <a:srgbClr val="F8F9FA"/>
-                </a:solidFill>
-              </a:rPr>
-              <a:t>• 建议：先跑通 /wren-onboarding，建立 '语义限制 SQL' 的直觉</a:t>
-            </a:r>
-            <a:endParaRPr lang="en-US" sz="1800" dirty="0"/>
-          </a:p>
-        </p:txBody>
-      </p:sp>
-    </p:spTree>
-  </p:cSld>
-  <p:clrMapOvr>
-    <a:masterClrMapping/>
-  </p:clrMapOvr>
-</p:sld>
-</file>
-
-<file path=ppt/slides/slide31.xml><?xml version="1.0" encoding="utf-8"?>
-<p:sld xmlns:a="http://schemas.openxmlformats.org/drawingml/2006/main" xmlns:r="http://schemas.openxmlformats.org/officeDocument/2006/relationships" xmlns:p="http://schemas.openxmlformats.org/presentationml/2006/main">
-  <p:cSld name="Slide 31">
+  <p:cSld name="Slide 8">
     <p:bg>
       <p:bgPr>
         <a:blipFill dpi="0" rotWithShape="1">
-          <a:blip r:embed="rId1">
+          <a:blip r:embed="rId3">
             <a:lum/>
           </a:blip>
           <a:srcRect/>
@@ -7451,16 +5111,16 @@
           <a:bodyPr wrap="square" rtlCol="0" anchor="ctr"/>
           <a:lstStyle/>
           <a:p>
-            <a:pPr algn="ctr" indent="0" marL="0">
+            <a:pPr marL="0" indent="0" algn="ctr">
               <a:buNone/>
             </a:pPr>
             <a:r>
               <a:rPr lang="en-US" sz="3600" b="1" dirty="0">
                 <a:solidFill>
-                  <a:srgbClr val="F8F9FA"/>
-                </a:solidFill>
-              </a:rPr>
-              <a:t>感谢关注！</a:t>
+                  <a:srgbClr val="00B4D8"/>
+                </a:solidFill>
+              </a:rPr>
+              <a:t>§2. 背景层：dbt 与物理建模</a:t>
             </a:r>
             <a:endParaRPr lang="en-US" sz="3600" dirty="0"/>
           </a:p>
@@ -7487,18 +5147,18 @@
           <a:bodyPr wrap="square" rtlCol="0" anchor="ctr"/>
           <a:lstStyle/>
           <a:p>
-            <a:pPr algn="ctr" indent="0" marL="0">
+            <a:pPr marL="0" indent="0" algn="ctr">
               <a:buNone/>
             </a:pPr>
             <a:r>
-              <a:rPr lang="en-US" sz="1800" dirty="0">
-                <a:solidFill>
-                  <a:srgbClr val="00B4D8"/>
-                </a:solidFill>
-              </a:rPr>
-              <a:t>BI × Agent 研究报告</a:t>
-            </a:r>
-            <a:endParaRPr lang="en-US" sz="1800" dirty="0"/>
+              <a:rPr lang="en-US" sz="2000" dirty="0">
+                <a:solidFill>
+                  <a:srgbClr val="94A3B8"/>
+                </a:solidFill>
+              </a:rPr>
+              <a:t>表从哪来？Agent 面对什么？</a:t>
+            </a:r>
+            <a:endParaRPr lang="en-US" sz="2000" dirty="0"/>
           </a:p>
         </p:txBody>
       </p:sp>
@@ -7510,14 +5170,15 @@
 </p:sld>
 </file>
 
-<file path=ppt/slides/slide4.xml><?xml version="1.0" encoding="utf-8"?>
+<file path=ppt/slides/slide7.xml><?xml version="1.0" encoding="utf-8"?>
 <p:sld xmlns:a="http://schemas.openxmlformats.org/drawingml/2006/main" xmlns:r="http://schemas.openxmlformats.org/officeDocument/2006/relationships" xmlns:p="http://schemas.openxmlformats.org/presentationml/2006/main">
-  <p:cSld name="Slide 4">
+  <p:cSld name="Slide 9">
     <p:bg>
       <p:bgPr>
         <a:solidFill>
           <a:srgbClr val="1B1F3B"/>
         </a:solidFill>
+        <a:effectLst/>
       </p:bgPr>
     </p:bg>
     <p:spTree>
@@ -7555,7 +5216,7 @@
           <a:bodyPr wrap="square" rtlCol="0" anchor="ctr"/>
           <a:lstStyle/>
           <a:p>
-            <a:pPr indent="0" marL="0">
+            <a:pPr marL="0" indent="0">
               <a:buNone/>
             </a:pPr>
             <a:r>
@@ -7564,7 +5225,7 @@
                   <a:srgbClr val="00B4D8"/>
                 </a:solidFill>
               </a:rPr>
-              <a:t>关于 WrenAI 版本定位</a:t>
+              <a:t>dbt: 数据仓库的生产线</a:t>
             </a:r>
             <a:endParaRPr lang="en-US" sz="2400" dirty="0"/>
           </a:p>
@@ -7624,7 +5285,7 @@
                   <a:srgbClr val="F8F9FA"/>
                 </a:solidFill>
               </a:rPr>
-              <a:t>• 主分支 (2026)：Agent 上下文层</a:t>
+              <a:t>• dbt-core: 开源建模核心</a:t>
             </a:r>
             <a:endParaRPr lang="en-US" sz="1800" dirty="0"/>
           </a:p>
@@ -7639,7 +5300,7 @@
                   <a:srgbClr val="F8F9FA"/>
                 </a:solidFill>
               </a:rPr>
-              <a:t>  (MDL, Engine, Skills, wren-langchain, wren-pydantic)</a:t>
+              <a:t>• 建模流程：raw → staging → intermediate → marts</a:t>
             </a:r>
             <a:endParaRPr lang="en-US" sz="1800" dirty="0"/>
           </a:p>
@@ -7654,7 +5315,7 @@
                   <a:srgbClr val="F8F9FA"/>
                 </a:solidFill>
               </a:rPr>
-              <a:t>• Legacy (v1)：旧版 GenBI 应用</a:t>
+              <a:t>• 核心价值：将原始 Schema 整理成 '业务可查的表'</a:t>
             </a:r>
             <a:endParaRPr lang="en-US" sz="1800" dirty="0"/>
           </a:p>
@@ -7669,22 +5330,7 @@
                   <a:srgbClr val="F8F9FA"/>
                 </a:solidFill>
               </a:rPr>
-              <a:t>• 核心使命：给 Agent 提供业务语义、示例、memory 与治理</a:t>
-            </a:r>
-            <a:endParaRPr lang="en-US" sz="1800" dirty="0"/>
-          </a:p>
-          <a:p>
-            <a:pPr marL="342900" indent="-342900">
-              <a:buSzPct val="100000"/>
-              <a:buChar char="•"/>
-            </a:pPr>
-            <a:r>
-              <a:rPr lang="en-US" sz="1800" dirty="0">
-                <a:solidFill>
-                  <a:srgbClr val="F8F9FA"/>
-                </a:solidFill>
-              </a:rPr>
-              <a:t>• 技术底座：Apache DataFusion (Rust) + Python SDK</a:t>
+              <a:t>• 物理护拦：无此层，语义层与 Agent 将面对混乱数据源</a:t>
             </a:r>
             <a:endParaRPr lang="en-US" sz="1800" dirty="0"/>
           </a:p>
@@ -7698,13 +5344,291 @@
 </p:sld>
 </file>
 
-<file path=ppt/slides/slide5.xml><?xml version="1.0" encoding="utf-8"?>
+<file path=ppt/slides/slide8.xml><?xml version="1.0" encoding="utf-8"?>
 <p:sld xmlns:a="http://schemas.openxmlformats.org/drawingml/2006/main" xmlns:r="http://schemas.openxmlformats.org/officeDocument/2006/relationships" xmlns:p="http://schemas.openxmlformats.org/presentationml/2006/main">
-  <p:cSld name="Slide 5">
+  <p:cSld name="Slide 10">
+    <p:bg>
+      <p:bgPr>
+        <a:solidFill>
+          <a:srgbClr val="1B1F3B"/>
+        </a:solidFill>
+        <a:effectLst/>
+      </p:bgPr>
+    </p:bg>
+    <p:spTree>
+      <p:nvGrpSpPr>
+        <p:cNvPr id="1" name=""/>
+        <p:cNvGrpSpPr/>
+        <p:nvPr/>
+      </p:nvGrpSpPr>
+      <p:grpSpPr>
+        <a:xfrm>
+          <a:off x="0" y="0"/>
+          <a:ext cx="0" cy="0"/>
+          <a:chOff x="0" y="0"/>
+          <a:chExt cx="0" cy="0"/>
+        </a:xfrm>
+      </p:grpSpPr>
+      <p:sp>
+        <p:nvSpPr>
+          <p:cNvPr id="2" name="Text 0"/>
+          <p:cNvSpPr/>
+          <p:nvPr/>
+        </p:nvSpPr>
+        <p:spPr>
+          <a:xfrm>
+            <a:off x="457200" y="274320"/>
+            <a:ext cx="8229600" cy="0"/>
+          </a:xfrm>
+          <a:prstGeom prst="rect">
+            <a:avLst/>
+          </a:prstGeom>
+          <a:noFill/>
+          <a:ln/>
+        </p:spPr>
+        <p:txBody>
+          <a:bodyPr wrap="square" rtlCol="0" anchor="ctr"/>
+          <a:lstStyle/>
+          <a:p>
+            <a:pPr marL="0" indent="0">
+              <a:buNone/>
+            </a:pPr>
+            <a:r>
+              <a:rPr lang="en-US" sz="2400" b="1" dirty="0">
+                <a:solidFill>
+                  <a:srgbClr val="00B4D8"/>
+                </a:solidFill>
+              </a:rPr>
+              <a:t>dbt 与 </a:t>
+            </a:r>
+            <a:r>
+              <a:rPr lang="zh-CN" altLang="en-US" sz="2400" b="1" dirty="0">
+                <a:solidFill>
+                  <a:srgbClr val="00B4D8"/>
+                </a:solidFill>
+              </a:rPr>
+              <a:t>财务分析</a:t>
+            </a:r>
+            <a:r>
+              <a:rPr lang="en-US" altLang="zh-CN" sz="2400" b="1" dirty="0">
+                <a:solidFill>
+                  <a:srgbClr val="00B4D8"/>
+                </a:solidFill>
+              </a:rPr>
+              <a:t>agent</a:t>
+            </a:r>
+            <a:r>
+              <a:rPr lang="en-US" sz="2400" b="1" dirty="0">
+                <a:solidFill>
+                  <a:srgbClr val="00B4D8"/>
+                </a:solidFill>
+              </a:rPr>
+              <a:t> 的协作关系</a:t>
+            </a:r>
+            <a:endParaRPr lang="en-US" sz="2400" dirty="0"/>
+          </a:p>
+        </p:txBody>
+      </p:sp>
+      <p:sp>
+        <p:nvSpPr>
+          <p:cNvPr id="3" name="Shape 1"/>
+          <p:cNvSpPr/>
+          <p:nvPr/>
+        </p:nvSpPr>
+        <p:spPr>
+          <a:xfrm>
+            <a:off x="457200" y="731520"/>
+            <a:ext cx="8229600" cy="0"/>
+          </a:xfrm>
+          <a:prstGeom prst="line">
+            <a:avLst/>
+          </a:prstGeom>
+          <a:noFill/>
+          <a:ln w="25400">
+            <a:solidFill>
+              <a:srgbClr val="00B4D8"/>
+            </a:solidFill>
+            <a:prstDash val="solid"/>
+          </a:ln>
+        </p:spPr>
+      </p:sp>
+      <p:sp>
+        <p:nvSpPr>
+          <p:cNvPr id="4" name="Text 2"/>
+          <p:cNvSpPr/>
+          <p:nvPr/>
+        </p:nvSpPr>
+        <p:spPr>
+          <a:xfrm>
+            <a:off x="457200" y="1097280"/>
+            <a:ext cx="8229600" cy="3600450"/>
+          </a:xfrm>
+          <a:prstGeom prst="rect">
+            <a:avLst/>
+          </a:prstGeom>
+          <a:noFill/>
+          <a:ln/>
+        </p:spPr>
+        <p:txBody>
+          <a:bodyPr wrap="square" rtlCol="0" anchor="t"/>
+          <a:lstStyle/>
+          <a:p>
+            <a:pPr marL="342900" indent="-342900">
+              <a:buSzPct val="100000"/>
+              <a:buChar char="•"/>
+            </a:pPr>
+            <a:r>
+              <a:rPr lang="en-US" sz="1800" dirty="0">
+                <a:solidFill>
+                  <a:srgbClr val="F8F9FA"/>
+                </a:solidFill>
+              </a:rPr>
+              <a:t>• 分工：dbt </a:t>
+            </a:r>
+            <a:r>
+              <a:rPr lang="en-US" sz="1800" dirty="0" err="1">
+                <a:solidFill>
+                  <a:srgbClr val="F8F9FA"/>
+                </a:solidFill>
+              </a:rPr>
+              <a:t>负责批量物理建模</a:t>
+            </a:r>
+            <a:r>
+              <a:rPr lang="en-US" sz="1800" dirty="0">
+                <a:solidFill>
+                  <a:srgbClr val="F8F9FA"/>
+                </a:solidFill>
+              </a:rPr>
+              <a:t>；</a:t>
+            </a:r>
+            <a:r>
+              <a:rPr lang="zh-CN" altLang="en-US" dirty="0">
+                <a:solidFill>
+                  <a:srgbClr val="F8F9FA"/>
+                </a:solidFill>
+              </a:rPr>
+              <a:t>财务分析</a:t>
+            </a:r>
+            <a:r>
+              <a:rPr lang="en-US" altLang="zh-CN" dirty="0" err="1">
+                <a:solidFill>
+                  <a:srgbClr val="F8F9FA"/>
+                </a:solidFill>
+              </a:rPr>
+              <a:t>agent</a:t>
+            </a:r>
+            <a:r>
+              <a:rPr lang="en-US" sz="1800" dirty="0" err="1">
+                <a:solidFill>
+                  <a:srgbClr val="F8F9FA"/>
+                </a:solidFill>
+              </a:rPr>
+              <a:t>负责</a:t>
+            </a:r>
+            <a:r>
+              <a:rPr lang="en-US" sz="1800" dirty="0">
+                <a:solidFill>
+                  <a:srgbClr val="F8F9FA"/>
+                </a:solidFill>
+              </a:rPr>
+              <a:t> Agent 自然语言接口</a:t>
+            </a:r>
+            <a:endParaRPr lang="en-US" sz="1800" dirty="0"/>
+          </a:p>
+          <a:p>
+            <a:pPr marL="342900" indent="-342900">
+              <a:buSzPct val="100000"/>
+              <a:buChar char="•"/>
+            </a:pPr>
+            <a:r>
+              <a:rPr lang="en-US" sz="1800" dirty="0">
+                <a:solidFill>
+                  <a:srgbClr val="F8F9FA"/>
+                </a:solidFill>
+              </a:rPr>
+              <a:t>• 依赖度：可以没有 dbt (用脚本导入)，但推荐生产栈：</a:t>
+            </a:r>
+            <a:endParaRPr lang="en-US" sz="1800" dirty="0"/>
+          </a:p>
+          <a:p>
+            <a:pPr marL="342900" indent="-342900">
+              <a:buSzPct val="100000"/>
+              <a:buChar char="•"/>
+            </a:pPr>
+            <a:r>
+              <a:rPr lang="en-US" sz="1800" dirty="0">
+                <a:solidFill>
+                  <a:srgbClr val="F8F9FA"/>
+                </a:solidFill>
+              </a:rPr>
+              <a:t>  [ dbt marts ] → [ 语义层/Wren MDL ] → [ Agent ]</a:t>
+            </a:r>
+            <a:endParaRPr lang="en-US" sz="1800" dirty="0"/>
+          </a:p>
+          <a:p>
+            <a:pPr marL="342900" indent="-342900">
+              <a:buSzPct val="100000"/>
+              <a:buChar char="•"/>
+            </a:pPr>
+            <a:r>
+              <a:rPr lang="en-US" sz="1800" dirty="0">
+                <a:solidFill>
+                  <a:srgbClr val="F8F9FA"/>
+                </a:solidFill>
+              </a:rPr>
+              <a:t>• </a:t>
+            </a:r>
+            <a:r>
+              <a:rPr lang="zh-CN" altLang="en-US" dirty="0">
+                <a:solidFill>
+                  <a:srgbClr val="F8F9FA"/>
+                </a:solidFill>
+              </a:rPr>
+              <a:t>财务分析</a:t>
+            </a:r>
+            <a:r>
+              <a:rPr lang="en-US" altLang="zh-CN" dirty="0" err="1">
+                <a:solidFill>
+                  <a:srgbClr val="F8F9FA"/>
+                </a:solidFill>
+              </a:rPr>
+              <a:t>agent</a:t>
+            </a:r>
+            <a:r>
+              <a:rPr lang="en-US" sz="1800" dirty="0" err="1">
+                <a:solidFill>
+                  <a:srgbClr val="F8F9FA"/>
+                </a:solidFill>
+              </a:rPr>
+              <a:t>主要是</a:t>
+            </a:r>
+            <a:r>
+              <a:rPr lang="en-US" sz="1800" dirty="0">
+                <a:solidFill>
+                  <a:srgbClr val="F8F9FA"/>
+                </a:solidFill>
+              </a:rPr>
+              <a:t> marts 的出口之一，与传统 BI 并行</a:t>
+            </a:r>
+            <a:endParaRPr lang="en-US" sz="1800" dirty="0"/>
+          </a:p>
+        </p:txBody>
+      </p:sp>
+    </p:spTree>
+  </p:cSld>
+  <p:clrMapOvr>
+    <a:masterClrMapping/>
+  </p:clrMapOvr>
+</p:sld>
+</file>
+
+<file path=ppt/slides/slide9.xml><?xml version="1.0" encoding="utf-8"?>
+<p:sld xmlns:a="http://schemas.openxmlformats.org/drawingml/2006/main" xmlns:r="http://schemas.openxmlformats.org/officeDocument/2006/relationships" xmlns:p="http://schemas.openxmlformats.org/presentationml/2006/main">
+  <p:cSld name="Slide 11">
     <p:bg>
       <p:bgPr>
         <a:blipFill dpi="0" rotWithShape="1">
-          <a:blip r:embed="rId1">
+          <a:blip r:embed="rId3">
             <a:lum/>
           </a:blip>
           <a:srcRect/>
@@ -7750,7 +5674,7 @@
           <a:bodyPr wrap="square" rtlCol="0" anchor="ctr"/>
           <a:lstStyle/>
           <a:p>
-            <a:pPr algn="ctr" indent="0" marL="0">
+            <a:pPr marL="0" indent="0" algn="ctr">
               <a:buNone/>
             </a:pPr>
             <a:r>
@@ -7759,7 +5683,7 @@
                   <a:srgbClr val="00B4D8"/>
                 </a:solidFill>
               </a:rPr>
-              <a:t>§1. 历史演进</a:t>
+              <a:t>§3. 语义层生态</a:t>
             </a:r>
             <a:endParaRPr lang="en-US" sz="3600" dirty="0"/>
           </a:p>
@@ -7786,7 +5710,7 @@
           <a:bodyPr wrap="square" rtlCol="0" anchor="ctr"/>
           <a:lstStyle/>
           <a:p>
-            <a:pPr algn="ctr" indent="0" marL="0">
+            <a:pPr marL="0" indent="0" algn="ctr">
               <a:buNone/>
             </a:pPr>
             <a:r>
@@ -7795,639 +5719,9 @@
                   <a:srgbClr val="94A3B8"/>
                 </a:solidFill>
               </a:rPr>
-              <a:t>从 IT 报表到 Agent 分析</a:t>
+              <a:t>定义、竞品与 2025 博弈</a:t>
             </a:r>
             <a:endParaRPr lang="en-US" sz="2000" dirty="0"/>
-          </a:p>
-        </p:txBody>
-      </p:sp>
-    </p:spTree>
-  </p:cSld>
-  <p:clrMapOvr>
-    <a:masterClrMapping/>
-  </p:clrMapOvr>
-</p:sld>
-</file>
-
-<file path=ppt/slides/slide6.xml><?xml version="1.0" encoding="utf-8"?>
-<p:sld xmlns:a="http://schemas.openxmlformats.org/drawingml/2006/main" xmlns:r="http://schemas.openxmlformats.org/officeDocument/2006/relationships" xmlns:p="http://schemas.openxmlformats.org/presentationml/2006/main">
-  <p:cSld name="Slide 6">
-    <p:bg>
-      <p:bgPr>
-        <a:solidFill>
-          <a:srgbClr val="1B1F3B"/>
-        </a:solidFill>
-      </p:bgPr>
-    </p:bg>
-    <p:spTree>
-      <p:nvGrpSpPr>
-        <p:cNvPr id="1" name=""/>
-        <p:cNvGrpSpPr/>
-        <p:nvPr/>
-      </p:nvGrpSpPr>
-      <p:grpSpPr>
-        <a:xfrm>
-          <a:off x="0" y="0"/>
-          <a:ext cx="0" cy="0"/>
-          <a:chOff x="0" y="0"/>
-          <a:chExt cx="0" cy="0"/>
-        </a:xfrm>
-      </p:grpSpPr>
-      <p:sp>
-        <p:nvSpPr>
-          <p:cNvPr id="2" name="Text 0"/>
-          <p:cNvSpPr/>
-          <p:nvPr/>
-        </p:nvSpPr>
-        <p:spPr>
-          <a:xfrm>
-            <a:off x="457200" y="274320"/>
-            <a:ext cx="8229600" cy="0"/>
-          </a:xfrm>
-          <a:prstGeom prst="rect">
-            <a:avLst/>
-          </a:prstGeom>
-          <a:noFill/>
-          <a:ln/>
-        </p:spPr>
-        <p:txBody>
-          <a:bodyPr wrap="square" rtlCol="0" anchor="ctr"/>
-          <a:lstStyle/>
-          <a:p>
-            <a:pPr indent="0" marL="0">
-              <a:buNone/>
-            </a:pPr>
-            <a:r>
-              <a:rPr lang="en-US" sz="2400" b="1" dirty="0">
-                <a:solidFill>
-                  <a:srgbClr val="00B4D8"/>
-                </a:solidFill>
-              </a:rPr>
-              <a:t>BI 的四个发展阶段</a:t>
-            </a:r>
-            <a:endParaRPr lang="en-US" sz="2400" dirty="0"/>
-          </a:p>
-        </p:txBody>
-      </p:sp>
-      <p:sp>
-        <p:nvSpPr>
-          <p:cNvPr id="3" name="Shape 1"/>
-          <p:cNvSpPr/>
-          <p:nvPr/>
-        </p:nvSpPr>
-        <p:spPr>
-          <a:xfrm>
-            <a:off x="457200" y="731520"/>
-            <a:ext cx="8229600" cy="0"/>
-          </a:xfrm>
-          <a:prstGeom prst="line">
-            <a:avLst/>
-          </a:prstGeom>
-          <a:noFill/>
-          <a:ln w="25400">
-            <a:solidFill>
-              <a:srgbClr val="00B4D8"/>
-            </a:solidFill>
-            <a:prstDash val="solid"/>
-          </a:ln>
-        </p:spPr>
-      </p:sp>
-      <p:sp>
-        <p:nvSpPr>
-          <p:cNvPr id="4" name="Text 2"/>
-          <p:cNvSpPr/>
-          <p:nvPr/>
-        </p:nvSpPr>
-        <p:spPr>
-          <a:xfrm>
-            <a:off x="457200" y="1097280"/>
-            <a:ext cx="8229600" cy="3600450"/>
-          </a:xfrm>
-          <a:prstGeom prst="rect">
-            <a:avLst/>
-          </a:prstGeom>
-          <a:noFill/>
-          <a:ln/>
-        </p:spPr>
-        <p:txBody>
-          <a:bodyPr wrap="square" rtlCol="0" anchor="t"/>
-          <a:lstStyle/>
-          <a:p>
-            <a:pPr marL="342900" indent="-342900">
-              <a:buSzPct val="100000"/>
-              <a:buChar char="•"/>
-            </a:pPr>
-            <a:r>
-              <a:rPr lang="en-US" sz="1800" dirty="0">
-                <a:solidFill>
-                  <a:srgbClr val="F8F9FA"/>
-                </a:solidFill>
-              </a:rPr>
-              <a:t>1. BI 1.0 (1990s): IT 中心化报表 (Cognos, Oracle BIEE)</a:t>
-            </a:r>
-            <a:endParaRPr lang="en-US" sz="1800" dirty="0"/>
-          </a:p>
-          <a:p>
-            <a:pPr marL="342900" indent="-342900">
-              <a:buSzPct val="100000"/>
-              <a:buChar char="•"/>
-            </a:pPr>
-            <a:r>
-              <a:rPr lang="en-US" sz="1800" dirty="0">
-                <a:solidFill>
-                  <a:srgbClr val="F8F9FA"/>
-                </a:solidFill>
-              </a:rPr>
-              <a:t>2. BI 2.0 (2000s): 自助 BI、拖拽式 (Tableau, Power BI, Superset)</a:t>
-            </a:r>
-            <a:endParaRPr lang="en-US" sz="1800" dirty="0"/>
-          </a:p>
-          <a:p>
-            <a:pPr marL="342900" indent="-342900">
-              <a:buSzPct val="100000"/>
-              <a:buChar char="•"/>
-            </a:pPr>
-            <a:r>
-              <a:rPr lang="en-US" sz="1800" dirty="0">
-                <a:solidFill>
-                  <a:srgbClr val="F8F9FA"/>
-                </a:solidFill>
-              </a:rPr>
-              <a:t>3. BI 3.0 / MDS (2015+): 云仓、dbt、Headless 语义层、BI as Code</a:t>
-            </a:r>
-            <a:endParaRPr lang="en-US" sz="1800" dirty="0"/>
-          </a:p>
-          <a:p>
-            <a:pPr marL="342900" indent="-342900">
-              <a:buSzPct val="100000"/>
-              <a:buChar char="•"/>
-            </a:pPr>
-            <a:r>
-              <a:rPr lang="en-US" sz="1800" dirty="0">
-                <a:solidFill>
-                  <a:srgbClr val="F8F9FA"/>
-                </a:solidFill>
-              </a:rPr>
-              <a:t>4. Agent 分析 (2023+): NL 问数、MCP、语义层成为 AI 基础设施</a:t>
-            </a:r>
-            <a:endParaRPr lang="en-US" sz="1800" dirty="0"/>
-          </a:p>
-        </p:txBody>
-      </p:sp>
-    </p:spTree>
-  </p:cSld>
-  <p:clrMapOvr>
-    <a:masterClrMapping/>
-  </p:clrMapOvr>
-</p:sld>
-</file>
-
-<file path=ppt/slides/slide7.xml><?xml version="1.0" encoding="utf-8"?>
-<p:sld xmlns:a="http://schemas.openxmlformats.org/drawingml/2006/main" xmlns:r="http://schemas.openxmlformats.org/officeDocument/2006/relationships" xmlns:p="http://schemas.openxmlformats.org/presentationml/2006/main">
-  <p:cSld name="Slide 7">
-    <p:bg>
-      <p:bgPr>
-        <a:solidFill>
-          <a:srgbClr val="1B1F3B"/>
-        </a:solidFill>
-      </p:bgPr>
-    </p:bg>
-    <p:spTree>
-      <p:nvGrpSpPr>
-        <p:cNvPr id="1" name=""/>
-        <p:cNvGrpSpPr/>
-        <p:nvPr/>
-      </p:nvGrpSpPr>
-      <p:grpSpPr>
-        <a:xfrm>
-          <a:off x="0" y="0"/>
-          <a:ext cx="0" cy="0"/>
-          <a:chOff x="0" y="0"/>
-          <a:chExt cx="0" cy="0"/>
-        </a:xfrm>
-      </p:grpSpPr>
-      <p:sp>
-        <p:nvSpPr>
-          <p:cNvPr id="2" name="Text 0"/>
-          <p:cNvSpPr/>
-          <p:nvPr/>
-        </p:nvSpPr>
-        <p:spPr>
-          <a:xfrm>
-            <a:off x="457200" y="274320"/>
-            <a:ext cx="8229600" cy="0"/>
-          </a:xfrm>
-          <a:prstGeom prst="rect">
-            <a:avLst/>
-          </a:prstGeom>
-          <a:noFill/>
-          <a:ln/>
-        </p:spPr>
-        <p:txBody>
-          <a:bodyPr wrap="square" rtlCol="0" anchor="ctr"/>
-          <a:lstStyle/>
-          <a:p>
-            <a:pPr indent="0" marL="0">
-              <a:buNone/>
-            </a:pPr>
-            <a:r>
-              <a:rPr lang="en-US" sz="2400" b="1" dirty="0">
-                <a:solidFill>
-                  <a:srgbClr val="00B4D8"/>
-                </a:solidFill>
-              </a:rPr>
-              <a:t>市场背景与开源机会</a:t>
-            </a:r>
-            <a:endParaRPr lang="en-US" sz="2400" dirty="0"/>
-          </a:p>
-        </p:txBody>
-      </p:sp>
-      <p:sp>
-        <p:nvSpPr>
-          <p:cNvPr id="3" name="Shape 1"/>
-          <p:cNvSpPr/>
-          <p:nvPr/>
-        </p:nvSpPr>
-        <p:spPr>
-          <a:xfrm>
-            <a:off x="457200" y="731520"/>
-            <a:ext cx="8229600" cy="0"/>
-          </a:xfrm>
-          <a:prstGeom prst="line">
-            <a:avLst/>
-          </a:prstGeom>
-          <a:noFill/>
-          <a:ln w="25400">
-            <a:solidFill>
-              <a:srgbClr val="00B4D8"/>
-            </a:solidFill>
-            <a:prstDash val="solid"/>
-          </a:ln>
-        </p:spPr>
-      </p:sp>
-      <p:sp>
-        <p:nvSpPr>
-          <p:cNvPr id="4" name="Text 2"/>
-          <p:cNvSpPr/>
-          <p:nvPr/>
-        </p:nvSpPr>
-        <p:spPr>
-          <a:xfrm>
-            <a:off x="457200" y="1097280"/>
-            <a:ext cx="8229600" cy="3600450"/>
-          </a:xfrm>
-          <a:prstGeom prst="rect">
-            <a:avLst/>
-          </a:prstGeom>
-          <a:noFill/>
-          <a:ln/>
-        </p:spPr>
-        <p:txBody>
-          <a:bodyPr wrap="square" rtlCol="0" anchor="t"/>
-          <a:lstStyle/>
-          <a:p>
-            <a:pPr marL="342900" indent="-342900">
-              <a:buSzPct val="100000"/>
-              <a:buChar char="•"/>
-            </a:pPr>
-            <a:r>
-              <a:rPr lang="en-US" sz="1800" dirty="0">
-                <a:solidFill>
-                  <a:srgbClr val="F8F9FA"/>
-                </a:solidFill>
-              </a:rPr>
-              <a:t>• 全球分析市场 (2024): 约 203 亿美元，CAGR ~7%</a:t>
-            </a:r>
-            <a:endParaRPr lang="en-US" sz="1800" dirty="0"/>
-          </a:p>
-          <a:p>
-            <a:pPr marL="342900" indent="-342900">
-              <a:buSzPct val="100000"/>
-              <a:buChar char="•"/>
-            </a:pPr>
-            <a:r>
-              <a:rPr lang="en-US" sz="1800" dirty="0">
-                <a:solidFill>
-                  <a:srgbClr val="F8F9FA"/>
-                </a:solidFill>
-              </a:rPr>
-              <a:t>• 竞争转向：可视化能力商品化，竞争转入 生态 + 数据平台</a:t>
-            </a:r>
-            <a:endParaRPr lang="en-US" sz="1800" dirty="0"/>
-          </a:p>
-          <a:p>
-            <a:pPr marL="342900" indent="-342900">
-              <a:buSzPct val="100000"/>
-              <a:buChar char="•"/>
-            </a:pPr>
-            <a:r>
-              <a:rPr lang="en-US" sz="1800" dirty="0">
-                <a:solidFill>
-                  <a:srgbClr val="F8F9FA"/>
-                </a:solidFill>
-              </a:rPr>
-              <a:t>• 开源价值：无厂商锁定、可组合架构、AI Agent 原生集成</a:t>
-            </a:r>
-            <a:endParaRPr lang="en-US" sz="1800" dirty="0"/>
-          </a:p>
-          <a:p>
-            <a:pPr marL="342900" indent="-342900">
-              <a:buSzPct val="100000"/>
-              <a:buChar char="•"/>
-            </a:pPr>
-            <a:r>
-              <a:rPr lang="en-US" sz="1800" dirty="0">
-                <a:solidFill>
-                  <a:srgbClr val="F8F9FA"/>
-                </a:solidFill>
-              </a:rPr>
-              <a:t>• 2025 趋势：治理 + AI Agent 平台 成为新战场</a:t>
-            </a:r>
-            <a:endParaRPr lang="en-US" sz="1800" dirty="0"/>
-          </a:p>
-        </p:txBody>
-      </p:sp>
-    </p:spTree>
-  </p:cSld>
-  <p:clrMapOvr>
-    <a:masterClrMapping/>
-  </p:clrMapOvr>
-</p:sld>
-</file>
-
-<file path=ppt/slides/slide8.xml><?xml version="1.0" encoding="utf-8"?>
-<p:sld xmlns:a="http://schemas.openxmlformats.org/drawingml/2006/main" xmlns:r="http://schemas.openxmlformats.org/officeDocument/2006/relationships" xmlns:p="http://schemas.openxmlformats.org/presentationml/2006/main">
-  <p:cSld name="Slide 8">
-    <p:bg>
-      <p:bgPr>
-        <a:blipFill dpi="0" rotWithShape="1">
-          <a:blip r:embed="rId1">
-            <a:lum/>
-          </a:blip>
-          <a:srcRect/>
-          <a:stretch>
-            <a:fillRect/>
-          </a:stretch>
-        </a:blipFill>
-        <a:effectLst/>
-      </p:bgPr>
-    </p:bg>
-    <p:spTree>
-      <p:nvGrpSpPr>
-        <p:cNvPr id="1" name=""/>
-        <p:cNvGrpSpPr/>
-        <p:nvPr/>
-      </p:nvGrpSpPr>
-      <p:grpSpPr>
-        <a:xfrm>
-          <a:off x="0" y="0"/>
-          <a:ext cx="0" cy="0"/>
-          <a:chOff x="0" y="0"/>
-          <a:chExt cx="0" cy="0"/>
-        </a:xfrm>
-      </p:grpSpPr>
-      <p:sp>
-        <p:nvSpPr>
-          <p:cNvPr id="2" name="Text 0"/>
-          <p:cNvSpPr/>
-          <p:nvPr/>
-        </p:nvSpPr>
-        <p:spPr>
-          <a:xfrm>
-            <a:off x="914400" y="2743200"/>
-            <a:ext cx="7315200" cy="0"/>
-          </a:xfrm>
-          <a:prstGeom prst="rect">
-            <a:avLst/>
-          </a:prstGeom>
-          <a:noFill/>
-          <a:ln/>
-        </p:spPr>
-        <p:txBody>
-          <a:bodyPr wrap="square" rtlCol="0" anchor="ctr"/>
-          <a:lstStyle/>
-          <a:p>
-            <a:pPr algn="ctr" indent="0" marL="0">
-              <a:buNone/>
-            </a:pPr>
-            <a:r>
-              <a:rPr lang="en-US" sz="3600" b="1" dirty="0">
-                <a:solidFill>
-                  <a:srgbClr val="00B4D8"/>
-                </a:solidFill>
-              </a:rPr>
-              <a:t>§2. 背景层：dbt 与物理建模</a:t>
-            </a:r>
-            <a:endParaRPr lang="en-US" sz="3600" dirty="0"/>
-          </a:p>
-        </p:txBody>
-      </p:sp>
-      <p:sp>
-        <p:nvSpPr>
-          <p:cNvPr id="3" name="Text 1"/>
-          <p:cNvSpPr/>
-          <p:nvPr/>
-        </p:nvSpPr>
-        <p:spPr>
-          <a:xfrm>
-            <a:off x="914400" y="3657600"/>
-            <a:ext cx="7315200" cy="0"/>
-          </a:xfrm>
-          <a:prstGeom prst="rect">
-            <a:avLst/>
-          </a:prstGeom>
-          <a:noFill/>
-          <a:ln/>
-        </p:spPr>
-        <p:txBody>
-          <a:bodyPr wrap="square" rtlCol="0" anchor="ctr"/>
-          <a:lstStyle/>
-          <a:p>
-            <a:pPr algn="ctr" indent="0" marL="0">
-              <a:buNone/>
-            </a:pPr>
-            <a:r>
-              <a:rPr lang="en-US" sz="2000" dirty="0">
-                <a:solidFill>
-                  <a:srgbClr val="94A3B8"/>
-                </a:solidFill>
-              </a:rPr>
-              <a:t>表从哪来？Agent 面对什么？</a:t>
-            </a:r>
-            <a:endParaRPr lang="en-US" sz="2000" dirty="0"/>
-          </a:p>
-        </p:txBody>
-      </p:sp>
-    </p:spTree>
-  </p:cSld>
-  <p:clrMapOvr>
-    <a:masterClrMapping/>
-  </p:clrMapOvr>
-</p:sld>
-</file>
-
-<file path=ppt/slides/slide9.xml><?xml version="1.0" encoding="utf-8"?>
-<p:sld xmlns:a="http://schemas.openxmlformats.org/drawingml/2006/main" xmlns:r="http://schemas.openxmlformats.org/officeDocument/2006/relationships" xmlns:p="http://schemas.openxmlformats.org/presentationml/2006/main">
-  <p:cSld name="Slide 9">
-    <p:bg>
-      <p:bgPr>
-        <a:solidFill>
-          <a:srgbClr val="1B1F3B"/>
-        </a:solidFill>
-      </p:bgPr>
-    </p:bg>
-    <p:spTree>
-      <p:nvGrpSpPr>
-        <p:cNvPr id="1" name=""/>
-        <p:cNvGrpSpPr/>
-        <p:nvPr/>
-      </p:nvGrpSpPr>
-      <p:grpSpPr>
-        <a:xfrm>
-          <a:off x="0" y="0"/>
-          <a:ext cx="0" cy="0"/>
-          <a:chOff x="0" y="0"/>
-          <a:chExt cx="0" cy="0"/>
-        </a:xfrm>
-      </p:grpSpPr>
-      <p:sp>
-        <p:nvSpPr>
-          <p:cNvPr id="2" name="Text 0"/>
-          <p:cNvSpPr/>
-          <p:nvPr/>
-        </p:nvSpPr>
-        <p:spPr>
-          <a:xfrm>
-            <a:off x="457200" y="274320"/>
-            <a:ext cx="8229600" cy="0"/>
-          </a:xfrm>
-          <a:prstGeom prst="rect">
-            <a:avLst/>
-          </a:prstGeom>
-          <a:noFill/>
-          <a:ln/>
-        </p:spPr>
-        <p:txBody>
-          <a:bodyPr wrap="square" rtlCol="0" anchor="ctr"/>
-          <a:lstStyle/>
-          <a:p>
-            <a:pPr indent="0" marL="0">
-              <a:buNone/>
-            </a:pPr>
-            <a:r>
-              <a:rPr lang="en-US" sz="2400" b="1" dirty="0">
-                <a:solidFill>
-                  <a:srgbClr val="00B4D8"/>
-                </a:solidFill>
-              </a:rPr>
-              <a:t>dbt: 数据仓库的生产线</a:t>
-            </a:r>
-            <a:endParaRPr lang="en-US" sz="2400" dirty="0"/>
-          </a:p>
-        </p:txBody>
-      </p:sp>
-      <p:sp>
-        <p:nvSpPr>
-          <p:cNvPr id="3" name="Shape 1"/>
-          <p:cNvSpPr/>
-          <p:nvPr/>
-        </p:nvSpPr>
-        <p:spPr>
-          <a:xfrm>
-            <a:off x="457200" y="731520"/>
-            <a:ext cx="8229600" cy="0"/>
-          </a:xfrm>
-          <a:prstGeom prst="line">
-            <a:avLst/>
-          </a:prstGeom>
-          <a:noFill/>
-          <a:ln w="25400">
-            <a:solidFill>
-              <a:srgbClr val="00B4D8"/>
-            </a:solidFill>
-            <a:prstDash val="solid"/>
-          </a:ln>
-        </p:spPr>
-      </p:sp>
-      <p:sp>
-        <p:nvSpPr>
-          <p:cNvPr id="4" name="Text 2"/>
-          <p:cNvSpPr/>
-          <p:nvPr/>
-        </p:nvSpPr>
-        <p:spPr>
-          <a:xfrm>
-            <a:off x="457200" y="1097280"/>
-            <a:ext cx="8229600" cy="3600450"/>
-          </a:xfrm>
-          <a:prstGeom prst="rect">
-            <a:avLst/>
-          </a:prstGeom>
-          <a:noFill/>
-          <a:ln/>
-        </p:spPr>
-        <p:txBody>
-          <a:bodyPr wrap="square" rtlCol="0" anchor="t"/>
-          <a:lstStyle/>
-          <a:p>
-            <a:pPr marL="342900" indent="-342900">
-              <a:buSzPct val="100000"/>
-              <a:buChar char="•"/>
-            </a:pPr>
-            <a:r>
-              <a:rPr lang="en-US" sz="1800" dirty="0">
-                <a:solidFill>
-                  <a:srgbClr val="F8F9FA"/>
-                </a:solidFill>
-              </a:rPr>
-              <a:t>• dbt-core: 开源建模核心</a:t>
-            </a:r>
-            <a:endParaRPr lang="en-US" sz="1800" dirty="0"/>
-          </a:p>
-          <a:p>
-            <a:pPr marL="342900" indent="-342900">
-              <a:buSzPct val="100000"/>
-              <a:buChar char="•"/>
-            </a:pPr>
-            <a:r>
-              <a:rPr lang="en-US" sz="1800" dirty="0">
-                <a:solidFill>
-                  <a:srgbClr val="F8F9FA"/>
-                </a:solidFill>
-              </a:rPr>
-              <a:t>• 建模流程：raw → staging → intermediate → marts</a:t>
-            </a:r>
-            <a:endParaRPr lang="en-US" sz="1800" dirty="0"/>
-          </a:p>
-          <a:p>
-            <a:pPr marL="342900" indent="-342900">
-              <a:buSzPct val="100000"/>
-              <a:buChar char="•"/>
-            </a:pPr>
-            <a:r>
-              <a:rPr lang="en-US" sz="1800" dirty="0">
-                <a:solidFill>
-                  <a:srgbClr val="F8F9FA"/>
-                </a:solidFill>
-              </a:rPr>
-              <a:t>• 核心价值：将原始 Schema 整理成 '业务可查的表'</a:t>
-            </a:r>
-            <a:endParaRPr lang="en-US" sz="1800" dirty="0"/>
-          </a:p>
-          <a:p>
-            <a:pPr marL="342900" indent="-342900">
-              <a:buSzPct val="100000"/>
-              <a:buChar char="•"/>
-            </a:pPr>
-            <a:r>
-              <a:rPr lang="en-US" sz="1800" dirty="0">
-                <a:solidFill>
-                  <a:srgbClr val="F8F9FA"/>
-                </a:solidFill>
-              </a:rPr>
-              <a:t>• 物理护拦：无此层，语义层与 Agent 将面对混乱数据源</a:t>
-            </a:r>
-            <a:endParaRPr lang="en-US" sz="1800" dirty="0"/>
           </a:p>
         </p:txBody>
       </p:sp>
@@ -8732,4 +6026,299 @@
     </a:ext>
   </a:extLst>
 </a:theme>
+</file>
+
+<file path=ppt/theme/theme2.xml><?xml version="1.0" encoding="utf-8"?>
+<a:theme xmlns:a="http://schemas.openxmlformats.org/drawingml/2006/main" name="Office 主题​​">
+  <a:themeElements>
+    <a:clrScheme name="Office">
+      <a:dk1>
+        <a:sysClr val="windowText" lastClr="000000"/>
+      </a:dk1>
+      <a:lt1>
+        <a:sysClr val="window" lastClr="FFFFFF"/>
+      </a:lt1>
+      <a:dk2>
+        <a:srgbClr val="44546A"/>
+      </a:dk2>
+      <a:lt2>
+        <a:srgbClr val="E7E6E6"/>
+      </a:lt2>
+      <a:accent1>
+        <a:srgbClr val="4472C4"/>
+      </a:accent1>
+      <a:accent2>
+        <a:srgbClr val="ED7D31"/>
+      </a:accent2>
+      <a:accent3>
+        <a:srgbClr val="A5A5A5"/>
+      </a:accent3>
+      <a:accent4>
+        <a:srgbClr val="FFC000"/>
+      </a:accent4>
+      <a:accent5>
+        <a:srgbClr val="5B9BD5"/>
+      </a:accent5>
+      <a:accent6>
+        <a:srgbClr val="70AD47"/>
+      </a:accent6>
+      <a:hlink>
+        <a:srgbClr val="0563C1"/>
+      </a:hlink>
+      <a:folHlink>
+        <a:srgbClr val="954F72"/>
+      </a:folHlink>
+    </a:clrScheme>
+    <a:fontScheme name="Office">
+      <a:majorFont>
+        <a:latin typeface="等线 Light" panose="020F0302020204030204"/>
+        <a:ea typeface=""/>
+        <a:cs typeface=""/>
+        <a:font script="Jpan" typeface="游ゴシック Light"/>
+        <a:font script="Hang" typeface="맑은 고딕"/>
+        <a:font script="Hans" typeface="等线 Light"/>
+        <a:font script="Hant" typeface="新細明體"/>
+        <a:font script="Arab" typeface="Times New Roman"/>
+        <a:font script="Hebr" typeface="Times New Roman"/>
+        <a:font script="Thai" typeface="Angsana New"/>
+        <a:font script="Ethi" typeface="Nyala"/>
+        <a:font script="Beng" typeface="Vrinda"/>
+        <a:font script="Gujr" typeface="Shruti"/>
+        <a:font script="Khmr" typeface="MoolBoran"/>
+        <a:font script="Knda" typeface="Tunga"/>
+        <a:font script="Guru" typeface="Raavi"/>
+        <a:font script="Cans" typeface="Euphemia"/>
+        <a:font script="Cher" typeface="Plantagenet Cherokee"/>
+        <a:font script="Yiii" typeface="Microsoft Yi Baiti"/>
+        <a:font script="Tibt" typeface="Microsoft Himalaya"/>
+        <a:font script="Thaa" typeface="MV Boli"/>
+        <a:font script="Deva" typeface="Mangal"/>
+        <a:font script="Telu" typeface="Gautami"/>
+        <a:font script="Taml" typeface="Latha"/>
+        <a:font script="Syrc" typeface="Estrangelo Edessa"/>
+        <a:font script="Orya" typeface="Kalinga"/>
+        <a:font script="Mlym" typeface="Kartika"/>
+        <a:font script="Laoo" typeface="DokChampa"/>
+        <a:font script="Sinh" typeface="Iskoola Pota"/>
+        <a:font script="Mong" typeface="Mongolian Baiti"/>
+        <a:font script="Viet" typeface="Times New Roman"/>
+        <a:font script="Uigh" typeface="Microsoft Uighur"/>
+        <a:font script="Geor" typeface="Sylfaen"/>
+        <a:font script="Armn" typeface="Arial"/>
+        <a:font script="Bugi" typeface="Leelawadee UI"/>
+        <a:font script="Bopo" typeface="Microsoft JhengHei"/>
+        <a:font script="Java" typeface="Javanese Text"/>
+        <a:font script="Lisu" typeface="Segoe UI"/>
+        <a:font script="Mymr" typeface="Myanmar Text"/>
+        <a:font script="Nkoo" typeface="Ebrima"/>
+        <a:font script="Olck" typeface="Nirmala UI"/>
+        <a:font script="Osma" typeface="Ebrima"/>
+        <a:font script="Phag" typeface="Phagspa"/>
+        <a:font script="Syrn" typeface="Estrangelo Edessa"/>
+        <a:font script="Syrj" typeface="Estrangelo Edessa"/>
+        <a:font script="Syre" typeface="Estrangelo Edessa"/>
+        <a:font script="Sora" typeface="Nirmala UI"/>
+        <a:font script="Tale" typeface="Microsoft Tai Le"/>
+        <a:font script="Talu" typeface="Microsoft New Tai Lue"/>
+        <a:font script="Tfng" typeface="Ebrima"/>
+      </a:majorFont>
+      <a:minorFont>
+        <a:latin typeface="等线" panose="020F0502020204030204"/>
+        <a:ea typeface=""/>
+        <a:cs typeface=""/>
+        <a:font script="Jpan" typeface="游ゴシック"/>
+        <a:font script="Hang" typeface="맑은 고딕"/>
+        <a:font script="Hans" typeface="等线"/>
+        <a:font script="Hant" typeface="新細明體"/>
+        <a:font script="Arab" typeface="Arial"/>
+        <a:font script="Hebr" typeface="Arial"/>
+        <a:font script="Thai" typeface="Cordia New"/>
+        <a:font script="Ethi" typeface="Nyala"/>
+        <a:font script="Beng" typeface="Vrinda"/>
+        <a:font script="Gujr" typeface="Shruti"/>
+        <a:font script="Khmr" typeface="DaunPenh"/>
+        <a:font script="Knda" typeface="Tunga"/>
+        <a:font script="Guru" typeface="Raavi"/>
+        <a:font script="Cans" typeface="Euphemia"/>
+        <a:font script="Cher" typeface="Plantagenet Cherokee"/>
+        <a:font script="Yiii" typeface="Microsoft Yi Baiti"/>
+        <a:font script="Tibt" typeface="Microsoft Himalaya"/>
+        <a:font script="Thaa" typeface="MV Boli"/>
+        <a:font script="Deva" typeface="Mangal"/>
+        <a:font script="Telu" typeface="Gautami"/>
+        <a:font script="Taml" typeface="Latha"/>
+        <a:font script="Syrc" typeface="Estrangelo Edessa"/>
+        <a:font script="Orya" typeface="Kalinga"/>
+        <a:font script="Mlym" typeface="Kartika"/>
+        <a:font script="Laoo" typeface="DokChampa"/>
+        <a:font script="Sinh" typeface="Iskoola Pota"/>
+        <a:font script="Mong" typeface="Mongolian Baiti"/>
+        <a:font script="Viet" typeface="Arial"/>
+        <a:font script="Uigh" typeface="Microsoft Uighur"/>
+        <a:font script="Geor" typeface="Sylfaen"/>
+        <a:font script="Armn" typeface="Arial"/>
+        <a:font script="Bugi" typeface="Leelawadee UI"/>
+        <a:font script="Bopo" typeface="Microsoft JhengHei"/>
+        <a:font script="Java" typeface="Javanese Text"/>
+        <a:font script="Lisu" typeface="Segoe UI"/>
+        <a:font script="Mymr" typeface="Myanmar Text"/>
+        <a:font script="Nkoo" typeface="Ebrima"/>
+        <a:font script="Olck" typeface="Nirmala UI"/>
+        <a:font script="Osma" typeface="Ebrima"/>
+        <a:font script="Phag" typeface="Phagspa"/>
+        <a:font script="Syrn" typeface="Estrangelo Edessa"/>
+        <a:font script="Syrj" typeface="Estrangelo Edessa"/>
+        <a:font script="Syre" typeface="Estrangelo Edessa"/>
+        <a:font script="Sora" typeface="Nirmala UI"/>
+        <a:font script="Tale" typeface="Microsoft Tai Le"/>
+        <a:font script="Talu" typeface="Microsoft New Tai Lue"/>
+        <a:font script="Tfng" typeface="Ebrima"/>
+      </a:minorFont>
+    </a:fontScheme>
+    <a:fmtScheme name="Office">
+      <a:fillStyleLst>
+        <a:solidFill>
+          <a:schemeClr val="phClr"/>
+        </a:solidFill>
+        <a:gradFill rotWithShape="1">
+          <a:gsLst>
+            <a:gs pos="0">
+              <a:schemeClr val="phClr">
+                <a:lumMod val="110000"/>
+                <a:satMod val="105000"/>
+                <a:tint val="67000"/>
+              </a:schemeClr>
+            </a:gs>
+            <a:gs pos="50000">
+              <a:schemeClr val="phClr">
+                <a:lumMod val="105000"/>
+                <a:satMod val="103000"/>
+                <a:tint val="73000"/>
+              </a:schemeClr>
+            </a:gs>
+            <a:gs pos="100000">
+              <a:schemeClr val="phClr">
+                <a:lumMod val="105000"/>
+                <a:satMod val="109000"/>
+                <a:tint val="81000"/>
+              </a:schemeClr>
+            </a:gs>
+          </a:gsLst>
+          <a:lin ang="5400000" scaled="0"/>
+        </a:gradFill>
+        <a:gradFill rotWithShape="1">
+          <a:gsLst>
+            <a:gs pos="0">
+              <a:schemeClr val="phClr">
+                <a:satMod val="103000"/>
+                <a:lumMod val="102000"/>
+                <a:tint val="94000"/>
+              </a:schemeClr>
+            </a:gs>
+            <a:gs pos="50000">
+              <a:schemeClr val="phClr">
+                <a:satMod val="110000"/>
+                <a:lumMod val="100000"/>
+                <a:shade val="100000"/>
+              </a:schemeClr>
+            </a:gs>
+            <a:gs pos="100000">
+              <a:schemeClr val="phClr">
+                <a:lumMod val="99000"/>
+                <a:satMod val="120000"/>
+                <a:shade val="78000"/>
+              </a:schemeClr>
+            </a:gs>
+          </a:gsLst>
+          <a:lin ang="5400000" scaled="0"/>
+        </a:gradFill>
+      </a:fillStyleLst>
+      <a:lnStyleLst>
+        <a:ln w="6350" cap="flat" cmpd="sng" algn="ctr">
+          <a:solidFill>
+            <a:schemeClr val="phClr"/>
+          </a:solidFill>
+          <a:prstDash val="solid"/>
+          <a:miter lim="800000"/>
+        </a:ln>
+        <a:ln w="12700" cap="flat" cmpd="sng" algn="ctr">
+          <a:solidFill>
+            <a:schemeClr val="phClr"/>
+          </a:solidFill>
+          <a:prstDash val="solid"/>
+          <a:miter lim="800000"/>
+        </a:ln>
+        <a:ln w="19050" cap="flat" cmpd="sng" algn="ctr">
+          <a:solidFill>
+            <a:schemeClr val="phClr"/>
+          </a:solidFill>
+          <a:prstDash val="solid"/>
+          <a:miter lim="800000"/>
+        </a:ln>
+      </a:lnStyleLst>
+      <a:effectStyleLst>
+        <a:effectStyle>
+          <a:effectLst/>
+        </a:effectStyle>
+        <a:effectStyle>
+          <a:effectLst/>
+        </a:effectStyle>
+        <a:effectStyle>
+          <a:effectLst>
+            <a:outerShdw blurRad="57150" dist="19050" dir="5400000" algn="ctr" rotWithShape="0">
+              <a:srgbClr val="000000">
+                <a:alpha val="63000"/>
+              </a:srgbClr>
+            </a:outerShdw>
+          </a:effectLst>
+        </a:effectStyle>
+      </a:effectStyleLst>
+      <a:bgFillStyleLst>
+        <a:solidFill>
+          <a:schemeClr val="phClr"/>
+        </a:solidFill>
+        <a:solidFill>
+          <a:schemeClr val="phClr">
+            <a:tint val="95000"/>
+            <a:satMod val="170000"/>
+          </a:schemeClr>
+        </a:solidFill>
+        <a:gradFill rotWithShape="1">
+          <a:gsLst>
+            <a:gs pos="0">
+              <a:schemeClr val="phClr">
+                <a:tint val="93000"/>
+                <a:satMod val="150000"/>
+                <a:shade val="98000"/>
+                <a:lumMod val="102000"/>
+              </a:schemeClr>
+            </a:gs>
+            <a:gs pos="50000">
+              <a:schemeClr val="phClr">
+                <a:tint val="98000"/>
+                <a:satMod val="130000"/>
+                <a:shade val="90000"/>
+                <a:lumMod val="103000"/>
+              </a:schemeClr>
+            </a:gs>
+            <a:gs pos="100000">
+              <a:schemeClr val="phClr">
+                <a:shade val="63000"/>
+                <a:satMod val="120000"/>
+              </a:schemeClr>
+            </a:gs>
+          </a:gsLst>
+          <a:lin ang="5400000" scaled="0"/>
+        </a:gradFill>
+      </a:bgFillStyleLst>
+    </a:fmtScheme>
+  </a:themeElements>
+  <a:objectDefaults/>
+  <a:extraClrSchemeLst/>
+  <a:extLst>
+    <a:ext uri="{05A4C25C-085E-4340-85A3-A5531E510DB2}">
+      <thm15:themeFamily xmlns:thm15="http://schemas.microsoft.com/office/thememl/2012/main" name="Office Theme" id="{62F939B6-93AF-4DB8-9C6B-D6C7DFDC589F}" vid="{4A3C46E8-61CC-4603-A589-7422A47A8E4A}"/>
+    </a:ext>
+  </a:extLst>
+</a:theme>
 </file>